--- a/decks/why-you-cant-start-lesson-v2.pptx
+++ b/decks/why-you-cant-start-lesson-v2.pptx
@@ -19,6 +19,7 @@
     <p:sldId id="267" r:id="rId19"/>
     <p:sldId id="268" r:id="rId20"/>
     <p:sldId id="269" r:id="rId21"/>
+    <p:sldId id="270" r:id="rId22"/>
   </p:sldIdLst>
   <p:sldSz cx="12192000" cy="6858000" type="screen4x3"/>
   <p:notesSz cx="6858000" cy="9144000"/>
@@ -515,7 +516,7 @@
           <a:lstStyle/>
           <a:p>
             <a:r>
-              <a:t>This page and the next three are hidden. They stay in the deck for you and are skipped when you present.</a:t>
+              <a:t>This page is hidden and skipped when you present. The full plan, care notes and research are on the hidden pages at the end of the deck, if you want them.</a:t>
             </a:r>
           </a:p>
         </p:txBody>
@@ -656,6 +657,76 @@
           <a:p>
             <a:r>
               <a:t>3 MINUTES. Collect anonymously, or let students keep it. Before they go, name when to ask for more help: can't start things in most classes no matter what they try; losing track of time or finishing little for as long as they can remember; avoiding work comes with feeling anxious, flat or hopeless most days; so far behind that catching up feels impossible. A counselor can help sort it out and talk with teachers about a plan. Share the BVR Diner link on the slide (post it on your class page too). It has the four levers, the if-then plan, a private check-in and who to talk to.</a:t>
+            </a:r>
+          </a:p>
+        </p:txBody>
+      </p:sp>
+      <p:sp>
+        <p:nvSpPr>
+          <p:cNvPr id="4" name="Slide Number Placeholder 3"/>
+          <p:cNvSpPr>
+            <a:spLocks noGrp="1"/>
+          </p:cNvSpPr>
+          <p:nvPr>
+            <p:ph type="sldNum" idx="5" sz="quarter"/>
+          </p:nvPr>
+        </p:nvSpPr>
+        <p:spPr/>
+      </p:sp>
+    </p:spTree>
+  </p:cSld>
+  <p:clrMapOvr>
+    <a:masterClrMapping/>
+  </p:clrMapOvr>
+</p:notes>
+</file>
+
+<file path=ppt/notesSlides/notesSlide12.xml><?xml version="1.0" encoding="utf-8"?>
+<p:notes xmlns:a="http://schemas.openxmlformats.org/drawingml/2006/main" xmlns:p="http://schemas.openxmlformats.org/presentationml/2006/main" xmlns:r="http://schemas.openxmlformats.org/officeDocument/2006/relationships">
+  <p:cSld>
+    <p:spTree>
+      <p:nvGrpSpPr>
+        <p:cNvPr id="1" name=""/>
+        <p:cNvGrpSpPr/>
+        <p:nvPr/>
+      </p:nvGrpSpPr>
+      <p:grpSpPr>
+        <a:xfrm>
+          <a:off x="0" y="0"/>
+          <a:ext cx="0" cy="0"/>
+          <a:chOff x="0" y="0"/>
+          <a:chExt cx="0" cy="0"/>
+        </a:xfrm>
+      </p:grpSpPr>
+      <p:sp>
+        <p:nvSpPr>
+          <p:cNvPr id="2" name="Slide Image Placeholder 1"/>
+          <p:cNvSpPr>
+            <a:spLocks noGrp="1"/>
+          </p:cNvSpPr>
+          <p:nvPr>
+            <p:ph type="sldImg" idx="2"/>
+          </p:nvPr>
+        </p:nvSpPr>
+        <p:spPr/>
+      </p:sp>
+      <p:sp>
+        <p:nvSpPr>
+          <p:cNvPr id="3" name="Notes Placeholder 2"/>
+          <p:cNvSpPr>
+            <a:spLocks noGrp="1"/>
+          </p:cNvSpPr>
+          <p:nvPr>
+            <p:ph type="body" idx="3" sz="quarter"/>
+          </p:nvPr>
+        </p:nvSpPr>
+        <p:spPr/>
+        <p:txBody>
+          <a:bodyPr/>
+          <a:lstStyle/>
+          <a:p>
+            <a:r>
+              <a:t>If you want more: this page and the next three are hidden and skipped when you present.</a:t>
             </a:r>
           </a:p>
         </p:txBody>
@@ -4307,7 +4378,7 @@
                 </a:solidFill>
                 <a:latin typeface="Inter Tight"/>
               </a:rPr>
-              <a:t>TEACHER PAGE  ·  skipped when you present  ·  Lesson plan</a:t>
+              <a:t>TEACHER PAGE  ·  skipped when you present  ·  Before you start</a:t>
             </a:r>
           </a:p>
         </p:txBody>
@@ -4398,8 +4469,8 @@
         </p:nvSpPr>
         <p:spPr>
           <a:xfrm>
-            <a:off x="548640" y="1828800"/>
-            <a:ext cx="5120640" cy="4389120"/>
+            <a:off x="548640" y="2011680"/>
+            <a:ext cx="11064240" cy="4206240"/>
           </a:xfrm>
           <a:prstGeom prst="rect">
             <a:avLst/>
@@ -4414,43 +4485,43 @@
           <a:p>
             <a:pPr algn="l">
               <a:spcAft>
-                <a:spcPts val="675"/>
-              </a:spcAft>
-            </a:pPr>
-            <a:r>
-              <a:rPr sz="1100" b="1" i="0">
+                <a:spcPts val="810"/>
+              </a:spcAft>
+            </a:pPr>
+            <a:r>
+              <a:rPr sz="1200" b="1" i="0">
                 <a:solidFill>
                   <a:srgbClr val="0B2D5B"/>
                 </a:solidFill>
                 <a:latin typeface="Inter Tight"/>
               </a:rPr>
-              <a:t>GOAL</a:t>
-            </a:r>
-          </a:p>
-          <a:p>
-            <a:pPr algn="l">
-              <a:spcAft>
-                <a:spcPts val="675"/>
-              </a:spcAft>
-            </a:pPr>
-            <a:r>
-              <a:rPr sz="1500" b="0" i="0">
+              <a:t>BEFORE YOU START</a:t>
+            </a:r>
+          </a:p>
+          <a:p>
+            <a:pPr algn="l">
+              <a:spcAft>
+                <a:spcPts val="810"/>
+              </a:spcAft>
+            </a:pPr>
+            <a:r>
+              <a:rPr sz="1800" b="0" i="0">
                 <a:solidFill>
                   <a:srgbClr val="1C1B19"/>
                 </a:solidFill>
                 <a:latin typeface="Source Serif 4"/>
               </a:rPr>
-              <a:t>Students can explain procrastination as avoiding a feeling (short-term mood repair), see why "I work better under pressure" backfires, and leave with one if-then plan for a real task they've been putting off. The aim is a method. Nobody should leave thinking they're lazy.</a:t>
-            </a:r>
-          </a:p>
-          <a:p>
-            <a:pPr algn="l">
-              <a:spcAft>
-                <a:spcPts val="675"/>
-              </a:spcAft>
-            </a:pPr>
-            <a:r>
-              <a:rPr sz="1500" b="0" i="0">
+              <a:t>Students learn that procrastination is avoiding a feeling, why "I work better under pressure" backfires, and leave with one if-then plan. Bring index cards, treat it as a feeling problem, and keep what each student is avoiding private.</a:t>
+            </a:r>
+          </a:p>
+          <a:p>
+            <a:pPr algn="l">
+              <a:spcAft>
+                <a:spcPts val="810"/>
+              </a:spcAft>
+            </a:pPr>
+            <a:r>
+              <a:rPr sz="1800" b="0" i="0">
                 <a:solidFill>
                   <a:srgbClr val="1C1B19"/>
                 </a:solidFill>
@@ -4462,346 +4533,75 @@
           <a:p>
             <a:pPr algn="l">
               <a:spcAft>
-                <a:spcPts val="675"/>
-              </a:spcAft>
-            </a:pPr>
-            <a:r>
-              <a:rPr sz="1100" b="1" i="0">
+                <a:spcPts val="810"/>
+              </a:spcAft>
+            </a:pPr>
+            <a:r>
+              <a:rPr sz="1200" b="1" i="0">
                 <a:solidFill>
                   <a:srgbClr val="0B2D5B"/>
                 </a:solidFill>
                 <a:latin typeface="Inter Tight"/>
               </a:rPr>
-              <a:t>MATERIALS</a:t>
-            </a:r>
-          </a:p>
-          <a:p>
-            <a:pPr algn="l">
-              <a:spcAft>
-                <a:spcPts val="675"/>
-              </a:spcAft>
-            </a:pPr>
-            <a:r>
-              <a:rPr sz="1500" b="0" i="0">
+              <a:t>EVERY STUDENT IN THE ROOM</a:t>
+            </a:r>
+          </a:p>
+          <a:p>
+            <a:pPr algn="l">
+              <a:spcAft>
+                <a:spcPts val="810"/>
+              </a:spcAft>
+            </a:pPr>
+            <a:r>
+              <a:rPr sz="1800" b="0" i="0">
                 <a:solidFill>
                   <a:srgbClr val="1C1B19"/>
                 </a:solidFill>
                 <a:latin typeface="Source Serif 4"/>
               </a:rPr>
-              <a:t>Index cards for the anonymous feelings round and the exit card</a:t>
-            </a:r>
-          </a:p>
-          <a:p>
-            <a:pPr algn="l">
-              <a:spcAft>
-                <a:spcPts val="675"/>
-              </a:spcAft>
-            </a:pPr>
-            <a:r>
-              <a:rPr sz="1500" b="0" i="0">
+              <a:t>For students with ADHD willpower talk makes it worse, and "put the phone in another room" assumes another room, so a bag or a drawer works too.</a:t>
+            </a:r>
+          </a:p>
+          <a:p>
+            <a:pPr algn="l">
+              <a:spcAft>
+                <a:spcPts val="810"/>
+              </a:spcAft>
+            </a:pPr>
+            <a:r>
+              <a:rPr sz="1800" b="0" i="0">
                 <a:solidFill>
                   <a:srgbClr val="1C1B19"/>
                 </a:solidFill>
                 <a:latin typeface="Source Serif 4"/>
               </a:rPr>
-              <a:t>Scrap paper for the private if-then plan</a:t>
-            </a:r>
-          </a:p>
-          <a:p>
-            <a:pPr algn="l">
-              <a:spcAft>
-                <a:spcPts val="675"/>
-              </a:spcAft>
-            </a:pPr>
-            <a:r>
-              <a:rPr sz="1500" b="0" i="0">
-                <a:solidFill>
-                  <a:srgbClr val="1C1B19"/>
-                </a:solidFill>
-                <a:latin typeface="Source Serif 4"/>
-              </a:rPr>
-              <a:t>The BVR Diner page link (last slide) to share after class</a:t>
-            </a:r>
-          </a:p>
-        </p:txBody>
-      </p:sp>
-      <p:sp>
-        <p:nvSpPr>
-          <p:cNvPr id="7" name="TextBox 6"/>
-          <p:cNvSpPr txBox="1"/>
-          <p:nvPr/>
-        </p:nvSpPr>
-        <p:spPr>
-          <a:xfrm>
-            <a:off x="6126480" y="1828800"/>
-            <a:ext cx="5486400" cy="4389120"/>
-          </a:xfrm>
-          <a:prstGeom prst="rect">
-            <a:avLst/>
-          </a:prstGeom>
-          <a:noFill/>
-        </p:spPr>
-        <p:txBody>
-          <a:bodyPr wrap="square" anchor="t" lIns="0" rIns="0" tIns="0" bIns="0">
-            <a:spAutoFit/>
-          </a:bodyPr>
-          <a:lstStyle/>
-          <a:p>
-            <a:pPr algn="l">
-              <a:spcAft>
-                <a:spcPts val="630"/>
-              </a:spcAft>
-            </a:pPr>
-            <a:r>
-              <a:rPr sz="1100" b="1" i="0">
+              <a:t/>
+            </a:r>
+          </a:p>
+          <a:p>
+            <a:pPr algn="l">
+              <a:spcAft>
+                <a:spcPts val="810"/>
+              </a:spcAft>
+            </a:pPr>
+            <a:r>
+              <a:rPr sz="1200" b="1" i="0">
                 <a:solidFill>
                   <a:srgbClr val="0B2D5B"/>
                 </a:solidFill>
                 <a:latin typeface="Inter Tight"/>
               </a:rPr>
-              <a:t>FLOW</a:t>
-            </a:r>
-          </a:p>
-          <a:p>
-            <a:pPr algn="l">
-              <a:spcAft>
-                <a:spcPts val="630"/>
-              </a:spcAft>
-            </a:pPr>
-            <a:r>
-              <a:rPr sz="1300" b="1" i="0">
-                <a:solidFill>
-                  <a:srgbClr val="F47B20"/>
-                </a:solidFill>
-                <a:latin typeface="Inter Tight"/>
-              </a:rPr>
-              <a:t>5 min   </a:t>
-            </a:r>
-            <a:r>
-              <a:rPr sz="1400" b="0" i="0">
-                <a:solidFill>
-                  <a:srgbClr val="1C1B19"/>
-                </a:solidFill>
-                <a:latin typeface="Source Serif 4"/>
-              </a:rPr>
-              <a:t>Myth or fact (stand up, sit down)</a:t>
-            </a:r>
-          </a:p>
-          <a:p>
-            <a:pPr algn="l">
-              <a:spcAft>
-                <a:spcPts val="630"/>
-              </a:spcAft>
-            </a:pPr>
-            <a:r>
-              <a:rPr sz="1300" b="1" i="0">
-                <a:solidFill>
-                  <a:srgbClr val="F47B20"/>
-                </a:solidFill>
-                <a:latin typeface="Inter Tight"/>
-              </a:rPr>
-              <a:t>8 min   </a:t>
-            </a:r>
-            <a:r>
-              <a:rPr sz="1400" b="0" i="0">
-                <a:solidFill>
-                  <a:srgbClr val="1C1B19"/>
-                </a:solidFill>
-                <a:latin typeface="Source Serif 4"/>
-              </a:rPr>
-              <a:t>The avoidance loop</a:t>
-            </a:r>
-          </a:p>
-          <a:p>
-            <a:pPr algn="l">
-              <a:spcAft>
-                <a:spcPts val="630"/>
-              </a:spcAft>
-            </a:pPr>
-            <a:r>
-              <a:rPr sz="1300" b="1" i="0">
-                <a:solidFill>
-                  <a:srgbClr val="F47B20"/>
-                </a:solidFill>
-                <a:latin typeface="Inter Tight"/>
-              </a:rPr>
-              <a:t>5 min   </a:t>
-            </a:r>
-            <a:r>
-              <a:rPr sz="1400" b="0" i="0">
-                <a:solidFill>
-                  <a:srgbClr val="1C1B19"/>
-                </a:solidFill>
-                <a:latin typeface="Source Serif 4"/>
-              </a:rPr>
-              <a:t>The feeling underneath (anonymous cards)</a:t>
-            </a:r>
-          </a:p>
-          <a:p>
-            <a:pPr algn="l">
-              <a:spcAft>
-                <a:spcPts val="630"/>
-              </a:spcAft>
-            </a:pPr>
-            <a:r>
-              <a:rPr sz="1300" b="1" i="0">
-                <a:solidFill>
-                  <a:srgbClr val="F47B20"/>
-                </a:solidFill>
-                <a:latin typeface="Inter Tight"/>
-              </a:rPr>
-              <a:t>4 min   </a:t>
-            </a:r>
-            <a:r>
-              <a:rPr sz="1400" b="0" i="0">
-                <a:solidFill>
-                  <a:srgbClr val="1C1B19"/>
-                </a:solidFill>
-                <a:latin typeface="Source Serif 4"/>
-              </a:rPr>
-              <a:t>"I work better under pressure"</a:t>
-            </a:r>
-          </a:p>
-          <a:p>
-            <a:pPr algn="l">
-              <a:spcAft>
-                <a:spcPts val="630"/>
-              </a:spcAft>
-            </a:pPr>
-            <a:r>
-              <a:rPr sz="1300" b="1" i="0">
-                <a:solidFill>
-                  <a:srgbClr val="F47B20"/>
-                </a:solidFill>
-                <a:latin typeface="Inter Tight"/>
-              </a:rPr>
-              <a:t>7 min   </a:t>
-            </a:r>
-            <a:r>
-              <a:rPr sz="1400" b="0" i="0">
-                <a:solidFill>
-                  <a:srgbClr val="1C1B19"/>
-                </a:solidFill>
-                <a:latin typeface="Source Serif 4"/>
-              </a:rPr>
-              <a:t>Four levers you can pull</a:t>
-            </a:r>
-          </a:p>
-          <a:p>
-            <a:pPr algn="l">
-              <a:spcAft>
-                <a:spcPts val="630"/>
-              </a:spcAft>
-            </a:pPr>
-            <a:r>
-              <a:rPr sz="1300" b="1" i="0">
-                <a:solidFill>
-                  <a:srgbClr val="F47B20"/>
-                </a:solidFill>
-                <a:latin typeface="Inter Tight"/>
-              </a:rPr>
-              <a:t>8 min   </a:t>
-            </a:r>
-            <a:r>
-              <a:rPr sz="1400" b="0" i="0">
-                <a:solidFill>
-                  <a:srgbClr val="1C1B19"/>
-                </a:solidFill>
-                <a:latin typeface="Source Serif 4"/>
-              </a:rPr>
-              <a:t>Three stuck students (small groups)</a:t>
-            </a:r>
-          </a:p>
-          <a:p>
-            <a:pPr algn="l">
-              <a:spcAft>
-                <a:spcPts val="630"/>
-              </a:spcAft>
-            </a:pPr>
-            <a:r>
-              <a:rPr sz="1300" b="1" i="0">
-                <a:solidFill>
-                  <a:srgbClr val="F47B20"/>
-                </a:solidFill>
-                <a:latin typeface="Inter Tight"/>
-              </a:rPr>
-              <a:t>5 min   </a:t>
-            </a:r>
-            <a:r>
-              <a:rPr sz="1400" b="0" i="0">
-                <a:solidFill>
-                  <a:srgbClr val="1C1B19"/>
-                </a:solidFill>
-                <a:latin typeface="Source Serif 4"/>
-              </a:rPr>
-              <a:t>My if-then plan (private, then pair-share)</a:t>
-            </a:r>
-          </a:p>
-          <a:p>
-            <a:pPr algn="l">
-              <a:spcAft>
-                <a:spcPts val="630"/>
-              </a:spcAft>
-            </a:pPr>
-            <a:r>
-              <a:rPr sz="1300" b="1" i="0">
-                <a:solidFill>
-                  <a:srgbClr val="F47B20"/>
-                </a:solidFill>
-                <a:latin typeface="Inter Tight"/>
-              </a:rPr>
-              <a:t>3 min   </a:t>
-            </a:r>
-            <a:r>
-              <a:rPr sz="1400" b="0" i="0">
-                <a:solidFill>
-                  <a:srgbClr val="1C1B19"/>
-                </a:solidFill>
-                <a:latin typeface="Source Serif 4"/>
-              </a:rPr>
-              <a:t>Exit card and the BVR Diner link</a:t>
-            </a:r>
-          </a:p>
-          <a:p>
-            <a:pPr algn="l">
-              <a:spcAft>
-                <a:spcPts val="630"/>
-              </a:spcAft>
-            </a:pPr>
-            <a:r>
-              <a:rPr sz="1400" b="0" i="0">
-                <a:solidFill>
-                  <a:srgbClr val="1C1B19"/>
-                </a:solidFill>
-                <a:latin typeface="Source Serif 4"/>
-              </a:rPr>
-              <a:t/>
-            </a:r>
-          </a:p>
-          <a:p>
-            <a:pPr algn="l">
-              <a:spcAft>
-                <a:spcPts val="630"/>
-              </a:spcAft>
-            </a:pPr>
-            <a:r>
-              <a:rPr sz="1100" b="1" i="0">
-                <a:solidFill>
-                  <a:srgbClr val="0B2D5B"/>
-                </a:solidFill>
-                <a:latin typeface="Inter Tight"/>
-              </a:rPr>
               <a:t>SHORT ON TIME (20-MINUTE ADVISORY)</a:t>
             </a:r>
           </a:p>
           <a:p>
             <a:pPr algn="l">
               <a:spcAft>
-                <a:spcPts val="630"/>
-              </a:spcAft>
-            </a:pPr>
-            <a:r>
-              <a:rPr sz="1400" b="0" i="0">
+                <a:spcPts val="810"/>
+              </a:spcAft>
+            </a:pPr>
+            <a:r>
+              <a:rPr sz="1800" b="0" i="0">
                 <a:solidFill>
                   <a:srgbClr val="1C1B19"/>
                 </a:solidFill>
@@ -4916,7 +4716,7 @@
                 </a:solidFill>
                 <a:latin typeface="Inter Tight"/>
               </a:rPr>
-              <a:t>"I WORK BETTER UNDER PRESSURE"</a:t>
+              <a:t>TRY IT</a:t>
             </a:r>
           </a:p>
         </p:txBody>
@@ -4962,14 +4762,58 @@
       </p:sp>
       <p:sp>
         <p:nvSpPr>
-          <p:cNvPr id="5" name="TextBox 4"/>
+          <p:cNvPr id="5" name="Rectangle 4"/>
+          <p:cNvSpPr/>
+          <p:nvPr/>
+        </p:nvSpPr>
+        <p:spPr>
+          <a:xfrm>
+            <a:off x="822960" y="1371600"/>
+            <a:ext cx="73152" cy="3566160"/>
+          </a:xfrm>
+          <a:prstGeom prst="rect">
+            <a:avLst/>
+          </a:prstGeom>
+          <a:solidFill>
+            <a:srgbClr val="F47B20"/>
+          </a:solidFill>
+          <a:ln>
+            <a:noFill/>
+          </a:ln>
+          <a:effectLst/>
+        </p:spPr>
+        <p:style>
+          <a:lnRef idx="1">
+            <a:schemeClr val="accent1"/>
+          </a:lnRef>
+          <a:fillRef idx="3">
+            <a:schemeClr val="accent1"/>
+          </a:fillRef>
+          <a:effectRef idx="2">
+            <a:schemeClr val="accent1"/>
+          </a:effectRef>
+          <a:fontRef idx="minor">
+            <a:schemeClr val="lt1"/>
+          </a:fontRef>
+        </p:style>
+        <p:txBody>
+          <a:bodyPr rtlCol="0" anchor="ctr"/>
+          <a:lstStyle/>
+          <a:p>
+            <a:pPr algn="ctr"/>
+          </a:p>
+        </p:txBody>
+      </p:sp>
+      <p:sp>
+        <p:nvSpPr>
+          <p:cNvPr id="6" name="TextBox 5"/>
           <p:cNvSpPr txBox="1"/>
           <p:nvPr/>
         </p:nvSpPr>
         <p:spPr>
           <a:xfrm>
-            <a:off x="822960" y="1463040"/>
-            <a:ext cx="10515600" cy="3291840"/>
+            <a:off x="1188720" y="1371600"/>
+            <a:ext cx="10058400" cy="3566160"/>
           </a:xfrm>
           <a:prstGeom prst="rect">
             <a:avLst/>
@@ -4984,31 +4828,31 @@
           <a:p>
             <a:pPr algn="l">
               <a:spcAft>
-                <a:spcPts val="2070"/>
-              </a:spcAft>
-            </a:pPr>
-            <a:r>
-              <a:rPr sz="4600" b="1" i="0">
+                <a:spcPts val="1800"/>
+              </a:spcAft>
+            </a:pPr>
+            <a:r>
+              <a:rPr sz="4000" b="0" i="1">
                 <a:solidFill>
                   <a:srgbClr val="1C1B19"/>
                 </a:solidFill>
                 <a:latin typeface="Source Serif 4"/>
               </a:rPr>
-              <a:t>The pressure felt productive. It wasn't.</a:t>
-            </a:r>
-          </a:p>
-        </p:txBody>
-      </p:sp>
-      <p:sp>
-        <p:nvSpPr>
-          <p:cNvPr id="6" name="TextBox 5"/>
+              <a:t>If it's ___ and I'm at ___, then I'll ___.</a:t>
+            </a:r>
+          </a:p>
+        </p:txBody>
+      </p:sp>
+      <p:sp>
+        <p:nvSpPr>
+          <p:cNvPr id="7" name="TextBox 6"/>
           <p:cNvSpPr txBox="1"/>
           <p:nvPr/>
         </p:nvSpPr>
         <p:spPr>
           <a:xfrm>
-            <a:off x="822960" y="4846320"/>
-            <a:ext cx="10515600" cy="1097280"/>
+            <a:off x="1188720" y="5120640"/>
+            <a:ext cx="10058400" cy="914400"/>
           </a:xfrm>
           <a:prstGeom prst="rect">
             <a:avLst/>
@@ -5023,17 +4867,17 @@
           <a:p>
             <a:pPr algn="l">
               <a:spcAft>
-                <a:spcPts val="990"/>
-              </a:spcAft>
-            </a:pPr>
-            <a:r>
-              <a:rPr sz="2200" b="0" i="1">
+                <a:spcPts val="810"/>
+              </a:spcAft>
+            </a:pPr>
+            <a:r>
+              <a:rPr sz="1800" b="0" i="0">
                 <a:solidFill>
                   <a:srgbClr val="5D5A54"/>
                 </a:solidFill>
-                <a:latin typeface="Source Serif 4"/>
-              </a:rPr>
-              <a:t>Procrastinators felt less stressed early in the semester. By the end they were more stressed, sicker, and had lower grades.</a:t>
+                <a:latin typeface="Inter Tight"/>
+              </a:rPr>
+              <a:t>Pick one thing you've been putting off. Write the plan. Make the first step tiny.</a:t>
             </a:r>
           </a:p>
         </p:txBody>
@@ -5142,7 +4986,7 @@
                 </a:solidFill>
                 <a:latin typeface="Inter Tight"/>
               </a:rPr>
-              <a:t>FOUR LEVERS</a:t>
+              <a:t>BEFORE YOU GO</a:t>
             </a:r>
           </a:p>
         </p:txBody>
@@ -5194,8 +5038,8 @@
         </p:nvSpPr>
         <p:spPr>
           <a:xfrm>
-            <a:off x="822960" y="1005840"/>
-            <a:ext cx="10515600" cy="1097280"/>
+            <a:off x="822960" y="1188720"/>
+            <a:ext cx="10515600" cy="914400"/>
           </a:xfrm>
           <a:prstGeom prst="rect">
             <a:avLst/>
@@ -5220,7 +5064,7 @@
                 </a:solidFill>
                 <a:latin typeface="Source Serif 4"/>
               </a:rPr>
-              <a:t>Where to push when you're stuck</a:t>
+              <a:t>Exit card</a:t>
             </a:r>
           </a:p>
         </p:txBody>
@@ -5233,8 +5077,8 @@
         </p:nvSpPr>
         <p:spPr>
           <a:xfrm>
-            <a:off x="822960" y="2194560"/>
-            <a:ext cx="548640" cy="1005840"/>
+            <a:off x="822960" y="2286000"/>
+            <a:ext cx="10515600" cy="1463040"/>
           </a:xfrm>
           <a:prstGeom prst="rect">
             <a:avLst/>
@@ -5249,31 +5093,77 @@
           <a:p>
             <a:pPr algn="l">
               <a:spcAft>
-                <a:spcPts val="1170"/>
-              </a:spcAft>
-            </a:pPr>
-            <a:r>
-              <a:rPr sz="2600" b="1" i="0">
-                <a:solidFill>
-                  <a:srgbClr val="F47B20"/>
-                </a:solidFill>
-                <a:latin typeface="Source Serif 4"/>
-              </a:rPr>
-              <a:t>1</a:t>
-            </a:r>
-          </a:p>
-        </p:txBody>
-      </p:sp>
-      <p:sp>
-        <p:nvSpPr>
-          <p:cNvPr id="7" name="TextBox 6"/>
+                <a:spcPts val="1080"/>
+              </a:spcAft>
+            </a:pPr>
+            <a:r>
+              <a:rPr sz="2400" b="0" i="0">
+                <a:solidFill>
+                  <a:srgbClr val="1C1B19"/>
+                </a:solidFill>
+                <a:latin typeface="Source Serif 4"/>
+              </a:rPr>
+              <a:t>Which lever will you pull this week, and on what?</a:t>
+            </a:r>
+          </a:p>
+        </p:txBody>
+      </p:sp>
+      <p:sp>
+        <p:nvSpPr>
+          <p:cNvPr id="7" name="Rectangle 6"/>
+          <p:cNvSpPr/>
+          <p:nvPr/>
+        </p:nvSpPr>
+        <p:spPr>
+          <a:xfrm>
+            <a:off x="822960" y="4023360"/>
+            <a:ext cx="10515600" cy="1371600"/>
+          </a:xfrm>
+          <a:prstGeom prst="rect">
+            <a:avLst/>
+          </a:prstGeom>
+          <a:solidFill>
+            <a:srgbClr val="FFFFFF"/>
+          </a:solidFill>
+          <a:ln w="15875">
+            <a:solidFill>
+              <a:srgbClr val="1C1B19"/>
+            </a:solidFill>
+          </a:ln>
+          <a:effectLst/>
+        </p:spPr>
+        <p:style>
+          <a:lnRef idx="1">
+            <a:schemeClr val="accent1"/>
+          </a:lnRef>
+          <a:fillRef idx="3">
+            <a:schemeClr val="accent1"/>
+          </a:fillRef>
+          <a:effectRef idx="2">
+            <a:schemeClr val="accent1"/>
+          </a:effectRef>
+          <a:fontRef idx="minor">
+            <a:schemeClr val="lt1"/>
+          </a:fontRef>
+        </p:style>
+        <p:txBody>
+          <a:bodyPr rtlCol="0" anchor="ctr"/>
+          <a:lstStyle/>
+          <a:p>
+            <a:pPr algn="ctr"/>
+          </a:p>
+        </p:txBody>
+      </p:sp>
+      <p:sp>
+        <p:nvSpPr>
+          <p:cNvPr id="8" name="TextBox 7"/>
           <p:cNvSpPr txBox="1"/>
           <p:nvPr/>
         </p:nvSpPr>
         <p:spPr>
           <a:xfrm>
-            <a:off x="1463040" y="2231136"/>
-            <a:ext cx="9875520" cy="1005840"/>
+            <a:off x="1097280" y="4206240"/>
+            <a:ext cx="10058400" cy="365760"/>
           </a:xfrm>
           <a:prstGeom prst="rect">
             <a:avLst/>
@@ -5288,47 +5178,31 @@
           <a:p>
             <a:pPr algn="l">
               <a:spcAft>
-                <a:spcPts val="945"/>
-              </a:spcAft>
-            </a:pPr>
-            <a:r>
-              <a:rPr sz="2100" b="1" i="0">
-                <a:solidFill>
-                  <a:srgbClr val="1C1B19"/>
-                </a:solidFill>
-                <a:latin typeface="Source Serif 4"/>
-              </a:rPr>
-              <a:t>Raise confidence.</a:t>
-            </a:r>
-          </a:p>
-          <a:p>
-            <a:pPr algn="l">
-              <a:spcAft>
-                <a:spcPts val="945"/>
-              </a:spcAft>
-            </a:pPr>
-            <a:r>
-              <a:rPr sz="1600" b="0" i="0">
-                <a:solidFill>
-                  <a:srgbClr val="5D5A54"/>
-                </a:solidFill>
-                <a:latin typeface="Source Serif 4"/>
-              </a:rPr>
-              <a:t>Make step one tiny: open the doc, one ugly sentence.</a:t>
-            </a:r>
-          </a:p>
-        </p:txBody>
-      </p:sp>
-      <p:sp>
-        <p:nvSpPr>
-          <p:cNvPr id="8" name="TextBox 7"/>
+                <a:spcPts val="540"/>
+              </a:spcAft>
+            </a:pPr>
+            <a:r>
+              <a:rPr sz="1200" b="1" i="0">
+                <a:solidFill>
+                  <a:srgbClr val="0B2D5B"/>
+                </a:solidFill>
+                <a:latin typeface="Inter Tight"/>
+              </a:rPr>
+              <a:t>ON THE BVR DINER MENU</a:t>
+            </a:r>
+          </a:p>
+        </p:txBody>
+      </p:sp>
+      <p:sp>
+        <p:nvSpPr>
+          <p:cNvPr id="9" name="TextBox 8"/>
           <p:cNvSpPr txBox="1"/>
           <p:nvPr/>
         </p:nvSpPr>
         <p:spPr>
           <a:xfrm>
-            <a:off x="822960" y="3200400"/>
-            <a:ext cx="548640" cy="1005840"/>
+            <a:off x="1097280" y="4617720"/>
+            <a:ext cx="10058400" cy="640080"/>
           </a:xfrm>
           <a:prstGeom prst="rect">
             <a:avLst/>
@@ -5343,260 +5217,17 @@
           <a:p>
             <a:pPr algn="l">
               <a:spcAft>
-                <a:spcPts val="1170"/>
-              </a:spcAft>
-            </a:pPr>
-            <a:r>
-              <a:rPr sz="2600" b="1" i="0">
-                <a:solidFill>
-                  <a:srgbClr val="F47B20"/>
-                </a:solidFill>
-                <a:latin typeface="Source Serif 4"/>
-              </a:rPr>
-              <a:t>2</a:t>
-            </a:r>
-          </a:p>
-        </p:txBody>
-      </p:sp>
-      <p:sp>
-        <p:nvSpPr>
-          <p:cNvPr id="9" name="TextBox 8"/>
-          <p:cNvSpPr txBox="1"/>
-          <p:nvPr/>
-        </p:nvSpPr>
-        <p:spPr>
-          <a:xfrm>
-            <a:off x="1463040" y="3236976"/>
-            <a:ext cx="9875520" cy="1005840"/>
-          </a:xfrm>
-          <a:prstGeom prst="rect">
-            <a:avLst/>
-          </a:prstGeom>
-          <a:noFill/>
-        </p:spPr>
-        <p:txBody>
-          <a:bodyPr wrap="square" anchor="t" lIns="0" rIns="0" tIns="0" bIns="0">
-            <a:spAutoFit/>
-          </a:bodyPr>
-          <a:lstStyle/>
-          <a:p>
-            <a:pPr algn="l">
-              <a:spcAft>
-                <a:spcPts val="945"/>
-              </a:spcAft>
-            </a:pPr>
-            <a:r>
-              <a:rPr sz="2100" b="1" i="0">
+                <a:spcPts val="900"/>
+              </a:spcAft>
+            </a:pPr>
+            <a:r>
+              <a:rPr sz="2000" b="0" i="0">
                 <a:solidFill>
                   <a:srgbClr val="1C1B19"/>
                 </a:solidFill>
-                <a:latin typeface="Source Serif 4"/>
-              </a:rPr>
-              <a:t>Raise value.</a:t>
-            </a:r>
-          </a:p>
-          <a:p>
-            <a:pPr algn="l">
-              <a:spcAft>
-                <a:spcPts val="945"/>
-              </a:spcAft>
-            </a:pPr>
-            <a:r>
-              <a:rPr sz="1600" b="0" i="0">
-                <a:solidFill>
-                  <a:srgbClr val="5D5A54"/>
-                </a:solidFill>
-                <a:latin typeface="Source Serif 4"/>
-              </a:rPr>
-              <a:t>Tie it to something you care about. Good playlist only while working.</a:t>
-            </a:r>
-          </a:p>
-        </p:txBody>
-      </p:sp>
-      <p:sp>
-        <p:nvSpPr>
-          <p:cNvPr id="10" name="TextBox 9"/>
-          <p:cNvSpPr txBox="1"/>
-          <p:nvPr/>
-        </p:nvSpPr>
-        <p:spPr>
-          <a:xfrm>
-            <a:off x="822960" y="4206240"/>
-            <a:ext cx="548640" cy="1005840"/>
-          </a:xfrm>
-          <a:prstGeom prst="rect">
-            <a:avLst/>
-          </a:prstGeom>
-          <a:noFill/>
-        </p:spPr>
-        <p:txBody>
-          <a:bodyPr wrap="square" anchor="t" lIns="0" rIns="0" tIns="0" bIns="0">
-            <a:spAutoFit/>
-          </a:bodyPr>
-          <a:lstStyle/>
-          <a:p>
-            <a:pPr algn="l">
-              <a:spcAft>
-                <a:spcPts val="1170"/>
-              </a:spcAft>
-            </a:pPr>
-            <a:r>
-              <a:rPr sz="2600" b="1" i="0">
-                <a:solidFill>
-                  <a:srgbClr val="F47B20"/>
-                </a:solidFill>
-                <a:latin typeface="Source Serif 4"/>
-              </a:rPr>
-              <a:t>3</a:t>
-            </a:r>
-          </a:p>
-        </p:txBody>
-      </p:sp>
-      <p:sp>
-        <p:nvSpPr>
-          <p:cNvPr id="11" name="TextBox 10"/>
-          <p:cNvSpPr txBox="1"/>
-          <p:nvPr/>
-        </p:nvSpPr>
-        <p:spPr>
-          <a:xfrm>
-            <a:off x="1463040" y="4242816"/>
-            <a:ext cx="9875520" cy="1005840"/>
-          </a:xfrm>
-          <a:prstGeom prst="rect">
-            <a:avLst/>
-          </a:prstGeom>
-          <a:noFill/>
-        </p:spPr>
-        <p:txBody>
-          <a:bodyPr wrap="square" anchor="t" lIns="0" rIns="0" tIns="0" bIns="0">
-            <a:spAutoFit/>
-          </a:bodyPr>
-          <a:lstStyle/>
-          <a:p>
-            <a:pPr algn="l">
-              <a:spcAft>
-                <a:spcPts val="945"/>
-              </a:spcAft>
-            </a:pPr>
-            <a:r>
-              <a:rPr sz="2100" b="1" i="0">
-                <a:solidFill>
-                  <a:srgbClr val="1C1B19"/>
-                </a:solidFill>
-                <a:latin typeface="Source Serif 4"/>
-              </a:rPr>
-              <a:t>Add friction to the exit.</a:t>
-            </a:r>
-          </a:p>
-          <a:p>
-            <a:pPr algn="l">
-              <a:spcAft>
-                <a:spcPts val="945"/>
-              </a:spcAft>
-            </a:pPr>
-            <a:r>
-              <a:rPr sz="1600" b="0" i="0">
-                <a:solidFill>
-                  <a:srgbClr val="5D5A54"/>
-                </a:solidFill>
-                <a:latin typeface="Source Serif 4"/>
-              </a:rPr>
-              <a:t>Phone in another room, app timers on, one tab open.</a:t>
-            </a:r>
-          </a:p>
-        </p:txBody>
-      </p:sp>
-      <p:sp>
-        <p:nvSpPr>
-          <p:cNvPr id="12" name="TextBox 11"/>
-          <p:cNvSpPr txBox="1"/>
-          <p:nvPr/>
-        </p:nvSpPr>
-        <p:spPr>
-          <a:xfrm>
-            <a:off x="822960" y="5212080"/>
-            <a:ext cx="548640" cy="1005840"/>
-          </a:xfrm>
-          <a:prstGeom prst="rect">
-            <a:avLst/>
-          </a:prstGeom>
-          <a:noFill/>
-        </p:spPr>
-        <p:txBody>
-          <a:bodyPr wrap="square" anchor="t" lIns="0" rIns="0" tIns="0" bIns="0">
-            <a:spAutoFit/>
-          </a:bodyPr>
-          <a:lstStyle/>
-          <a:p>
-            <a:pPr algn="l">
-              <a:spcAft>
-                <a:spcPts val="1170"/>
-              </a:spcAft>
-            </a:pPr>
-            <a:r>
-              <a:rPr sz="2600" b="1" i="0">
-                <a:solidFill>
-                  <a:srgbClr val="F47B20"/>
-                </a:solidFill>
-                <a:latin typeface="Source Serif 4"/>
-              </a:rPr>
-              <a:t>4</a:t>
-            </a:r>
-          </a:p>
-        </p:txBody>
-      </p:sp>
-      <p:sp>
-        <p:nvSpPr>
-          <p:cNvPr id="13" name="TextBox 12"/>
-          <p:cNvSpPr txBox="1"/>
-          <p:nvPr/>
-        </p:nvSpPr>
-        <p:spPr>
-          <a:xfrm>
-            <a:off x="1463040" y="5248656"/>
-            <a:ext cx="9875520" cy="1005840"/>
-          </a:xfrm>
-          <a:prstGeom prst="rect">
-            <a:avLst/>
-          </a:prstGeom>
-          <a:noFill/>
-        </p:spPr>
-        <p:txBody>
-          <a:bodyPr wrap="square" anchor="t" lIns="0" rIns="0" tIns="0" bIns="0">
-            <a:spAutoFit/>
-          </a:bodyPr>
-          <a:lstStyle/>
-          <a:p>
-            <a:pPr algn="l">
-              <a:spcAft>
-                <a:spcPts val="945"/>
-              </a:spcAft>
-            </a:pPr>
-            <a:r>
-              <a:rPr sz="2100" b="1" i="0">
-                <a:solidFill>
-                  <a:srgbClr val="1C1B19"/>
-                </a:solidFill>
-                <a:latin typeface="Source Serif 4"/>
-              </a:rPr>
-              <a:t>Shrink the delay.</a:t>
-            </a:r>
-          </a:p>
-          <a:p>
-            <a:pPr algn="l">
-              <a:spcAft>
-                <a:spcPts val="945"/>
-              </a:spcAft>
-            </a:pPr>
-            <a:r>
-              <a:rPr sz="1600" b="0" i="0">
-                <a:solidFill>
-                  <a:srgbClr val="5D5A54"/>
-                </a:solidFill>
-                <a:latin typeface="Source Serif 4"/>
-              </a:rPr>
-              <a:t>Your own deadline days early. Tell someone who'll ask.</a:t>
+                <a:latin typeface="Inter Tight"/>
+              </a:rPr>
+              <a:t>https://rmwtoolkit.github.io/bcds-toolkit/why-you-cant-start-high-school.html</a:t>
             </a:r>
           </a:p>
         </p:txBody>
@@ -5610,6 +5241,2333 @@
 </file>
 
 <file path=ppt/slides/slide12.xml><?xml version="1.0" encoding="utf-8"?>
+<p:sld xmlns:a="http://schemas.openxmlformats.org/drawingml/2006/main" xmlns:p="http://schemas.openxmlformats.org/presentationml/2006/main" xmlns:r="http://schemas.openxmlformats.org/officeDocument/2006/relationships" show="0">
+  <p:cSld>
+    <p:bg>
+      <p:bgPr>
+        <a:solidFill>
+          <a:srgbClr val="EEEBE4"/>
+        </a:solidFill>
+        <a:effectLst/>
+      </p:bgPr>
+    </p:bg>
+    <p:spTree>
+      <p:nvGrpSpPr>
+        <p:cNvPr id="1" name=""/>
+        <p:cNvGrpSpPr/>
+        <p:nvPr/>
+      </p:nvGrpSpPr>
+      <p:grpSpPr/>
+      <p:sp>
+        <p:nvSpPr>
+          <p:cNvPr id="2" name="Rectangle 1"/>
+          <p:cNvSpPr/>
+          <p:nvPr/>
+        </p:nvSpPr>
+        <p:spPr>
+          <a:xfrm>
+            <a:off x="0" y="0"/>
+            <a:ext cx="12191695" cy="384048"/>
+          </a:xfrm>
+          <a:prstGeom prst="rect">
+            <a:avLst/>
+          </a:prstGeom>
+          <a:solidFill>
+            <a:srgbClr val="0B2D5B"/>
+          </a:solidFill>
+          <a:ln>
+            <a:noFill/>
+          </a:ln>
+          <a:effectLst/>
+        </p:spPr>
+        <p:style>
+          <a:lnRef idx="1">
+            <a:schemeClr val="accent1"/>
+          </a:lnRef>
+          <a:fillRef idx="3">
+            <a:schemeClr val="accent1"/>
+          </a:fillRef>
+          <a:effectRef idx="2">
+            <a:schemeClr val="accent1"/>
+          </a:effectRef>
+          <a:fontRef idx="minor">
+            <a:schemeClr val="lt1"/>
+          </a:fontRef>
+        </p:style>
+        <p:txBody>
+          <a:bodyPr rtlCol="0" anchor="ctr"/>
+          <a:lstStyle/>
+          <a:p>
+            <a:pPr algn="ctr"/>
+          </a:p>
+        </p:txBody>
+      </p:sp>
+      <p:sp>
+        <p:nvSpPr>
+          <p:cNvPr id="3" name="TextBox 2"/>
+          <p:cNvSpPr txBox="1"/>
+          <p:nvPr/>
+        </p:nvSpPr>
+        <p:spPr>
+          <a:xfrm>
+            <a:off x="548640" y="100584"/>
+            <a:ext cx="10972800" cy="274320"/>
+          </a:xfrm>
+          <a:prstGeom prst="rect">
+            <a:avLst/>
+          </a:prstGeom>
+          <a:noFill/>
+        </p:spPr>
+        <p:txBody>
+          <a:bodyPr wrap="square" anchor="t" lIns="0" rIns="0" tIns="0" bIns="0">
+            <a:spAutoFit/>
+          </a:bodyPr>
+          <a:lstStyle/>
+          <a:p>
+            <a:pPr algn="l">
+              <a:spcAft>
+                <a:spcPts val="495"/>
+              </a:spcAft>
+            </a:pPr>
+            <a:r>
+              <a:rPr sz="1100" b="1" i="0">
+                <a:solidFill>
+                  <a:srgbClr val="FFFFFF"/>
+                </a:solidFill>
+                <a:latin typeface="Inter Tight"/>
+              </a:rPr>
+              <a:t>TEACHER PAGE  ·  skipped when you present  ·  Lesson plan</a:t>
+            </a:r>
+          </a:p>
+        </p:txBody>
+      </p:sp>
+      <p:sp>
+        <p:nvSpPr>
+          <p:cNvPr id="4" name="TextBox 3"/>
+          <p:cNvSpPr txBox="1"/>
+          <p:nvPr/>
+        </p:nvSpPr>
+        <p:spPr>
+          <a:xfrm>
+            <a:off x="548640" y="685800"/>
+            <a:ext cx="10972800" cy="731520"/>
+          </a:xfrm>
+          <a:prstGeom prst="rect">
+            <a:avLst/>
+          </a:prstGeom>
+          <a:noFill/>
+        </p:spPr>
+        <p:txBody>
+          <a:bodyPr wrap="square" anchor="t" lIns="0" rIns="0" tIns="0" bIns="0">
+            <a:spAutoFit/>
+          </a:bodyPr>
+          <a:lstStyle/>
+          <a:p>
+            <a:pPr algn="l">
+              <a:spcAft>
+                <a:spcPts val="1530"/>
+              </a:spcAft>
+            </a:pPr>
+            <a:r>
+              <a:rPr sz="3400" b="1" i="0">
+                <a:solidFill>
+                  <a:srgbClr val="1C1B19"/>
+                </a:solidFill>
+                <a:latin typeface="Source Serif 4"/>
+              </a:rPr>
+              <a:t>Why You Can't Start (and How to Start Anyway)</a:t>
+            </a:r>
+          </a:p>
+        </p:txBody>
+      </p:sp>
+      <p:sp>
+        <p:nvSpPr>
+          <p:cNvPr id="5" name="TextBox 4"/>
+          <p:cNvSpPr txBox="1"/>
+          <p:nvPr/>
+        </p:nvSpPr>
+        <p:spPr>
+          <a:xfrm>
+            <a:off x="548640" y="1325880"/>
+            <a:ext cx="10972800" cy="365760"/>
+          </a:xfrm>
+          <a:prstGeom prst="rect">
+            <a:avLst/>
+          </a:prstGeom>
+          <a:noFill/>
+        </p:spPr>
+        <p:txBody>
+          <a:bodyPr wrap="square" anchor="t" lIns="0" rIns="0" tIns="0" bIns="0">
+            <a:spAutoFit/>
+          </a:bodyPr>
+          <a:lstStyle/>
+          <a:p>
+            <a:pPr algn="l">
+              <a:spcAft>
+                <a:spcPts val="630"/>
+              </a:spcAft>
+            </a:pPr>
+            <a:r>
+              <a:rPr sz="1400" b="0" i="0">
+                <a:solidFill>
+                  <a:srgbClr val="5D5A54"/>
+                </a:solidFill>
+                <a:latin typeface="Inter Tight"/>
+              </a:rPr>
+              <a:t>Upper School  ·  45 minutes (20-minute advisory version below)  ·  9th grade advisory, health class, or a counselor-led group</a:t>
+            </a:r>
+          </a:p>
+        </p:txBody>
+      </p:sp>
+      <p:sp>
+        <p:nvSpPr>
+          <p:cNvPr id="6" name="TextBox 5"/>
+          <p:cNvSpPr txBox="1"/>
+          <p:nvPr/>
+        </p:nvSpPr>
+        <p:spPr>
+          <a:xfrm>
+            <a:off x="548640" y="1828800"/>
+            <a:ext cx="5120640" cy="4389120"/>
+          </a:xfrm>
+          <a:prstGeom prst="rect">
+            <a:avLst/>
+          </a:prstGeom>
+          <a:noFill/>
+        </p:spPr>
+        <p:txBody>
+          <a:bodyPr wrap="square" anchor="t" lIns="0" rIns="0" tIns="0" bIns="0">
+            <a:spAutoFit/>
+          </a:bodyPr>
+          <a:lstStyle/>
+          <a:p>
+            <a:pPr algn="l">
+              <a:spcAft>
+                <a:spcPts val="675"/>
+              </a:spcAft>
+            </a:pPr>
+            <a:r>
+              <a:rPr sz="1100" b="1" i="0">
+                <a:solidFill>
+                  <a:srgbClr val="0B2D5B"/>
+                </a:solidFill>
+                <a:latin typeface="Inter Tight"/>
+              </a:rPr>
+              <a:t>GOAL</a:t>
+            </a:r>
+          </a:p>
+          <a:p>
+            <a:pPr algn="l">
+              <a:spcAft>
+                <a:spcPts val="675"/>
+              </a:spcAft>
+            </a:pPr>
+            <a:r>
+              <a:rPr sz="1500" b="0" i="0">
+                <a:solidFill>
+                  <a:srgbClr val="1C1B19"/>
+                </a:solidFill>
+                <a:latin typeface="Source Serif 4"/>
+              </a:rPr>
+              <a:t>Students can explain procrastination as avoiding a feeling (short-term mood repair), see why "I work better under pressure" backfires, and leave with one if-then plan for a real task they've been putting off. The aim is a method. Nobody should leave thinking they're lazy.</a:t>
+            </a:r>
+          </a:p>
+          <a:p>
+            <a:pPr algn="l">
+              <a:spcAft>
+                <a:spcPts val="675"/>
+              </a:spcAft>
+            </a:pPr>
+            <a:r>
+              <a:rPr sz="1500" b="0" i="0">
+                <a:solidFill>
+                  <a:srgbClr val="1C1B19"/>
+                </a:solidFill>
+                <a:latin typeface="Source Serif 4"/>
+              </a:rPr>
+              <a:t/>
+            </a:r>
+          </a:p>
+          <a:p>
+            <a:pPr algn="l">
+              <a:spcAft>
+                <a:spcPts val="675"/>
+              </a:spcAft>
+            </a:pPr>
+            <a:r>
+              <a:rPr sz="1100" b="1" i="0">
+                <a:solidFill>
+                  <a:srgbClr val="0B2D5B"/>
+                </a:solidFill>
+                <a:latin typeface="Inter Tight"/>
+              </a:rPr>
+              <a:t>MATERIALS</a:t>
+            </a:r>
+          </a:p>
+          <a:p>
+            <a:pPr algn="l">
+              <a:spcAft>
+                <a:spcPts val="675"/>
+              </a:spcAft>
+            </a:pPr>
+            <a:r>
+              <a:rPr sz="1500" b="0" i="0">
+                <a:solidFill>
+                  <a:srgbClr val="1C1B19"/>
+                </a:solidFill>
+                <a:latin typeface="Source Serif 4"/>
+              </a:rPr>
+              <a:t>Index cards for the anonymous feelings round and the exit card</a:t>
+            </a:r>
+          </a:p>
+          <a:p>
+            <a:pPr algn="l">
+              <a:spcAft>
+                <a:spcPts val="675"/>
+              </a:spcAft>
+            </a:pPr>
+            <a:r>
+              <a:rPr sz="1500" b="0" i="0">
+                <a:solidFill>
+                  <a:srgbClr val="1C1B19"/>
+                </a:solidFill>
+                <a:latin typeface="Source Serif 4"/>
+              </a:rPr>
+              <a:t>Scrap paper for the private if-then plan</a:t>
+            </a:r>
+          </a:p>
+          <a:p>
+            <a:pPr algn="l">
+              <a:spcAft>
+                <a:spcPts val="675"/>
+              </a:spcAft>
+            </a:pPr>
+            <a:r>
+              <a:rPr sz="1500" b="0" i="0">
+                <a:solidFill>
+                  <a:srgbClr val="1C1B19"/>
+                </a:solidFill>
+                <a:latin typeface="Source Serif 4"/>
+              </a:rPr>
+              <a:t>The BVR Diner page link (last slide) to share after class</a:t>
+            </a:r>
+          </a:p>
+        </p:txBody>
+      </p:sp>
+      <p:sp>
+        <p:nvSpPr>
+          <p:cNvPr id="7" name="TextBox 6"/>
+          <p:cNvSpPr txBox="1"/>
+          <p:nvPr/>
+        </p:nvSpPr>
+        <p:spPr>
+          <a:xfrm>
+            <a:off x="6126480" y="1828800"/>
+            <a:ext cx="5486400" cy="4389120"/>
+          </a:xfrm>
+          <a:prstGeom prst="rect">
+            <a:avLst/>
+          </a:prstGeom>
+          <a:noFill/>
+        </p:spPr>
+        <p:txBody>
+          <a:bodyPr wrap="square" anchor="t" lIns="0" rIns="0" tIns="0" bIns="0">
+            <a:spAutoFit/>
+          </a:bodyPr>
+          <a:lstStyle/>
+          <a:p>
+            <a:pPr algn="l">
+              <a:spcAft>
+                <a:spcPts val="630"/>
+              </a:spcAft>
+            </a:pPr>
+            <a:r>
+              <a:rPr sz="1100" b="1" i="0">
+                <a:solidFill>
+                  <a:srgbClr val="0B2D5B"/>
+                </a:solidFill>
+                <a:latin typeface="Inter Tight"/>
+              </a:rPr>
+              <a:t>FLOW</a:t>
+            </a:r>
+          </a:p>
+          <a:p>
+            <a:pPr algn="l">
+              <a:spcAft>
+                <a:spcPts val="630"/>
+              </a:spcAft>
+            </a:pPr>
+            <a:r>
+              <a:rPr sz="1300" b="1" i="0">
+                <a:solidFill>
+                  <a:srgbClr val="F47B20"/>
+                </a:solidFill>
+                <a:latin typeface="Inter Tight"/>
+              </a:rPr>
+              <a:t>5 min   </a:t>
+            </a:r>
+            <a:r>
+              <a:rPr sz="1400" b="0" i="0">
+                <a:solidFill>
+                  <a:srgbClr val="1C1B19"/>
+                </a:solidFill>
+                <a:latin typeface="Source Serif 4"/>
+              </a:rPr>
+              <a:t>Myth or fact (stand up, sit down)</a:t>
+            </a:r>
+          </a:p>
+          <a:p>
+            <a:pPr algn="l">
+              <a:spcAft>
+                <a:spcPts val="630"/>
+              </a:spcAft>
+            </a:pPr>
+            <a:r>
+              <a:rPr sz="1300" b="1" i="0">
+                <a:solidFill>
+                  <a:srgbClr val="F47B20"/>
+                </a:solidFill>
+                <a:latin typeface="Inter Tight"/>
+              </a:rPr>
+              <a:t>8 min   </a:t>
+            </a:r>
+            <a:r>
+              <a:rPr sz="1400" b="0" i="0">
+                <a:solidFill>
+                  <a:srgbClr val="1C1B19"/>
+                </a:solidFill>
+                <a:latin typeface="Source Serif 4"/>
+              </a:rPr>
+              <a:t>The avoidance loop</a:t>
+            </a:r>
+          </a:p>
+          <a:p>
+            <a:pPr algn="l">
+              <a:spcAft>
+                <a:spcPts val="630"/>
+              </a:spcAft>
+            </a:pPr>
+            <a:r>
+              <a:rPr sz="1300" b="1" i="0">
+                <a:solidFill>
+                  <a:srgbClr val="F47B20"/>
+                </a:solidFill>
+                <a:latin typeface="Inter Tight"/>
+              </a:rPr>
+              <a:t>5 min   </a:t>
+            </a:r>
+            <a:r>
+              <a:rPr sz="1400" b="0" i="0">
+                <a:solidFill>
+                  <a:srgbClr val="1C1B19"/>
+                </a:solidFill>
+                <a:latin typeface="Source Serif 4"/>
+              </a:rPr>
+              <a:t>The feeling underneath (anonymous cards)</a:t>
+            </a:r>
+          </a:p>
+          <a:p>
+            <a:pPr algn="l">
+              <a:spcAft>
+                <a:spcPts val="630"/>
+              </a:spcAft>
+            </a:pPr>
+            <a:r>
+              <a:rPr sz="1300" b="1" i="0">
+                <a:solidFill>
+                  <a:srgbClr val="F47B20"/>
+                </a:solidFill>
+                <a:latin typeface="Inter Tight"/>
+              </a:rPr>
+              <a:t>4 min   </a:t>
+            </a:r>
+            <a:r>
+              <a:rPr sz="1400" b="0" i="0">
+                <a:solidFill>
+                  <a:srgbClr val="1C1B19"/>
+                </a:solidFill>
+                <a:latin typeface="Source Serif 4"/>
+              </a:rPr>
+              <a:t>"I work better under pressure"</a:t>
+            </a:r>
+          </a:p>
+          <a:p>
+            <a:pPr algn="l">
+              <a:spcAft>
+                <a:spcPts val="630"/>
+              </a:spcAft>
+            </a:pPr>
+            <a:r>
+              <a:rPr sz="1300" b="1" i="0">
+                <a:solidFill>
+                  <a:srgbClr val="F47B20"/>
+                </a:solidFill>
+                <a:latin typeface="Inter Tight"/>
+              </a:rPr>
+              <a:t>7 min   </a:t>
+            </a:r>
+            <a:r>
+              <a:rPr sz="1400" b="0" i="0">
+                <a:solidFill>
+                  <a:srgbClr val="1C1B19"/>
+                </a:solidFill>
+                <a:latin typeface="Source Serif 4"/>
+              </a:rPr>
+              <a:t>Four levers you can pull</a:t>
+            </a:r>
+          </a:p>
+          <a:p>
+            <a:pPr algn="l">
+              <a:spcAft>
+                <a:spcPts val="630"/>
+              </a:spcAft>
+            </a:pPr>
+            <a:r>
+              <a:rPr sz="1300" b="1" i="0">
+                <a:solidFill>
+                  <a:srgbClr val="F47B20"/>
+                </a:solidFill>
+                <a:latin typeface="Inter Tight"/>
+              </a:rPr>
+              <a:t>8 min   </a:t>
+            </a:r>
+            <a:r>
+              <a:rPr sz="1400" b="0" i="0">
+                <a:solidFill>
+                  <a:srgbClr val="1C1B19"/>
+                </a:solidFill>
+                <a:latin typeface="Source Serif 4"/>
+              </a:rPr>
+              <a:t>Three stuck students (small groups)</a:t>
+            </a:r>
+          </a:p>
+          <a:p>
+            <a:pPr algn="l">
+              <a:spcAft>
+                <a:spcPts val="630"/>
+              </a:spcAft>
+            </a:pPr>
+            <a:r>
+              <a:rPr sz="1300" b="1" i="0">
+                <a:solidFill>
+                  <a:srgbClr val="F47B20"/>
+                </a:solidFill>
+                <a:latin typeface="Inter Tight"/>
+              </a:rPr>
+              <a:t>5 min   </a:t>
+            </a:r>
+            <a:r>
+              <a:rPr sz="1400" b="0" i="0">
+                <a:solidFill>
+                  <a:srgbClr val="1C1B19"/>
+                </a:solidFill>
+                <a:latin typeface="Source Serif 4"/>
+              </a:rPr>
+              <a:t>My if-then plan (private, then pair-share)</a:t>
+            </a:r>
+          </a:p>
+          <a:p>
+            <a:pPr algn="l">
+              <a:spcAft>
+                <a:spcPts val="630"/>
+              </a:spcAft>
+            </a:pPr>
+            <a:r>
+              <a:rPr sz="1300" b="1" i="0">
+                <a:solidFill>
+                  <a:srgbClr val="F47B20"/>
+                </a:solidFill>
+                <a:latin typeface="Inter Tight"/>
+              </a:rPr>
+              <a:t>3 min   </a:t>
+            </a:r>
+            <a:r>
+              <a:rPr sz="1400" b="0" i="0">
+                <a:solidFill>
+                  <a:srgbClr val="1C1B19"/>
+                </a:solidFill>
+                <a:latin typeface="Source Serif 4"/>
+              </a:rPr>
+              <a:t>Exit card and the BVR Diner link</a:t>
+            </a:r>
+          </a:p>
+          <a:p>
+            <a:pPr algn="l">
+              <a:spcAft>
+                <a:spcPts val="630"/>
+              </a:spcAft>
+            </a:pPr>
+            <a:r>
+              <a:rPr sz="1400" b="0" i="0">
+                <a:solidFill>
+                  <a:srgbClr val="1C1B19"/>
+                </a:solidFill>
+                <a:latin typeface="Source Serif 4"/>
+              </a:rPr>
+              <a:t/>
+            </a:r>
+          </a:p>
+          <a:p>
+            <a:pPr algn="l">
+              <a:spcAft>
+                <a:spcPts val="630"/>
+              </a:spcAft>
+            </a:pPr>
+            <a:r>
+              <a:rPr sz="1100" b="1" i="0">
+                <a:solidFill>
+                  <a:srgbClr val="0B2D5B"/>
+                </a:solidFill>
+                <a:latin typeface="Inter Tight"/>
+              </a:rPr>
+              <a:t>SHORT ON TIME (20-MINUTE ADVISORY)</a:t>
+            </a:r>
+          </a:p>
+          <a:p>
+            <a:pPr algn="l">
+              <a:spcAft>
+                <a:spcPts val="630"/>
+              </a:spcAft>
+            </a:pPr>
+            <a:r>
+              <a:rPr sz="1400" b="0" i="0">
+                <a:solidFill>
+                  <a:srgbClr val="1C1B19"/>
+                </a:solidFill>
+                <a:latin typeface="Source Serif 4"/>
+              </a:rPr>
+              <a:t>Myth or fact (4), the avoidance loop (6), the if-then plan (6), exit card and link (4). Share the BVR Diner link so students get the four levers and the rest.</a:t>
+            </a:r>
+          </a:p>
+        </p:txBody>
+      </p:sp>
+    </p:spTree>
+  </p:cSld>
+  <p:clrMapOvr>
+    <a:masterClrMapping/>
+  </p:clrMapOvr>
+</p:sld>
+</file>
+
+<file path=ppt/slides/slide13.xml><?xml version="1.0" encoding="utf-8"?>
+<p:sld xmlns:a="http://schemas.openxmlformats.org/drawingml/2006/main" xmlns:p="http://schemas.openxmlformats.org/presentationml/2006/main" xmlns:r="http://schemas.openxmlformats.org/officeDocument/2006/relationships" show="0">
+  <p:cSld>
+    <p:bg>
+      <p:bgPr>
+        <a:solidFill>
+          <a:srgbClr val="EEEBE4"/>
+        </a:solidFill>
+        <a:effectLst/>
+      </p:bgPr>
+    </p:bg>
+    <p:spTree>
+      <p:nvGrpSpPr>
+        <p:cNvPr id="1" name=""/>
+        <p:cNvGrpSpPr/>
+        <p:nvPr/>
+      </p:nvGrpSpPr>
+      <p:grpSpPr/>
+      <p:sp>
+        <p:nvSpPr>
+          <p:cNvPr id="2" name="Rectangle 1"/>
+          <p:cNvSpPr/>
+          <p:nvPr/>
+        </p:nvSpPr>
+        <p:spPr>
+          <a:xfrm>
+            <a:off x="0" y="0"/>
+            <a:ext cx="12191695" cy="384048"/>
+          </a:xfrm>
+          <a:prstGeom prst="rect">
+            <a:avLst/>
+          </a:prstGeom>
+          <a:solidFill>
+            <a:srgbClr val="0B2D5B"/>
+          </a:solidFill>
+          <a:ln>
+            <a:noFill/>
+          </a:ln>
+          <a:effectLst/>
+        </p:spPr>
+        <p:style>
+          <a:lnRef idx="1">
+            <a:schemeClr val="accent1"/>
+          </a:lnRef>
+          <a:fillRef idx="3">
+            <a:schemeClr val="accent1"/>
+          </a:fillRef>
+          <a:effectRef idx="2">
+            <a:schemeClr val="accent1"/>
+          </a:effectRef>
+          <a:fontRef idx="minor">
+            <a:schemeClr val="lt1"/>
+          </a:fontRef>
+        </p:style>
+        <p:txBody>
+          <a:bodyPr rtlCol="0" anchor="ctr"/>
+          <a:lstStyle/>
+          <a:p>
+            <a:pPr algn="ctr"/>
+          </a:p>
+        </p:txBody>
+      </p:sp>
+      <p:sp>
+        <p:nvSpPr>
+          <p:cNvPr id="3" name="TextBox 2"/>
+          <p:cNvSpPr txBox="1"/>
+          <p:nvPr/>
+        </p:nvSpPr>
+        <p:spPr>
+          <a:xfrm>
+            <a:off x="548640" y="100584"/>
+            <a:ext cx="10972800" cy="274320"/>
+          </a:xfrm>
+          <a:prstGeom prst="rect">
+            <a:avLst/>
+          </a:prstGeom>
+          <a:noFill/>
+        </p:spPr>
+        <p:txBody>
+          <a:bodyPr wrap="square" anchor="t" lIns="0" rIns="0" tIns="0" bIns="0">
+            <a:spAutoFit/>
+          </a:bodyPr>
+          <a:lstStyle/>
+          <a:p>
+            <a:pPr algn="l">
+              <a:spcAft>
+                <a:spcPts val="495"/>
+              </a:spcAft>
+            </a:pPr>
+            <a:r>
+              <a:rPr sz="1100" b="1" i="0">
+                <a:solidFill>
+                  <a:srgbClr val="FFFFFF"/>
+                </a:solidFill>
+                <a:latin typeface="Inter Tight"/>
+              </a:rPr>
+              <a:t>TEACHER PAGE  ·  skipped when you present  ·  Before you teach</a:t>
+            </a:r>
+          </a:p>
+        </p:txBody>
+      </p:sp>
+      <p:sp>
+        <p:nvSpPr>
+          <p:cNvPr id="4" name="TextBox 3"/>
+          <p:cNvSpPr txBox="1"/>
+          <p:nvPr/>
+        </p:nvSpPr>
+        <p:spPr>
+          <a:xfrm>
+            <a:off x="548640" y="685800"/>
+            <a:ext cx="10972800" cy="640080"/>
+          </a:xfrm>
+          <a:prstGeom prst="rect">
+            <a:avLst/>
+          </a:prstGeom>
+          <a:noFill/>
+        </p:spPr>
+        <p:txBody>
+          <a:bodyPr wrap="square" anchor="t" lIns="0" rIns="0" tIns="0" bIns="0">
+            <a:spAutoFit/>
+          </a:bodyPr>
+          <a:lstStyle/>
+          <a:p>
+            <a:pPr algn="l">
+              <a:spcAft>
+                <a:spcPts val="1350"/>
+              </a:spcAft>
+            </a:pPr>
+            <a:r>
+              <a:rPr sz="3000" b="1" i="0">
+                <a:solidFill>
+                  <a:srgbClr val="1C1B19"/>
+                </a:solidFill>
+                <a:latin typeface="Source Serif 4"/>
+              </a:rPr>
+              <a:t>Before you teach</a:t>
+            </a:r>
+          </a:p>
+        </p:txBody>
+      </p:sp>
+      <p:sp>
+        <p:nvSpPr>
+          <p:cNvPr id="5" name="TextBox 4"/>
+          <p:cNvSpPr txBox="1"/>
+          <p:nvPr/>
+        </p:nvSpPr>
+        <p:spPr>
+          <a:xfrm>
+            <a:off x="548640" y="1463040"/>
+            <a:ext cx="5394960" cy="4937760"/>
+          </a:xfrm>
+          <a:prstGeom prst="rect">
+            <a:avLst/>
+          </a:prstGeom>
+          <a:noFill/>
+        </p:spPr>
+        <p:txBody>
+          <a:bodyPr wrap="square" anchor="t" lIns="0" rIns="0" tIns="0" bIns="0">
+            <a:spAutoFit/>
+          </a:bodyPr>
+          <a:lstStyle/>
+          <a:p>
+            <a:pPr algn="l">
+              <a:spcAft>
+                <a:spcPts val="585"/>
+              </a:spcAft>
+            </a:pPr>
+            <a:r>
+              <a:rPr sz="1500" b="1" i="0">
+                <a:solidFill>
+                  <a:srgbClr val="1C1B19"/>
+                </a:solidFill>
+                <a:latin typeface="Source Serif 4"/>
+              </a:rPr>
+              <a:t>Treat it as a feeling problem.</a:t>
+            </a:r>
+          </a:p>
+          <a:p>
+            <a:pPr algn="l">
+              <a:spcAft>
+                <a:spcPts val="585"/>
+              </a:spcAft>
+            </a:pPr>
+            <a:r>
+              <a:rPr sz="1300" b="0" i="0">
+                <a:solidFill>
+                  <a:srgbClr val="1C1B19"/>
+                </a:solidFill>
+                <a:latin typeface="Source Serif 4"/>
+              </a:rPr>
+              <a:t>Most students have been told procrastination means they're lazy or don't care. Start from the research: people put things off to escape a bad feeling. Students who feel seen will listen. Students who feel judged will tune out.</a:t>
+            </a:r>
+          </a:p>
+          <a:p>
+            <a:pPr algn="l">
+              <a:spcAft>
+                <a:spcPts val="585"/>
+              </a:spcAft>
+            </a:pPr>
+            <a:r>
+              <a:rPr sz="1300" b="0" i="0">
+                <a:solidFill>
+                  <a:srgbClr val="1C1B19"/>
+                </a:solidFill>
+                <a:latin typeface="Source Serif 4"/>
+              </a:rPr>
+              <a:t/>
+            </a:r>
+          </a:p>
+          <a:p>
+            <a:pPr algn="l">
+              <a:spcAft>
+                <a:spcPts val="585"/>
+              </a:spcAft>
+            </a:pPr>
+            <a:r>
+              <a:rPr sz="1500" b="1" i="0">
+                <a:solidFill>
+                  <a:srgbClr val="1C1B19"/>
+                </a:solidFill>
+                <a:latin typeface="Source Serif 4"/>
+              </a:rPr>
+              <a:t>Keep what they're avoiding private.</a:t>
+            </a:r>
+          </a:p>
+          <a:p>
+            <a:pPr algn="l">
+              <a:spcAft>
+                <a:spcPts val="585"/>
+              </a:spcAft>
+            </a:pPr>
+            <a:r>
+              <a:rPr sz="1300" b="0" i="0">
+                <a:solidFill>
+                  <a:srgbClr val="1C1B19"/>
+                </a:solidFill>
+                <a:latin typeface="Source Serif 4"/>
+              </a:rPr>
+              <a:t>Don't ask anyone to say what they've put off, how far behind they are, or what grade they got. The if-then plan stays with the student. The pair-share is only the time and place, never the task.</a:t>
+            </a:r>
+          </a:p>
+          <a:p>
+            <a:pPr algn="l">
+              <a:spcAft>
+                <a:spcPts val="585"/>
+              </a:spcAft>
+            </a:pPr>
+            <a:r>
+              <a:rPr sz="1300" b="0" i="0">
+                <a:solidFill>
+                  <a:srgbClr val="1C1B19"/>
+                </a:solidFill>
+                <a:latin typeface="Source Serif 4"/>
+              </a:rPr>
+              <a:t/>
+            </a:r>
+          </a:p>
+          <a:p>
+            <a:pPr algn="l">
+              <a:spcAft>
+                <a:spcPts val="585"/>
+              </a:spcAft>
+            </a:pPr>
+            <a:r>
+              <a:rPr sz="1500" b="1" i="0">
+                <a:solidFill>
+                  <a:srgbClr val="1C1B19"/>
+                </a:solidFill>
+                <a:latin typeface="Source Serif 4"/>
+              </a:rPr>
+              <a:t>Skip the phone lecture.</a:t>
+            </a:r>
+          </a:p>
+          <a:p>
+            <a:pPr algn="l">
+              <a:spcAft>
+                <a:spcPts val="585"/>
+              </a:spcAft>
+            </a:pPr>
+            <a:r>
+              <a:rPr sz="1300" b="0" i="0">
+                <a:solidFill>
+                  <a:srgbClr val="1C1B19"/>
+                </a:solidFill>
+                <a:latin typeface="Source Serif 4"/>
+              </a:rPr>
+              <a:t>The phone study is useful. A sermon about screens costs you the room. Keep it to friction: where the phone sits while you work.</a:t>
+            </a:r>
+          </a:p>
+          <a:p>
+            <a:pPr algn="l">
+              <a:spcAft>
+                <a:spcPts val="585"/>
+              </a:spcAft>
+            </a:pPr>
+            <a:r>
+              <a:rPr sz="1300" b="0" i="0">
+                <a:solidFill>
+                  <a:srgbClr val="1C1B19"/>
+                </a:solidFill>
+                <a:latin typeface="Source Serif 4"/>
+              </a:rPr>
+              <a:t/>
+            </a:r>
+          </a:p>
+        </p:txBody>
+      </p:sp>
+      <p:sp>
+        <p:nvSpPr>
+          <p:cNvPr id="6" name="TextBox 5"/>
+          <p:cNvSpPr txBox="1"/>
+          <p:nvPr/>
+        </p:nvSpPr>
+        <p:spPr>
+          <a:xfrm>
+            <a:off x="6217920" y="1463040"/>
+            <a:ext cx="5394960" cy="4937760"/>
+          </a:xfrm>
+          <a:prstGeom prst="rect">
+            <a:avLst/>
+          </a:prstGeom>
+          <a:noFill/>
+        </p:spPr>
+        <p:txBody>
+          <a:bodyPr wrap="square" anchor="t" lIns="0" rIns="0" tIns="0" bIns="0">
+            <a:spAutoFit/>
+          </a:bodyPr>
+          <a:lstStyle/>
+          <a:p>
+            <a:pPr algn="l">
+              <a:spcAft>
+                <a:spcPts val="585"/>
+              </a:spcAft>
+            </a:pPr>
+            <a:r>
+              <a:rPr sz="1500" b="1" i="0">
+                <a:solidFill>
+                  <a:srgbClr val="1C1B19"/>
+                </a:solidFill>
+                <a:latin typeface="Source Serif 4"/>
+              </a:rPr>
+              <a:t>Be honest about the research.</a:t>
+            </a:r>
+          </a:p>
+          <a:p>
+            <a:pPr algn="l">
+              <a:spcAft>
+                <a:spcPts val="585"/>
+              </a:spcAft>
+            </a:pPr>
+            <a:r>
+              <a:rPr sz="1300" b="0" i="0">
+                <a:solidFill>
+                  <a:srgbClr val="1C1B19"/>
+                </a:solidFill>
+                <a:latin typeface="Source Serif 4"/>
+              </a:rPr>
+              <a:t>Most of these studies were with college students, and Steel's motivation equation is a simplified model. Say so. Students trust you more for it.</a:t>
+            </a:r>
+          </a:p>
+          <a:p>
+            <a:pPr algn="l">
+              <a:spcAft>
+                <a:spcPts val="585"/>
+              </a:spcAft>
+            </a:pPr>
+            <a:r>
+              <a:rPr sz="1300" b="0" i="0">
+                <a:solidFill>
+                  <a:srgbClr val="1C1B19"/>
+                </a:solidFill>
+                <a:latin typeface="Source Serif 4"/>
+              </a:rPr>
+              <a:t/>
+            </a:r>
+          </a:p>
+          <a:p>
+            <a:pPr algn="l">
+              <a:spcAft>
+                <a:spcPts val="585"/>
+              </a:spcAft>
+            </a:pPr>
+            <a:r>
+              <a:rPr sz="1500" b="1" i="0">
+                <a:solidFill>
+                  <a:srgbClr val="1C1B19"/>
+                </a:solidFill>
+                <a:latin typeface="Source Serif 4"/>
+              </a:rPr>
+              <a:t>When it's more than procrastination.</a:t>
+            </a:r>
+          </a:p>
+          <a:p>
+            <a:pPr algn="l">
+              <a:spcAft>
+                <a:spcPts val="585"/>
+              </a:spcAft>
+            </a:pPr>
+            <a:r>
+              <a:rPr sz="1300" b="0" i="0">
+                <a:solidFill>
+                  <a:srgbClr val="1C1B19"/>
+                </a:solidFill>
+                <a:latin typeface="Source Serif 4"/>
+              </a:rPr>
+              <a:t>A student who can't start things in most classes, no matter what they try, or who has always struggled with time and finishing, may have ADHD or another learning difference. Connect them with the learning specialist or a counselor.</a:t>
+            </a:r>
+          </a:p>
+          <a:p>
+            <a:pPr algn="l">
+              <a:spcAft>
+                <a:spcPts val="585"/>
+              </a:spcAft>
+            </a:pPr>
+            <a:r>
+              <a:rPr sz="1300" b="0" i="0">
+                <a:solidFill>
+                  <a:srgbClr val="1C1B19"/>
+                </a:solidFill>
+                <a:latin typeface="Source Serif 4"/>
+              </a:rPr>
+              <a:t/>
+            </a:r>
+          </a:p>
+          <a:p>
+            <a:pPr algn="l">
+              <a:spcAft>
+                <a:spcPts val="585"/>
+              </a:spcAft>
+            </a:pPr>
+            <a:r>
+              <a:rPr sz="1500" b="1" i="0">
+                <a:solidFill>
+                  <a:srgbClr val="1C1B19"/>
+                </a:solidFill>
+                <a:latin typeface="Source Serif 4"/>
+              </a:rPr>
+              <a:t>When mood is the bigger problem.</a:t>
+            </a:r>
+          </a:p>
+          <a:p>
+            <a:pPr algn="l">
+              <a:spcAft>
+                <a:spcPts val="585"/>
+              </a:spcAft>
+            </a:pPr>
+            <a:r>
+              <a:rPr sz="1300" b="0" i="0">
+                <a:solidFill>
+                  <a:srgbClr val="1C1B19"/>
+                </a:solidFill>
+                <a:latin typeface="Source Serif 4"/>
+              </a:rPr>
+              <a:t>If a student says avoiding work comes with feeling anxious, flat or hopeless most days, or that they're so far behind catching up feels impossible, thank them and walk them to a counselor that day. Don't work through it in front of the class.</a:t>
+            </a:r>
+          </a:p>
+          <a:p>
+            <a:pPr algn="l">
+              <a:spcAft>
+                <a:spcPts val="585"/>
+              </a:spcAft>
+            </a:pPr>
+            <a:r>
+              <a:rPr sz="1300" b="0" i="0">
+                <a:solidFill>
+                  <a:srgbClr val="1C1B19"/>
+                </a:solidFill>
+                <a:latin typeface="Source Serif 4"/>
+              </a:rPr>
+              <a:t/>
+            </a:r>
+          </a:p>
+        </p:txBody>
+      </p:sp>
+    </p:spTree>
+  </p:cSld>
+  <p:clrMapOvr>
+    <a:masterClrMapping/>
+  </p:clrMapOvr>
+</p:sld>
+</file>
+
+<file path=ppt/slides/slide14.xml><?xml version="1.0" encoding="utf-8"?>
+<p:sld xmlns:a="http://schemas.openxmlformats.org/drawingml/2006/main" xmlns:p="http://schemas.openxmlformats.org/presentationml/2006/main" xmlns:r="http://schemas.openxmlformats.org/officeDocument/2006/relationships" show="0">
+  <p:cSld>
+    <p:bg>
+      <p:bgPr>
+        <a:solidFill>
+          <a:srgbClr val="EEEBE4"/>
+        </a:solidFill>
+        <a:effectLst/>
+      </p:bgPr>
+    </p:bg>
+    <p:spTree>
+      <p:nvGrpSpPr>
+        <p:cNvPr id="1" name=""/>
+        <p:cNvGrpSpPr/>
+        <p:nvPr/>
+      </p:nvGrpSpPr>
+      <p:grpSpPr/>
+      <p:sp>
+        <p:nvSpPr>
+          <p:cNvPr id="2" name="Rectangle 1"/>
+          <p:cNvSpPr/>
+          <p:nvPr/>
+        </p:nvSpPr>
+        <p:spPr>
+          <a:xfrm>
+            <a:off x="0" y="0"/>
+            <a:ext cx="12191695" cy="384048"/>
+          </a:xfrm>
+          <a:prstGeom prst="rect">
+            <a:avLst/>
+          </a:prstGeom>
+          <a:solidFill>
+            <a:srgbClr val="0B2D5B"/>
+          </a:solidFill>
+          <a:ln>
+            <a:noFill/>
+          </a:ln>
+          <a:effectLst/>
+        </p:spPr>
+        <p:style>
+          <a:lnRef idx="1">
+            <a:schemeClr val="accent1"/>
+          </a:lnRef>
+          <a:fillRef idx="3">
+            <a:schemeClr val="accent1"/>
+          </a:fillRef>
+          <a:effectRef idx="2">
+            <a:schemeClr val="accent1"/>
+          </a:effectRef>
+          <a:fontRef idx="minor">
+            <a:schemeClr val="lt1"/>
+          </a:fontRef>
+        </p:style>
+        <p:txBody>
+          <a:bodyPr rtlCol="0" anchor="ctr"/>
+          <a:lstStyle/>
+          <a:p>
+            <a:pPr algn="ctr"/>
+          </a:p>
+        </p:txBody>
+      </p:sp>
+      <p:sp>
+        <p:nvSpPr>
+          <p:cNvPr id="3" name="TextBox 2"/>
+          <p:cNvSpPr txBox="1"/>
+          <p:nvPr/>
+        </p:nvSpPr>
+        <p:spPr>
+          <a:xfrm>
+            <a:off x="548640" y="100584"/>
+            <a:ext cx="10972800" cy="274320"/>
+          </a:xfrm>
+          <a:prstGeom prst="rect">
+            <a:avLst/>
+          </a:prstGeom>
+          <a:noFill/>
+        </p:spPr>
+        <p:txBody>
+          <a:bodyPr wrap="square" anchor="t" lIns="0" rIns="0" tIns="0" bIns="0">
+            <a:spAutoFit/>
+          </a:bodyPr>
+          <a:lstStyle/>
+          <a:p>
+            <a:pPr algn="l">
+              <a:spcAft>
+                <a:spcPts val="495"/>
+              </a:spcAft>
+            </a:pPr>
+            <a:r>
+              <a:rPr sz="1100" b="1" i="0">
+                <a:solidFill>
+                  <a:srgbClr val="FFFFFF"/>
+                </a:solidFill>
+                <a:latin typeface="Inter Tight"/>
+              </a:rPr>
+              <a:t>TEACHER PAGE  ·  skipped when you present  ·  Every student in the room</a:t>
+            </a:r>
+          </a:p>
+        </p:txBody>
+      </p:sp>
+      <p:sp>
+        <p:nvSpPr>
+          <p:cNvPr id="4" name="TextBox 3"/>
+          <p:cNvSpPr txBox="1"/>
+          <p:nvPr/>
+        </p:nvSpPr>
+        <p:spPr>
+          <a:xfrm>
+            <a:off x="548640" y="685800"/>
+            <a:ext cx="10972800" cy="640080"/>
+          </a:xfrm>
+          <a:prstGeom prst="rect">
+            <a:avLst/>
+          </a:prstGeom>
+          <a:noFill/>
+        </p:spPr>
+        <p:txBody>
+          <a:bodyPr wrap="square" anchor="t" lIns="0" rIns="0" tIns="0" bIns="0">
+            <a:spAutoFit/>
+          </a:bodyPr>
+          <a:lstStyle/>
+          <a:p>
+            <a:pPr algn="l">
+              <a:spcAft>
+                <a:spcPts val="1350"/>
+              </a:spcAft>
+            </a:pPr>
+            <a:r>
+              <a:rPr sz="3000" b="1" i="0">
+                <a:solidFill>
+                  <a:srgbClr val="1C1B19"/>
+                </a:solidFill>
+                <a:latin typeface="Source Serif 4"/>
+              </a:rPr>
+              <a:t>Every student in the room</a:t>
+            </a:r>
+          </a:p>
+        </p:txBody>
+      </p:sp>
+      <p:sp>
+        <p:nvSpPr>
+          <p:cNvPr id="5" name="TextBox 4"/>
+          <p:cNvSpPr txBox="1"/>
+          <p:nvPr/>
+        </p:nvSpPr>
+        <p:spPr>
+          <a:xfrm>
+            <a:off x="548640" y="1325880"/>
+            <a:ext cx="10972800" cy="365760"/>
+          </a:xfrm>
+          <a:prstGeom prst="rect">
+            <a:avLst/>
+          </a:prstGeom>
+          <a:noFill/>
+        </p:spPr>
+        <p:txBody>
+          <a:bodyPr wrap="square" anchor="t" lIns="0" rIns="0" tIns="0" bIns="0">
+            <a:spAutoFit/>
+          </a:bodyPr>
+          <a:lstStyle/>
+          <a:p>
+            <a:pPr algn="l">
+              <a:spcAft>
+                <a:spcPts val="630"/>
+              </a:spcAft>
+            </a:pPr>
+            <a:r>
+              <a:rPr sz="1400" b="0" i="0">
+                <a:solidFill>
+                  <a:srgbClr val="5D5A54"/>
+                </a:solidFill>
+                <a:latin typeface="Inter Tight"/>
+              </a:rPr>
+              <a:t>Culture, family, identity, ability and money: what to keep in mind for this topic.</a:t>
+            </a:r>
+          </a:p>
+        </p:txBody>
+      </p:sp>
+      <p:sp>
+        <p:nvSpPr>
+          <p:cNvPr id="6" name="TextBox 5"/>
+          <p:cNvSpPr txBox="1"/>
+          <p:nvPr/>
+        </p:nvSpPr>
+        <p:spPr>
+          <a:xfrm>
+            <a:off x="548640" y="1828800"/>
+            <a:ext cx="5394960" cy="4572000"/>
+          </a:xfrm>
+          <a:prstGeom prst="rect">
+            <a:avLst/>
+          </a:prstGeom>
+          <a:noFill/>
+        </p:spPr>
+        <p:txBody>
+          <a:bodyPr wrap="square" anchor="t" lIns="0" rIns="0" tIns="0" bIns="0">
+            <a:spAutoFit/>
+          </a:bodyPr>
+          <a:lstStyle/>
+          <a:p>
+            <a:pPr algn="l">
+              <a:spcAft>
+                <a:spcPts val="585"/>
+              </a:spcAft>
+            </a:pPr>
+            <a:r>
+              <a:rPr sz="1500" b="1" i="0">
+                <a:solidFill>
+                  <a:srgbClr val="1C1B19"/>
+                </a:solidFill>
+                <a:latin typeface="Source Serif 4"/>
+              </a:rPr>
+              <a:t>ADHD and executive function.</a:t>
+            </a:r>
+          </a:p>
+          <a:p>
+            <a:pPr algn="l">
+              <a:spcAft>
+                <a:spcPts val="585"/>
+              </a:spcAft>
+            </a:pPr>
+            <a:r>
+              <a:rPr sz="1300" b="0" i="0">
+                <a:solidFill>
+                  <a:srgbClr val="1C1B19"/>
+                </a:solidFill>
+                <a:latin typeface="Source Serif 4"/>
+              </a:rPr>
+              <a:t>For students with ADHD, starting is often the hardest part, and willpower talk makes it worse. If-then plans, timers and adding friction are the same tools that help them most. Avoid diagnoses as casual adjectives ("I'm so ADHD today") in your own examples.</a:t>
+            </a:r>
+          </a:p>
+          <a:p>
+            <a:pPr algn="l">
+              <a:spcAft>
+                <a:spcPts val="585"/>
+              </a:spcAft>
+            </a:pPr>
+            <a:r>
+              <a:rPr sz="1300" b="0" i="0">
+                <a:solidFill>
+                  <a:srgbClr val="1C1B19"/>
+                </a:solidFill>
+                <a:latin typeface="Source Serif 4"/>
+              </a:rPr>
+              <a:t/>
+            </a:r>
+          </a:p>
+          <a:p>
+            <a:pPr algn="l">
+              <a:spcAft>
+                <a:spcPts val="585"/>
+              </a:spcAft>
+            </a:pPr>
+            <a:r>
+              <a:rPr sz="1500" b="1" i="0">
+                <a:solidFill>
+                  <a:srgbClr val="1C1B19"/>
+                </a:solidFill>
+                <a:latin typeface="Source Serif 4"/>
+              </a:rPr>
+              <a:t>Time after school isn't equal.</a:t>
+            </a:r>
+          </a:p>
+          <a:p>
+            <a:pPr algn="l">
+              <a:spcAft>
+                <a:spcPts val="585"/>
+              </a:spcAft>
+            </a:pPr>
+            <a:r>
+              <a:rPr sz="1300" b="0" i="0">
+                <a:solidFill>
+                  <a:srgbClr val="1C1B19"/>
+                </a:solidFill>
+                <a:latin typeface="Source Serif 4"/>
+              </a:rPr>
+              <a:t>Some students work, ride a long bus, or watch younger siblings or cousins until an adult gets home. Priya's scenario has this in it. Short sprints and a 10-minute first step fit a tight evening. Every tool in this lesson is free.</a:t>
+            </a:r>
+          </a:p>
+          <a:p>
+            <a:pPr algn="l">
+              <a:spcAft>
+                <a:spcPts val="585"/>
+              </a:spcAft>
+            </a:pPr>
+            <a:r>
+              <a:rPr sz="1300" b="0" i="0">
+                <a:solidFill>
+                  <a:srgbClr val="1C1B19"/>
+                </a:solidFill>
+                <a:latin typeface="Source Serif 4"/>
+              </a:rPr>
+              <a:t/>
+            </a:r>
+          </a:p>
+          <a:p>
+            <a:pPr algn="l">
+              <a:spcAft>
+                <a:spcPts val="585"/>
+              </a:spcAft>
+            </a:pPr>
+            <a:r>
+              <a:rPr sz="1500" b="1" i="0">
+                <a:solidFill>
+                  <a:srgbClr val="1C1B19"/>
+                </a:solidFill>
+                <a:latin typeface="Source Serif 4"/>
+              </a:rPr>
+              <a:t>"Put the phone in another room" assumes another room.</a:t>
+            </a:r>
+          </a:p>
+          <a:p>
+            <a:pPr algn="l">
+              <a:spcAft>
+                <a:spcPts val="585"/>
+              </a:spcAft>
+            </a:pPr>
+            <a:r>
+              <a:rPr sz="1300" b="0" i="0">
+                <a:solidFill>
+                  <a:srgbClr val="1C1B19"/>
+                </a:solidFill>
+                <a:latin typeface="Source Serif 4"/>
+              </a:rPr>
+              <a:t>Some students share a bedroom or study at the kitchen table. A bag, a drawer, a friend holding it, or app timers all add the same friction.</a:t>
+            </a:r>
+          </a:p>
+          <a:p>
+            <a:pPr algn="l">
+              <a:spcAft>
+                <a:spcPts val="585"/>
+              </a:spcAft>
+            </a:pPr>
+            <a:r>
+              <a:rPr sz="1300" b="0" i="0">
+                <a:solidFill>
+                  <a:srgbClr val="1C1B19"/>
+                </a:solidFill>
+                <a:latin typeface="Source Serif 4"/>
+              </a:rPr>
+              <a:t/>
+            </a:r>
+          </a:p>
+        </p:txBody>
+      </p:sp>
+      <p:sp>
+        <p:nvSpPr>
+          <p:cNvPr id="7" name="TextBox 6"/>
+          <p:cNvSpPr txBox="1"/>
+          <p:nvPr/>
+        </p:nvSpPr>
+        <p:spPr>
+          <a:xfrm>
+            <a:off x="6217920" y="1828800"/>
+            <a:ext cx="5394960" cy="4572000"/>
+          </a:xfrm>
+          <a:prstGeom prst="rect">
+            <a:avLst/>
+          </a:prstGeom>
+          <a:noFill/>
+        </p:spPr>
+        <p:txBody>
+          <a:bodyPr wrap="square" anchor="t" lIns="0" rIns="0" tIns="0" bIns="0">
+            <a:spAutoFit/>
+          </a:bodyPr>
+          <a:lstStyle/>
+          <a:p>
+            <a:pPr algn="l">
+              <a:spcAft>
+                <a:spcPts val="585"/>
+              </a:spcAft>
+            </a:pPr>
+            <a:r>
+              <a:rPr sz="1500" b="1" i="0">
+                <a:solidFill>
+                  <a:srgbClr val="1C1B19"/>
+                </a:solidFill>
+                <a:latin typeface="Source Serif 4"/>
+              </a:rPr>
+              <a:t>The person who asks can be anyone.</a:t>
+            </a:r>
+          </a:p>
+          <a:p>
+            <a:pPr algn="l">
+              <a:spcAft>
+                <a:spcPts val="585"/>
+              </a:spcAft>
+            </a:pPr>
+            <a:r>
+              <a:rPr sz="1300" b="0" i="0">
+                <a:solidFill>
+                  <a:srgbClr val="1C1B19"/>
+                </a:solidFill>
+                <a:latin typeface="Source Serif 4"/>
+              </a:rPr>
+              <a:t>"Tell someone who'll ask about it" works with a grandparent, an older sibling, a coach, a friend on a call, or a foster parent. Don't assume a parent is home to check.</a:t>
+            </a:r>
+          </a:p>
+          <a:p>
+            <a:pPr algn="l">
+              <a:spcAft>
+                <a:spcPts val="585"/>
+              </a:spcAft>
+            </a:pPr>
+            <a:r>
+              <a:rPr sz="1300" b="0" i="0">
+                <a:solidFill>
+                  <a:srgbClr val="1C1B19"/>
+                </a:solidFill>
+                <a:latin typeface="Source Serif 4"/>
+              </a:rPr>
+              <a:t/>
+            </a:r>
+          </a:p>
+          <a:p>
+            <a:pPr algn="l">
+              <a:spcAft>
+                <a:spcPts val="585"/>
+              </a:spcAft>
+            </a:pPr>
+            <a:r>
+              <a:rPr sz="1500" b="1" i="0">
+                <a:solidFill>
+                  <a:srgbClr val="1C1B19"/>
+                </a:solidFill>
+                <a:latin typeface="Source Serif 4"/>
+              </a:rPr>
+              <a:t>Some students carry extra weight on a hard task.</a:t>
+            </a:r>
+          </a:p>
+          <a:p>
+            <a:pPr algn="l">
+              <a:spcAft>
+                <a:spcPts val="585"/>
+              </a:spcAft>
+            </a:pPr>
+            <a:r>
+              <a:rPr sz="1300" b="0" i="0">
+                <a:solidFill>
+                  <a:srgbClr val="1C1B19"/>
+                </a:solidFill>
+                <a:latin typeface="Source Serif 4"/>
+              </a:rPr>
+              <a:t>The brain flags a hard task as a threat to your image or your sense of being smart. A student who is first in their family at a school like this, or new to it, may feel that threat more. Name it as common and keep the reflection private.</a:t>
+            </a:r>
+          </a:p>
+          <a:p>
+            <a:pPr algn="l">
+              <a:spcAft>
+                <a:spcPts val="585"/>
+              </a:spcAft>
+            </a:pPr>
+            <a:r>
+              <a:rPr sz="1300" b="0" i="0">
+                <a:solidFill>
+                  <a:srgbClr val="1C1B19"/>
+                </a:solidFill>
+                <a:latin typeface="Source Serif 4"/>
+              </a:rPr>
+              <a:t/>
+            </a:r>
+          </a:p>
+          <a:p>
+            <a:pPr algn="l">
+              <a:spcAft>
+                <a:spcPts val="585"/>
+              </a:spcAft>
+            </a:pPr>
+            <a:r>
+              <a:rPr sz="1500" b="1" i="0">
+                <a:solidFill>
+                  <a:srgbClr val="1C1B19"/>
+                </a:solidFill>
+                <a:latin typeface="Source Serif 4"/>
+              </a:rPr>
+              <a:t>Language and "I don't get the assignment."</a:t>
+            </a:r>
+          </a:p>
+          <a:p>
+            <a:pPr algn="l">
+              <a:spcAft>
+                <a:spcPts val="585"/>
+              </a:spcAft>
+            </a:pPr>
+            <a:r>
+              <a:rPr sz="1300" b="0" i="0">
+                <a:solidFill>
+                  <a:srgbClr val="1C1B19"/>
+                </a:solidFill>
+                <a:latin typeface="Source Serif 4"/>
+              </a:rPr>
+              <a:t>For a student learning English, "I don't understand what they want" is a real reason a task feels impossible to start. Asking the teacher counts as a first step. A bad first draft can start in any language.</a:t>
+            </a:r>
+          </a:p>
+          <a:p>
+            <a:pPr algn="l">
+              <a:spcAft>
+                <a:spcPts val="585"/>
+              </a:spcAft>
+            </a:pPr>
+            <a:r>
+              <a:rPr sz="1300" b="0" i="0">
+                <a:solidFill>
+                  <a:srgbClr val="1C1B19"/>
+                </a:solidFill>
+                <a:latin typeface="Source Serif 4"/>
+              </a:rPr>
+              <a:t/>
+            </a:r>
+          </a:p>
+        </p:txBody>
+      </p:sp>
+    </p:spTree>
+  </p:cSld>
+  <p:clrMapOvr>
+    <a:masterClrMapping/>
+  </p:clrMapOvr>
+</p:sld>
+</file>
+
+<file path=ppt/slides/slide15.xml><?xml version="1.0" encoding="utf-8"?>
+<p:sld xmlns:a="http://schemas.openxmlformats.org/drawingml/2006/main" xmlns:p="http://schemas.openxmlformats.org/presentationml/2006/main" xmlns:r="http://schemas.openxmlformats.org/officeDocument/2006/relationships" show="0">
+  <p:cSld>
+    <p:bg>
+      <p:bgPr>
+        <a:solidFill>
+          <a:srgbClr val="EEEBE4"/>
+        </a:solidFill>
+        <a:effectLst/>
+      </p:bgPr>
+    </p:bg>
+    <p:spTree>
+      <p:nvGrpSpPr>
+        <p:cNvPr id="1" name=""/>
+        <p:cNvGrpSpPr/>
+        <p:nvPr/>
+      </p:nvGrpSpPr>
+      <p:grpSpPr/>
+      <p:sp>
+        <p:nvSpPr>
+          <p:cNvPr id="2" name="Rectangle 1"/>
+          <p:cNvSpPr/>
+          <p:nvPr/>
+        </p:nvSpPr>
+        <p:spPr>
+          <a:xfrm>
+            <a:off x="0" y="0"/>
+            <a:ext cx="12191695" cy="384048"/>
+          </a:xfrm>
+          <a:prstGeom prst="rect">
+            <a:avLst/>
+          </a:prstGeom>
+          <a:solidFill>
+            <a:srgbClr val="0B2D5B"/>
+          </a:solidFill>
+          <a:ln>
+            <a:noFill/>
+          </a:ln>
+          <a:effectLst/>
+        </p:spPr>
+        <p:style>
+          <a:lnRef idx="1">
+            <a:schemeClr val="accent1"/>
+          </a:lnRef>
+          <a:fillRef idx="3">
+            <a:schemeClr val="accent1"/>
+          </a:fillRef>
+          <a:effectRef idx="2">
+            <a:schemeClr val="accent1"/>
+          </a:effectRef>
+          <a:fontRef idx="minor">
+            <a:schemeClr val="lt1"/>
+          </a:fontRef>
+        </p:style>
+        <p:txBody>
+          <a:bodyPr rtlCol="0" anchor="ctr"/>
+          <a:lstStyle/>
+          <a:p>
+            <a:pPr algn="ctr"/>
+          </a:p>
+        </p:txBody>
+      </p:sp>
+      <p:sp>
+        <p:nvSpPr>
+          <p:cNvPr id="3" name="TextBox 2"/>
+          <p:cNvSpPr txBox="1"/>
+          <p:nvPr/>
+        </p:nvSpPr>
+        <p:spPr>
+          <a:xfrm>
+            <a:off x="548640" y="100584"/>
+            <a:ext cx="10972800" cy="274320"/>
+          </a:xfrm>
+          <a:prstGeom prst="rect">
+            <a:avLst/>
+          </a:prstGeom>
+          <a:noFill/>
+        </p:spPr>
+        <p:txBody>
+          <a:bodyPr wrap="square" anchor="t" lIns="0" rIns="0" tIns="0" bIns="0">
+            <a:spAutoFit/>
+          </a:bodyPr>
+          <a:lstStyle/>
+          <a:p>
+            <a:pPr algn="l">
+              <a:spcAft>
+                <a:spcPts val="495"/>
+              </a:spcAft>
+            </a:pPr>
+            <a:r>
+              <a:rPr sz="1100" b="1" i="0">
+                <a:solidFill>
+                  <a:srgbClr val="FFFFFF"/>
+                </a:solidFill>
+                <a:latin typeface="Inter Tight"/>
+              </a:rPr>
+              <a:t>TEACHER PAGE  ·  skipped when you present  ·  Background</a:t>
+            </a:r>
+          </a:p>
+        </p:txBody>
+      </p:sp>
+      <p:sp>
+        <p:nvSpPr>
+          <p:cNvPr id="4" name="TextBox 3"/>
+          <p:cNvSpPr txBox="1"/>
+          <p:nvPr/>
+        </p:nvSpPr>
+        <p:spPr>
+          <a:xfrm>
+            <a:off x="548640" y="685800"/>
+            <a:ext cx="10972800" cy="640080"/>
+          </a:xfrm>
+          <a:prstGeom prst="rect">
+            <a:avLst/>
+          </a:prstGeom>
+          <a:noFill/>
+        </p:spPr>
+        <p:txBody>
+          <a:bodyPr wrap="square" anchor="t" lIns="0" rIns="0" tIns="0" bIns="0">
+            <a:spAutoFit/>
+          </a:bodyPr>
+          <a:lstStyle/>
+          <a:p>
+            <a:pPr algn="l">
+              <a:spcAft>
+                <a:spcPts val="1350"/>
+              </a:spcAft>
+            </a:pPr>
+            <a:r>
+              <a:rPr sz="3000" b="1" i="0">
+                <a:solidFill>
+                  <a:srgbClr val="1C1B19"/>
+                </a:solidFill>
+                <a:latin typeface="Source Serif 4"/>
+              </a:rPr>
+              <a:t>What the research says</a:t>
+            </a:r>
+          </a:p>
+        </p:txBody>
+      </p:sp>
+      <p:sp>
+        <p:nvSpPr>
+          <p:cNvPr id="5" name="TextBox 4"/>
+          <p:cNvSpPr txBox="1"/>
+          <p:nvPr/>
+        </p:nvSpPr>
+        <p:spPr>
+          <a:xfrm>
+            <a:off x="548640" y="1463040"/>
+            <a:ext cx="5394960" cy="4937760"/>
+          </a:xfrm>
+          <a:prstGeom prst="rect">
+            <a:avLst/>
+          </a:prstGeom>
+          <a:noFill/>
+        </p:spPr>
+        <p:txBody>
+          <a:bodyPr wrap="square" anchor="t" lIns="0" rIns="0" tIns="0" bIns="0">
+            <a:spAutoFit/>
+          </a:bodyPr>
+          <a:lstStyle/>
+          <a:p>
+            <a:pPr algn="l">
+              <a:spcAft>
+                <a:spcPts val="585"/>
+              </a:spcAft>
+            </a:pPr>
+            <a:r>
+              <a:rPr sz="1300" b="0" i="0">
+                <a:solidFill>
+                  <a:srgbClr val="1C1B19"/>
+                </a:solidFill>
+                <a:latin typeface="Source Serif 4"/>
+              </a:rPr>
+              <a:t>Procrastination is choosing short-term mood repair over long-term goals: avoiding how the task makes you feel.</a:t>
+            </a:r>
+          </a:p>
+          <a:p>
+            <a:pPr algn="l">
+              <a:spcAft>
+                <a:spcPts val="585"/>
+              </a:spcAft>
+            </a:pPr>
+            <a:r>
+              <a:rPr sz="1050" b="0" i="0">
+                <a:solidFill>
+                  <a:srgbClr val="5D5A54"/>
+                </a:solidFill>
+                <a:latin typeface="Inter Tight"/>
+              </a:rPr>
+              <a:t>Sirois and Pychyl, Social and Personality Psychology Compass, 2013</a:t>
+            </a:r>
+          </a:p>
+          <a:p>
+            <a:pPr algn="l">
+              <a:spcAft>
+                <a:spcPts val="585"/>
+              </a:spcAft>
+            </a:pPr>
+            <a:r>
+              <a:rPr sz="1300" b="0" i="0">
+                <a:solidFill>
+                  <a:srgbClr val="1C1B19"/>
+                </a:solidFill>
+                <a:latin typeface="Source Serif 4"/>
+              </a:rPr>
+              <a:t>Combining hundreds of studies, one model of motivation: confidence times value, divided by impulsiveness times delay. Simplified, it shows four places to push.</a:t>
+            </a:r>
+          </a:p>
+          <a:p>
+            <a:pPr algn="l">
+              <a:spcAft>
+                <a:spcPts val="585"/>
+              </a:spcAft>
+            </a:pPr>
+            <a:r>
+              <a:rPr sz="1050" b="0" i="0">
+                <a:solidFill>
+                  <a:srgbClr val="5D5A54"/>
+                </a:solidFill>
+                <a:latin typeface="Inter Tight"/>
+              </a:rPr>
+              <a:t>Steel, Psychological Bulletin, 2007</a:t>
+            </a:r>
+          </a:p>
+          <a:p>
+            <a:pPr algn="l">
+              <a:spcAft>
+                <a:spcPts val="585"/>
+              </a:spcAft>
+            </a:pPr>
+            <a:r>
+              <a:rPr sz="1300" b="0" i="0">
+                <a:solidFill>
+                  <a:srgbClr val="1C1B19"/>
+                </a:solidFill>
+                <a:latin typeface="Source Serif 4"/>
+              </a:rPr>
+              <a:t>College procrastinators felt less stressed early in the semester. By the end they were more stressed, got sick more often and earned lower grades.</a:t>
+            </a:r>
+          </a:p>
+          <a:p>
+            <a:pPr algn="l">
+              <a:spcAft>
+                <a:spcPts val="585"/>
+              </a:spcAft>
+            </a:pPr>
+            <a:r>
+              <a:rPr sz="1050" b="0" i="0">
+                <a:solidFill>
+                  <a:srgbClr val="5D5A54"/>
+                </a:solidFill>
+                <a:latin typeface="Inter Tight"/>
+              </a:rPr>
+              <a:t>Tice and Baumeister, Psychological Science, 1997</a:t>
+            </a:r>
+          </a:p>
+          <a:p>
+            <a:pPr algn="l">
+              <a:spcAft>
+                <a:spcPts val="585"/>
+              </a:spcAft>
+            </a:pPr>
+            <a:r>
+              <a:rPr sz="1300" b="0" i="0">
+                <a:solidFill>
+                  <a:srgbClr val="1C1B19"/>
+                </a:solidFill>
+                <a:latin typeface="Source Serif 4"/>
+              </a:rPr>
+              <a:t>Students who forgave themselves for procrastinating before one exam procrastinated less before the next.</a:t>
+            </a:r>
+          </a:p>
+          <a:p>
+            <a:pPr algn="l">
+              <a:spcAft>
+                <a:spcPts val="585"/>
+              </a:spcAft>
+            </a:pPr>
+            <a:r>
+              <a:rPr sz="1050" b="0" i="0">
+                <a:solidFill>
+                  <a:srgbClr val="5D5A54"/>
+                </a:solidFill>
+                <a:latin typeface="Inter Tight"/>
+              </a:rPr>
+              <a:t>Wohl, Pychyl and Bennett, Personality and Individual Differences, 2010</a:t>
+            </a:r>
+          </a:p>
+        </p:txBody>
+      </p:sp>
+      <p:sp>
+        <p:nvSpPr>
+          <p:cNvPr id="6" name="TextBox 5"/>
+          <p:cNvSpPr txBox="1"/>
+          <p:nvPr/>
+        </p:nvSpPr>
+        <p:spPr>
+          <a:xfrm>
+            <a:off x="6217920" y="1463040"/>
+            <a:ext cx="5394960" cy="4937760"/>
+          </a:xfrm>
+          <a:prstGeom prst="rect">
+            <a:avLst/>
+          </a:prstGeom>
+          <a:noFill/>
+        </p:spPr>
+        <p:txBody>
+          <a:bodyPr wrap="square" anchor="t" lIns="0" rIns="0" tIns="0" bIns="0">
+            <a:spAutoFit/>
+          </a:bodyPr>
+          <a:lstStyle/>
+          <a:p>
+            <a:pPr algn="l">
+              <a:spcAft>
+                <a:spcPts val="585"/>
+              </a:spcAft>
+            </a:pPr>
+            <a:r>
+              <a:rPr sz="1300" b="0" i="0">
+                <a:solidFill>
+                  <a:srgbClr val="1C1B19"/>
+                </a:solidFill>
+                <a:latin typeface="Source Serif 4"/>
+              </a:rPr>
+              <a:t>A review of 94 studies found if-then plans (when, where and what, decided ahead) meaningfully increase follow-through.</a:t>
+            </a:r>
+          </a:p>
+          <a:p>
+            <a:pPr algn="l">
+              <a:spcAft>
+                <a:spcPts val="585"/>
+              </a:spcAft>
+            </a:pPr>
+            <a:r>
+              <a:rPr sz="1050" b="0" i="0">
+                <a:solidFill>
+                  <a:srgbClr val="5D5A54"/>
+                </a:solidFill>
+                <a:latin typeface="Inter Tight"/>
+              </a:rPr>
+              <a:t>Gollwitzer and Sheeran, Advances in Experimental Social Psychology, 2006</a:t>
+            </a:r>
+          </a:p>
+          <a:p>
+            <a:pPr algn="l">
+              <a:spcAft>
+                <a:spcPts val="585"/>
+              </a:spcAft>
+            </a:pPr>
+            <a:r>
+              <a:rPr sz="1300" b="0" i="0">
+                <a:solidFill>
+                  <a:srgbClr val="1C1B19"/>
+                </a:solidFill>
+                <a:latin typeface="Source Serif 4"/>
+              </a:rPr>
+              <a:t>Students did worse on attention and memory tasks with their phone on the desk, face down and silent, than with it in another room.</a:t>
+            </a:r>
+          </a:p>
+          <a:p>
+            <a:pPr algn="l">
+              <a:spcAft>
+                <a:spcPts val="585"/>
+              </a:spcAft>
+            </a:pPr>
+            <a:r>
+              <a:rPr sz="1050" b="0" i="0">
+                <a:solidFill>
+                  <a:srgbClr val="5D5A54"/>
+                </a:solidFill>
+                <a:latin typeface="Inter Tight"/>
+              </a:rPr>
+              <a:t>Ward et al., Journal of the Association for Consumer Research, 2017</a:t>
+            </a:r>
+          </a:p>
+          <a:p>
+            <a:pPr algn="l">
+              <a:spcAft>
+                <a:spcPts val="585"/>
+              </a:spcAft>
+            </a:pPr>
+            <a:r>
+              <a:rPr sz="1300" b="0" i="0">
+                <a:solidFill>
+                  <a:srgbClr val="1C1B19"/>
+                </a:solidFill>
+                <a:latin typeface="Source Serif 4"/>
+              </a:rPr>
+              <a:t>In brain scans, thinking about yourself ten years from now looks more like thinking about another person than about yourself.</a:t>
+            </a:r>
+          </a:p>
+          <a:p>
+            <a:pPr algn="l">
+              <a:spcAft>
+                <a:spcPts val="585"/>
+              </a:spcAft>
+            </a:pPr>
+            <a:r>
+              <a:rPr sz="1050" b="0" i="0">
+                <a:solidFill>
+                  <a:srgbClr val="5D5A54"/>
+                </a:solidFill>
+                <a:latin typeface="Inter Tight"/>
+              </a:rPr>
+              <a:t>Ersner-Hershfield et al., Social Cognitive and Affective Neuroscience, 2009</a:t>
+            </a:r>
+          </a:p>
+          <a:p>
+            <a:pPr algn="l">
+              <a:spcAft>
+                <a:spcPts val="585"/>
+              </a:spcAft>
+            </a:pPr>
+            <a:r>
+              <a:rPr sz="1300" b="0" i="0">
+                <a:solidFill>
+                  <a:srgbClr val="1C1B19"/>
+                </a:solidFill>
+                <a:latin typeface="Source Serif 4"/>
+              </a:rPr>
+              <a:t>People who struggle most to act on their intentions showed weaker links between the amygdala and the anterior cingulate, which helps the planner step in.</a:t>
+            </a:r>
+          </a:p>
+          <a:p>
+            <a:pPr algn="l">
+              <a:spcAft>
+                <a:spcPts val="585"/>
+              </a:spcAft>
+            </a:pPr>
+            <a:r>
+              <a:rPr sz="1050" b="0" i="0">
+                <a:solidFill>
+                  <a:srgbClr val="5D5A54"/>
+                </a:solidFill>
+                <a:latin typeface="Inter Tight"/>
+              </a:rPr>
+              <a:t>Schlüter et al., Psychological Science, 2018</a:t>
+            </a:r>
+          </a:p>
+        </p:txBody>
+      </p:sp>
+    </p:spTree>
+  </p:cSld>
+  <p:clrMapOvr>
+    <a:masterClrMapping/>
+  </p:clrMapOvr>
+</p:sld>
+</file>
+
+<file path=ppt/slides/slide2.xml><?xml version="1.0" encoding="utf-8"?>
+<p:sld xmlns:a="http://schemas.openxmlformats.org/drawingml/2006/main" xmlns:p="http://schemas.openxmlformats.org/presentationml/2006/main" xmlns:r="http://schemas.openxmlformats.org/officeDocument/2006/relationships">
+  <p:cSld>
+    <p:bg>
+      <p:bgPr>
+        <a:solidFill>
+          <a:srgbClr val="0B2D5B"/>
+        </a:solidFill>
+        <a:effectLst/>
+      </p:bgPr>
+    </p:bg>
+    <p:spTree>
+      <p:nvGrpSpPr>
+        <p:cNvPr id="1" name=""/>
+        <p:cNvGrpSpPr/>
+        <p:nvPr/>
+      </p:nvGrpSpPr>
+      <p:grpSpPr/>
+      <p:sp>
+        <p:nvSpPr>
+          <p:cNvPr id="2" name="Rectangle 1"/>
+          <p:cNvSpPr/>
+          <p:nvPr/>
+        </p:nvSpPr>
+        <p:spPr>
+          <a:xfrm>
+            <a:off x="548640" y="502920"/>
+            <a:ext cx="457200" cy="54864"/>
+          </a:xfrm>
+          <a:prstGeom prst="rect">
+            <a:avLst/>
+          </a:prstGeom>
+          <a:solidFill>
+            <a:srgbClr val="F47B20"/>
+          </a:solidFill>
+          <a:ln>
+            <a:noFill/>
+          </a:ln>
+          <a:effectLst/>
+        </p:spPr>
+        <p:style>
+          <a:lnRef idx="1">
+            <a:schemeClr val="accent1"/>
+          </a:lnRef>
+          <a:fillRef idx="3">
+            <a:schemeClr val="accent1"/>
+          </a:fillRef>
+          <a:effectRef idx="2">
+            <a:schemeClr val="accent1"/>
+          </a:effectRef>
+          <a:fontRef idx="minor">
+            <a:schemeClr val="lt1"/>
+          </a:fontRef>
+        </p:style>
+        <p:txBody>
+          <a:bodyPr rtlCol="0" anchor="ctr"/>
+          <a:lstStyle/>
+          <a:p>
+            <a:pPr algn="ctr"/>
+          </a:p>
+        </p:txBody>
+      </p:sp>
+      <p:sp>
+        <p:nvSpPr>
+          <p:cNvPr id="3" name="TextBox 2"/>
+          <p:cNvSpPr txBox="1"/>
+          <p:nvPr/>
+        </p:nvSpPr>
+        <p:spPr>
+          <a:xfrm>
+            <a:off x="1143000" y="393192"/>
+            <a:ext cx="8229600" cy="274320"/>
+          </a:xfrm>
+          <a:prstGeom prst="rect">
+            <a:avLst/>
+          </a:prstGeom>
+          <a:noFill/>
+        </p:spPr>
+        <p:txBody>
+          <a:bodyPr wrap="square" anchor="t" lIns="0" rIns="0" tIns="0" bIns="0">
+            <a:spAutoFit/>
+          </a:bodyPr>
+          <a:lstStyle/>
+          <a:p>
+            <a:pPr algn="l">
+              <a:spcAft>
+                <a:spcPts val="540"/>
+              </a:spcAft>
+            </a:pPr>
+            <a:r>
+              <a:rPr sz="1200" b="1" i="0">
+                <a:solidFill>
+                  <a:srgbClr val="5D5A54"/>
+                </a:solidFill>
+                <a:latin typeface="Inter Tight"/>
+              </a:rPr>
+              <a:t>WHY YOU CAN'T START (AND HOW TO START ANYWAY)</a:t>
+            </a:r>
+          </a:p>
+        </p:txBody>
+      </p:sp>
+      <p:sp>
+        <p:nvSpPr>
+          <p:cNvPr id="4" name="TextBox 3"/>
+          <p:cNvSpPr txBox="1"/>
+          <p:nvPr/>
+        </p:nvSpPr>
+        <p:spPr>
+          <a:xfrm>
+            <a:off x="8229600" y="6400800"/>
+            <a:ext cx="3410712" cy="274320"/>
+          </a:xfrm>
+          <a:prstGeom prst="rect">
+            <a:avLst/>
+          </a:prstGeom>
+          <a:noFill/>
+        </p:spPr>
+        <p:txBody>
+          <a:bodyPr wrap="square" anchor="t" lIns="0" rIns="0" tIns="0" bIns="0">
+            <a:spAutoFit/>
+          </a:bodyPr>
+          <a:lstStyle/>
+          <a:p>
+            <a:pPr algn="r">
+              <a:spcAft>
+                <a:spcPts val="450"/>
+              </a:spcAft>
+            </a:pPr>
+            <a:r>
+              <a:rPr sz="1000" b="0" i="0">
+                <a:solidFill>
+                  <a:srgbClr val="5D5A54"/>
+                </a:solidFill>
+                <a:latin typeface="Inter Tight"/>
+              </a:rPr>
+              <a:t>Beaver Counseling</a:t>
+            </a:r>
+          </a:p>
+        </p:txBody>
+      </p:sp>
+      <p:sp>
+        <p:nvSpPr>
+          <p:cNvPr id="5" name="TextBox 4"/>
+          <p:cNvSpPr txBox="1"/>
+          <p:nvPr/>
+        </p:nvSpPr>
+        <p:spPr>
+          <a:xfrm>
+            <a:off x="822960" y="2011680"/>
+            <a:ext cx="10515600" cy="1463040"/>
+          </a:xfrm>
+          <a:prstGeom prst="rect">
+            <a:avLst/>
+          </a:prstGeom>
+          <a:noFill/>
+        </p:spPr>
+        <p:txBody>
+          <a:bodyPr wrap="square" anchor="b" lIns="0" rIns="0" tIns="0" bIns="0">
+            <a:spAutoFit/>
+          </a:bodyPr>
+          <a:lstStyle/>
+          <a:p>
+            <a:pPr algn="l">
+              <a:spcAft>
+                <a:spcPts val="2700"/>
+              </a:spcAft>
+            </a:pPr>
+            <a:r>
+              <a:rPr sz="6000" b="1" i="0">
+                <a:solidFill>
+                  <a:srgbClr val="FFFFFF"/>
+                </a:solidFill>
+                <a:latin typeface="Source Serif 4"/>
+              </a:rPr>
+              <a:t>Why You Can't Start</a:t>
+            </a:r>
+          </a:p>
+        </p:txBody>
+      </p:sp>
+      <p:sp>
+        <p:nvSpPr>
+          <p:cNvPr id="6" name="TextBox 5"/>
+          <p:cNvSpPr txBox="1"/>
+          <p:nvPr/>
+        </p:nvSpPr>
+        <p:spPr>
+          <a:xfrm>
+            <a:off x="822960" y="3611880"/>
+            <a:ext cx="10515600" cy="914400"/>
+          </a:xfrm>
+          <a:prstGeom prst="rect">
+            <a:avLst/>
+          </a:prstGeom>
+          <a:noFill/>
+        </p:spPr>
+        <p:txBody>
+          <a:bodyPr wrap="square" anchor="t" lIns="0" rIns="0" tIns="0" bIns="0">
+            <a:spAutoFit/>
+          </a:bodyPr>
+          <a:lstStyle/>
+          <a:p>
+            <a:pPr algn="l">
+              <a:spcAft>
+                <a:spcPts val="1080"/>
+              </a:spcAft>
+            </a:pPr>
+            <a:r>
+              <a:rPr sz="2400" b="0" i="1">
+                <a:solidFill>
+                  <a:srgbClr val="E8E4DA"/>
+                </a:solidFill>
+                <a:latin typeface="Source Serif 4"/>
+              </a:rPr>
+              <a:t>And how to start anyway.</a:t>
+            </a:r>
+          </a:p>
+        </p:txBody>
+      </p:sp>
+      <p:sp>
+        <p:nvSpPr>
+          <p:cNvPr id="7" name="TextBox 6"/>
+          <p:cNvSpPr txBox="1"/>
+          <p:nvPr/>
+        </p:nvSpPr>
+        <p:spPr>
+          <a:xfrm>
+            <a:off x="822960" y="6035040"/>
+            <a:ext cx="7315200" cy="365760"/>
+          </a:xfrm>
+          <a:prstGeom prst="rect">
+            <a:avLst/>
+          </a:prstGeom>
+          <a:noFill/>
+        </p:spPr>
+        <p:txBody>
+          <a:bodyPr wrap="square" anchor="t" lIns="0" rIns="0" tIns="0" bIns="0">
+            <a:spAutoFit/>
+          </a:bodyPr>
+          <a:lstStyle/>
+          <a:p>
+            <a:pPr algn="l">
+              <a:spcAft>
+                <a:spcPts val="585"/>
+              </a:spcAft>
+            </a:pPr>
+            <a:r>
+              <a:rPr sz="1300" b="0" i="0">
+                <a:solidFill>
+                  <a:srgbClr val="E8E4DA"/>
+                </a:solidFill>
+                <a:latin typeface="Inter Tight"/>
+              </a:rPr>
+              <a:t>Beaver Upper School · Counseling</a:t>
+            </a:r>
+          </a:p>
+        </p:txBody>
+      </p:sp>
+    </p:spTree>
+  </p:cSld>
+  <p:clrMapOvr>
+    <a:masterClrMapping/>
+  </p:clrMapOvr>
+</p:sld>
+</file>
+
+<file path=ppt/slides/slide3.xml><?xml version="1.0" encoding="utf-8"?>
 <p:sld xmlns:a="http://schemas.openxmlformats.org/drawingml/2006/main" xmlns:p="http://schemas.openxmlformats.org/presentationml/2006/main" xmlns:r="http://schemas.openxmlformats.org/officeDocument/2006/relationships">
   <p:cSld>
     <p:bg>
@@ -5705,7 +7663,7 @@
                 </a:solidFill>
                 <a:latin typeface="Inter Tight"/>
               </a:rPr>
-              <a:t>THREE STUCK STUDENTS</a:t>
+              <a:t>MYTH OR FACT?</a:t>
             </a:r>
           </a:p>
         </p:txBody>
@@ -5758,7 +7716,7 @@
         <p:spPr>
           <a:xfrm>
             <a:off x="822960" y="1005840"/>
-            <a:ext cx="10515600" cy="914400"/>
+            <a:ext cx="10515600" cy="1097280"/>
           </a:xfrm>
           <a:prstGeom prst="rect">
             <a:avLst/>
@@ -5773,77 +7731,31 @@
           <a:p>
             <a:pPr algn="l">
               <a:spcAft>
-                <a:spcPts val="1530"/>
-              </a:spcAft>
-            </a:pPr>
-            <a:r>
-              <a:rPr sz="3400" b="1" i="0">
+                <a:spcPts val="1620"/>
+              </a:spcAft>
+            </a:pPr>
+            <a:r>
+              <a:rPr sz="3600" b="1" i="0">
                 <a:solidFill>
                   <a:srgbClr val="1C1B19"/>
                 </a:solidFill>
                 <a:latin typeface="Source Serif 4"/>
               </a:rPr>
-              <a:t>Which lever would help most?</a:t>
-            </a:r>
-          </a:p>
-        </p:txBody>
-      </p:sp>
-      <p:sp>
-        <p:nvSpPr>
-          <p:cNvPr id="6" name="Rectangle 5"/>
-          <p:cNvSpPr/>
-          <p:nvPr/>
-        </p:nvSpPr>
-        <p:spPr>
-          <a:xfrm>
-            <a:off x="822960" y="2103120"/>
-            <a:ext cx="3322320" cy="3840480"/>
-          </a:xfrm>
-          <a:prstGeom prst="rect">
-            <a:avLst/>
-          </a:prstGeom>
-          <a:solidFill>
-            <a:srgbClr val="FFFFFF"/>
-          </a:solidFill>
-          <a:ln w="15875">
-            <a:solidFill>
-              <a:srgbClr val="D8D2C6"/>
-            </a:solidFill>
-          </a:ln>
-          <a:effectLst/>
-        </p:spPr>
-        <p:style>
-          <a:lnRef idx="1">
-            <a:schemeClr val="accent1"/>
-          </a:lnRef>
-          <a:fillRef idx="3">
-            <a:schemeClr val="accent1"/>
-          </a:fillRef>
-          <a:effectRef idx="2">
-            <a:schemeClr val="accent1"/>
-          </a:effectRef>
-          <a:fontRef idx="minor">
-            <a:schemeClr val="lt1"/>
-          </a:fontRef>
-        </p:style>
-        <p:txBody>
-          <a:bodyPr rtlCol="0" anchor="ctr"/>
-          <a:lstStyle/>
-          <a:p>
-            <a:pPr algn="ctr"/>
-          </a:p>
-        </p:txBody>
-      </p:sp>
-      <p:sp>
-        <p:nvSpPr>
-          <p:cNvPr id="7" name="TextBox 6"/>
+              <a:t>Stand up if you think it's a fact.</a:t>
+            </a:r>
+          </a:p>
+        </p:txBody>
+      </p:sp>
+      <p:sp>
+        <p:nvSpPr>
+          <p:cNvPr id="6" name="TextBox 5"/>
           <p:cNvSpPr txBox="1"/>
           <p:nvPr/>
         </p:nvSpPr>
         <p:spPr>
           <a:xfrm>
-            <a:off x="1051560" y="2286000"/>
-            <a:ext cx="2865120" cy="365760"/>
+            <a:off x="822960" y="2057400"/>
+            <a:ext cx="548640" cy="804672"/>
           </a:xfrm>
           <a:prstGeom prst="rect">
             <a:avLst/>
@@ -5858,31 +7770,31 @@
           <a:p>
             <a:pPr algn="l">
               <a:spcAft>
-                <a:spcPts val="585"/>
-              </a:spcAft>
-            </a:pPr>
-            <a:r>
-              <a:rPr sz="1300" b="1" i="0">
-                <a:solidFill>
-                  <a:srgbClr val="0B2D5B"/>
-                </a:solidFill>
-                <a:latin typeface="Inter Tight"/>
-              </a:rPr>
-              <a:t>JORDAN</a:t>
-            </a:r>
-          </a:p>
-        </p:txBody>
-      </p:sp>
-      <p:sp>
-        <p:nvSpPr>
-          <p:cNvPr id="8" name="TextBox 7"/>
+                <a:spcPts val="1170"/>
+              </a:spcAft>
+            </a:pPr>
+            <a:r>
+              <a:rPr sz="2600" b="1" i="0">
+                <a:solidFill>
+                  <a:srgbClr val="F47B20"/>
+                </a:solidFill>
+                <a:latin typeface="Source Serif 4"/>
+              </a:rPr>
+              <a:t>1</a:t>
+            </a:r>
+          </a:p>
+        </p:txBody>
+      </p:sp>
+      <p:sp>
+        <p:nvSpPr>
+          <p:cNvPr id="7" name="TextBox 6"/>
           <p:cNvSpPr txBox="1"/>
           <p:nvPr/>
         </p:nvSpPr>
         <p:spPr>
           <a:xfrm>
-            <a:off x="1051560" y="2743200"/>
-            <a:ext cx="2865120" cy="3017520"/>
+            <a:off x="1463040" y="2093976"/>
+            <a:ext cx="9875520" cy="804672"/>
           </a:xfrm>
           <a:prstGeom prst="rect">
             <a:avLst/>
@@ -5897,77 +7809,31 @@
           <a:p>
             <a:pPr algn="l">
               <a:spcAft>
-                <a:spcPts val="810"/>
-              </a:spcAft>
-            </a:pPr>
-            <a:r>
-              <a:rPr sz="1800" b="0" i="0">
+                <a:spcPts val="945"/>
+              </a:spcAft>
+            </a:pPr>
+            <a:r>
+              <a:rPr sz="2100" b="1" i="0">
                 <a:solidFill>
                   <a:srgbClr val="1C1B19"/>
                 </a:solidFill>
                 <a:latin typeface="Source Serif 4"/>
               </a:rPr>
-              <a:t>His first big English essay is due Monday. He keeps rewriting the first sentence, then closing the laptop.</a:t>
-            </a:r>
-          </a:p>
-        </p:txBody>
-      </p:sp>
-      <p:sp>
-        <p:nvSpPr>
-          <p:cNvPr id="9" name="Rectangle 8"/>
-          <p:cNvSpPr/>
-          <p:nvPr/>
-        </p:nvSpPr>
-        <p:spPr>
-          <a:xfrm>
-            <a:off x="4419600" y="2103120"/>
-            <a:ext cx="3322320" cy="3840480"/>
-          </a:xfrm>
-          <a:prstGeom prst="rect">
-            <a:avLst/>
-          </a:prstGeom>
-          <a:solidFill>
-            <a:srgbClr val="FFFFFF"/>
-          </a:solidFill>
-          <a:ln w="15875">
-            <a:solidFill>
-              <a:srgbClr val="D8D2C6"/>
-            </a:solidFill>
-          </a:ln>
-          <a:effectLst/>
-        </p:spPr>
-        <p:style>
-          <a:lnRef idx="1">
-            <a:schemeClr val="accent1"/>
-          </a:lnRef>
-          <a:fillRef idx="3">
-            <a:schemeClr val="accent1"/>
-          </a:fillRef>
-          <a:effectRef idx="2">
-            <a:schemeClr val="accent1"/>
-          </a:effectRef>
-          <a:fontRef idx="minor">
-            <a:schemeClr val="lt1"/>
-          </a:fontRef>
-        </p:style>
-        <p:txBody>
-          <a:bodyPr rtlCol="0" anchor="ctr"/>
-          <a:lstStyle/>
-          <a:p>
-            <a:pPr algn="ctr"/>
-          </a:p>
-        </p:txBody>
-      </p:sp>
-      <p:sp>
-        <p:nvSpPr>
-          <p:cNvPr id="10" name="TextBox 9"/>
+              <a:t>You need to feel motivated before you can start.</a:t>
+            </a:r>
+          </a:p>
+        </p:txBody>
+      </p:sp>
+      <p:sp>
+        <p:nvSpPr>
+          <p:cNvPr id="8" name="TextBox 7"/>
           <p:cNvSpPr txBox="1"/>
           <p:nvPr/>
         </p:nvSpPr>
         <p:spPr>
           <a:xfrm>
-            <a:off x="4648200" y="2286000"/>
-            <a:ext cx="2865120" cy="365760"/>
+            <a:off x="822960" y="2862072"/>
+            <a:ext cx="548640" cy="804672"/>
           </a:xfrm>
           <a:prstGeom prst="rect">
             <a:avLst/>
@@ -5982,31 +7848,31 @@
           <a:p>
             <a:pPr algn="l">
               <a:spcAft>
-                <a:spcPts val="585"/>
-              </a:spcAft>
-            </a:pPr>
-            <a:r>
-              <a:rPr sz="1300" b="1" i="0">
-                <a:solidFill>
-                  <a:srgbClr val="0B2D5B"/>
-                </a:solidFill>
-                <a:latin typeface="Inter Tight"/>
-              </a:rPr>
-              <a:t>PRIYA</a:t>
-            </a:r>
-          </a:p>
-        </p:txBody>
-      </p:sp>
-      <p:sp>
-        <p:nvSpPr>
-          <p:cNvPr id="11" name="TextBox 10"/>
+                <a:spcPts val="1170"/>
+              </a:spcAft>
+            </a:pPr>
+            <a:r>
+              <a:rPr sz="2600" b="1" i="0">
+                <a:solidFill>
+                  <a:srgbClr val="F47B20"/>
+                </a:solidFill>
+                <a:latin typeface="Source Serif 4"/>
+              </a:rPr>
+              <a:t>2</a:t>
+            </a:r>
+          </a:p>
+        </p:txBody>
+      </p:sp>
+      <p:sp>
+        <p:nvSpPr>
+          <p:cNvPr id="9" name="TextBox 8"/>
           <p:cNvSpPr txBox="1"/>
           <p:nvPr/>
         </p:nvSpPr>
         <p:spPr>
           <a:xfrm>
-            <a:off x="4648200" y="2743200"/>
-            <a:ext cx="2865120" cy="3017520"/>
+            <a:off x="1463040" y="2898648"/>
+            <a:ext cx="9875520" cy="804672"/>
           </a:xfrm>
           <a:prstGeom prst="rect">
             <a:avLst/>
@@ -6021,77 +7887,31 @@
           <a:p>
             <a:pPr algn="l">
               <a:spcAft>
-                <a:spcPts val="810"/>
-              </a:spcAft>
-            </a:pPr>
-            <a:r>
-              <a:rPr sz="1800" b="0" i="0">
+                <a:spcPts val="945"/>
+              </a:spcAft>
+            </a:pPr>
+            <a:r>
+              <a:rPr sz="2100" b="1" i="0">
                 <a:solidFill>
                   <a:srgbClr val="1C1B19"/>
                 </a:solidFill>
                 <a:latin typeface="Source Serif 4"/>
               </a:rPr>
-              <a:t>Watches her little cousins until her aunt gets home. She means to start her history project every night but scrolls until midnight.</a:t>
-            </a:r>
-          </a:p>
-        </p:txBody>
-      </p:sp>
-      <p:sp>
-        <p:nvSpPr>
-          <p:cNvPr id="12" name="Rectangle 11"/>
-          <p:cNvSpPr/>
-          <p:nvPr/>
-        </p:nvSpPr>
-        <p:spPr>
-          <a:xfrm>
-            <a:off x="8016239" y="2103120"/>
-            <a:ext cx="3322320" cy="3840480"/>
-          </a:xfrm>
-          <a:prstGeom prst="rect">
-            <a:avLst/>
-          </a:prstGeom>
-          <a:solidFill>
-            <a:srgbClr val="FFFFFF"/>
-          </a:solidFill>
-          <a:ln w="15875">
-            <a:solidFill>
-              <a:srgbClr val="D8D2C6"/>
-            </a:solidFill>
-          </a:ln>
-          <a:effectLst/>
-        </p:spPr>
-        <p:style>
-          <a:lnRef idx="1">
-            <a:schemeClr val="accent1"/>
-          </a:lnRef>
-          <a:fillRef idx="3">
-            <a:schemeClr val="accent1"/>
-          </a:fillRef>
-          <a:effectRef idx="2">
-            <a:schemeClr val="accent1"/>
-          </a:effectRef>
-          <a:fontRef idx="minor">
-            <a:schemeClr val="lt1"/>
-          </a:fontRef>
-        </p:style>
-        <p:txBody>
-          <a:bodyPr rtlCol="0" anchor="ctr"/>
-          <a:lstStyle/>
-          <a:p>
-            <a:pPr algn="ctr"/>
-          </a:p>
-        </p:txBody>
-      </p:sp>
-      <p:sp>
-        <p:nvSpPr>
-          <p:cNvPr id="13" name="TextBox 12"/>
+              <a:t>Some people really do work better under pressure.</a:t>
+            </a:r>
+          </a:p>
+        </p:txBody>
+      </p:sp>
+      <p:sp>
+        <p:nvSpPr>
+          <p:cNvPr id="10" name="TextBox 9"/>
           <p:cNvSpPr txBox="1"/>
           <p:nvPr/>
         </p:nvSpPr>
         <p:spPr>
           <a:xfrm>
-            <a:off x="8244839" y="2286000"/>
-            <a:ext cx="2865120" cy="365760"/>
+            <a:off x="822960" y="3666744"/>
+            <a:ext cx="548640" cy="804672"/>
           </a:xfrm>
           <a:prstGeom prst="rect">
             <a:avLst/>
@@ -6106,31 +7926,31 @@
           <a:p>
             <a:pPr algn="l">
               <a:spcAft>
-                <a:spcPts val="585"/>
-              </a:spcAft>
-            </a:pPr>
-            <a:r>
-              <a:rPr sz="1300" b="1" i="0">
-                <a:solidFill>
-                  <a:srgbClr val="0B2D5B"/>
-                </a:solidFill>
-                <a:latin typeface="Inter Tight"/>
-              </a:rPr>
-              <a:t>MARCUS</a:t>
-            </a:r>
-          </a:p>
-        </p:txBody>
-      </p:sp>
-      <p:sp>
-        <p:nvSpPr>
-          <p:cNvPr id="14" name="TextBox 13"/>
+                <a:spcPts val="1170"/>
+              </a:spcAft>
+            </a:pPr>
+            <a:r>
+              <a:rPr sz="2600" b="1" i="0">
+                <a:solidFill>
+                  <a:srgbClr val="F47B20"/>
+                </a:solidFill>
+                <a:latin typeface="Source Serif 4"/>
+              </a:rPr>
+              <a:t>3</a:t>
+            </a:r>
+          </a:p>
+        </p:txBody>
+      </p:sp>
+      <p:sp>
+        <p:nvSpPr>
+          <p:cNvPr id="11" name="TextBox 10"/>
           <p:cNvSpPr txBox="1"/>
           <p:nvPr/>
         </p:nvSpPr>
         <p:spPr>
           <a:xfrm>
-            <a:off x="8244839" y="2743200"/>
-            <a:ext cx="2865120" cy="3017520"/>
+            <a:off x="1463040" y="3703320"/>
+            <a:ext cx="9875520" cy="804672"/>
           </a:xfrm>
           <a:prstGeom prst="rect">
             <a:avLst/>
@@ -6145,17 +7965,173 @@
           <a:p>
             <a:pPr algn="l">
               <a:spcAft>
-                <a:spcPts val="810"/>
-              </a:spcAft>
-            </a:pPr>
-            <a:r>
-              <a:rPr sz="1800" b="0" i="0">
+                <a:spcPts val="945"/>
+              </a:spcAft>
+            </a:pPr>
+            <a:r>
+              <a:rPr sz="2100" b="1" i="0">
                 <a:solidFill>
                   <a:srgbClr val="1C1B19"/>
                 </a:solidFill>
                 <a:latin typeface="Source Serif 4"/>
               </a:rPr>
-              <a:t>Says he works best the night before. His last three lab report grades dropped, and he's dragging at morning practice.</a:t>
+              <a:t>Being hard on yourself helps you procrastinate less.</a:t>
+            </a:r>
+          </a:p>
+        </p:txBody>
+      </p:sp>
+      <p:sp>
+        <p:nvSpPr>
+          <p:cNvPr id="12" name="TextBox 11"/>
+          <p:cNvSpPr txBox="1"/>
+          <p:nvPr/>
+        </p:nvSpPr>
+        <p:spPr>
+          <a:xfrm>
+            <a:off x="822960" y="4471416"/>
+            <a:ext cx="548640" cy="804672"/>
+          </a:xfrm>
+          <a:prstGeom prst="rect">
+            <a:avLst/>
+          </a:prstGeom>
+          <a:noFill/>
+        </p:spPr>
+        <p:txBody>
+          <a:bodyPr wrap="square" anchor="t" lIns="0" rIns="0" tIns="0" bIns="0">
+            <a:spAutoFit/>
+          </a:bodyPr>
+          <a:lstStyle/>
+          <a:p>
+            <a:pPr algn="l">
+              <a:spcAft>
+                <a:spcPts val="1170"/>
+              </a:spcAft>
+            </a:pPr>
+            <a:r>
+              <a:rPr sz="2600" b="1" i="0">
+                <a:solidFill>
+                  <a:srgbClr val="F47B20"/>
+                </a:solidFill>
+                <a:latin typeface="Source Serif 4"/>
+              </a:rPr>
+              <a:t>4</a:t>
+            </a:r>
+          </a:p>
+        </p:txBody>
+      </p:sp>
+      <p:sp>
+        <p:nvSpPr>
+          <p:cNvPr id="13" name="TextBox 12"/>
+          <p:cNvSpPr txBox="1"/>
+          <p:nvPr/>
+        </p:nvSpPr>
+        <p:spPr>
+          <a:xfrm>
+            <a:off x="1463040" y="4507992"/>
+            <a:ext cx="9875520" cy="804672"/>
+          </a:xfrm>
+          <a:prstGeom prst="rect">
+            <a:avLst/>
+          </a:prstGeom>
+          <a:noFill/>
+        </p:spPr>
+        <p:txBody>
+          <a:bodyPr wrap="square" anchor="t" lIns="0" rIns="0" tIns="0" bIns="0">
+            <a:spAutoFit/>
+          </a:bodyPr>
+          <a:lstStyle/>
+          <a:p>
+            <a:pPr algn="l">
+              <a:spcAft>
+                <a:spcPts val="945"/>
+              </a:spcAft>
+            </a:pPr>
+            <a:r>
+              <a:rPr sz="2100" b="1" i="0">
+                <a:solidFill>
+                  <a:srgbClr val="1C1B19"/>
+                </a:solidFill>
+                <a:latin typeface="Source Serif 4"/>
+              </a:rPr>
+              <a:t>A phone face down on your desk still costs you focus.</a:t>
+            </a:r>
+          </a:p>
+        </p:txBody>
+      </p:sp>
+      <p:sp>
+        <p:nvSpPr>
+          <p:cNvPr id="14" name="TextBox 13"/>
+          <p:cNvSpPr txBox="1"/>
+          <p:nvPr/>
+        </p:nvSpPr>
+        <p:spPr>
+          <a:xfrm>
+            <a:off x="822960" y="5276088"/>
+            <a:ext cx="548640" cy="804672"/>
+          </a:xfrm>
+          <a:prstGeom prst="rect">
+            <a:avLst/>
+          </a:prstGeom>
+          <a:noFill/>
+        </p:spPr>
+        <p:txBody>
+          <a:bodyPr wrap="square" anchor="t" lIns="0" rIns="0" tIns="0" bIns="0">
+            <a:spAutoFit/>
+          </a:bodyPr>
+          <a:lstStyle/>
+          <a:p>
+            <a:pPr algn="l">
+              <a:spcAft>
+                <a:spcPts val="1170"/>
+              </a:spcAft>
+            </a:pPr>
+            <a:r>
+              <a:rPr sz="2600" b="1" i="0">
+                <a:solidFill>
+                  <a:srgbClr val="F47B20"/>
+                </a:solidFill>
+                <a:latin typeface="Source Serif 4"/>
+              </a:rPr>
+              <a:t>5</a:t>
+            </a:r>
+          </a:p>
+        </p:txBody>
+      </p:sp>
+      <p:sp>
+        <p:nvSpPr>
+          <p:cNvPr id="15" name="TextBox 14"/>
+          <p:cNvSpPr txBox="1"/>
+          <p:nvPr/>
+        </p:nvSpPr>
+        <p:spPr>
+          <a:xfrm>
+            <a:off x="1463040" y="5312664"/>
+            <a:ext cx="9875520" cy="804672"/>
+          </a:xfrm>
+          <a:prstGeom prst="rect">
+            <a:avLst/>
+          </a:prstGeom>
+          <a:noFill/>
+        </p:spPr>
+        <p:txBody>
+          <a:bodyPr wrap="square" anchor="t" lIns="0" rIns="0" tIns="0" bIns="0">
+            <a:spAutoFit/>
+          </a:bodyPr>
+          <a:lstStyle/>
+          <a:p>
+            <a:pPr algn="l">
+              <a:spcAft>
+                <a:spcPts val="945"/>
+              </a:spcAft>
+            </a:pPr>
+            <a:r>
+              <a:rPr sz="2100" b="1" i="0">
+                <a:solidFill>
+                  <a:srgbClr val="1C1B19"/>
+                </a:solidFill>
+                <a:latin typeface="Source Serif 4"/>
+              </a:rPr>
+              <a:t>Deciding when and where you'll start makes you likelier to do it.</a:t>
             </a:r>
           </a:p>
         </p:txBody>
@@ -6168,7 +8144,7 @@
 </p:sld>
 </file>
 
-<file path=ppt/slides/slide13.xml><?xml version="1.0" encoding="utf-8"?>
+<file path=ppt/slides/slide4.xml><?xml version="1.0" encoding="utf-8"?>
 <p:sld xmlns:a="http://schemas.openxmlformats.org/drawingml/2006/main" xmlns:p="http://schemas.openxmlformats.org/presentationml/2006/main" xmlns:r="http://schemas.openxmlformats.org/officeDocument/2006/relationships">
   <p:cSld>
     <p:bg>
@@ -6264,7 +8240,7 @@
                 </a:solidFill>
                 <a:latin typeface="Inter Tight"/>
               </a:rPr>
-              <a:t>TRY IT</a:t>
+              <a:t>MYTH OR FACT?</a:t>
             </a:r>
           </a:p>
         </p:txBody>
@@ -6310,97 +8286,14 @@
       </p:sp>
       <p:sp>
         <p:nvSpPr>
-          <p:cNvPr id="5" name="Rectangle 4"/>
-          <p:cNvSpPr/>
-          <p:nvPr/>
-        </p:nvSpPr>
-        <p:spPr>
-          <a:xfrm>
-            <a:off x="822960" y="1371600"/>
-            <a:ext cx="73152" cy="3566160"/>
-          </a:xfrm>
-          <a:prstGeom prst="rect">
-            <a:avLst/>
-          </a:prstGeom>
-          <a:solidFill>
-            <a:srgbClr val="F47B20"/>
-          </a:solidFill>
-          <a:ln>
-            <a:noFill/>
-          </a:ln>
-          <a:effectLst/>
-        </p:spPr>
-        <p:style>
-          <a:lnRef idx="1">
-            <a:schemeClr val="accent1"/>
-          </a:lnRef>
-          <a:fillRef idx="3">
-            <a:schemeClr val="accent1"/>
-          </a:fillRef>
-          <a:effectRef idx="2">
-            <a:schemeClr val="accent1"/>
-          </a:effectRef>
-          <a:fontRef idx="minor">
-            <a:schemeClr val="lt1"/>
-          </a:fontRef>
-        </p:style>
-        <p:txBody>
-          <a:bodyPr rtlCol="0" anchor="ctr"/>
-          <a:lstStyle/>
-          <a:p>
-            <a:pPr algn="ctr"/>
-          </a:p>
-        </p:txBody>
-      </p:sp>
-      <p:sp>
-        <p:nvSpPr>
-          <p:cNvPr id="6" name="TextBox 5"/>
+          <p:cNvPr id="5" name="TextBox 4"/>
           <p:cNvSpPr txBox="1"/>
           <p:nvPr/>
         </p:nvSpPr>
         <p:spPr>
           <a:xfrm>
-            <a:off x="1188720" y="1371600"/>
-            <a:ext cx="10058400" cy="3566160"/>
-          </a:xfrm>
-          <a:prstGeom prst="rect">
-            <a:avLst/>
-          </a:prstGeom>
-          <a:noFill/>
-        </p:spPr>
-        <p:txBody>
-          <a:bodyPr wrap="square" anchor="ctr" lIns="0" rIns="0" tIns="0" bIns="0">
-            <a:spAutoFit/>
-          </a:bodyPr>
-          <a:lstStyle/>
-          <a:p>
-            <a:pPr algn="l">
-              <a:spcAft>
-                <a:spcPts val="1800"/>
-              </a:spcAft>
-            </a:pPr>
-            <a:r>
-              <a:rPr sz="4000" b="0" i="1">
-                <a:solidFill>
-                  <a:srgbClr val="1C1B19"/>
-                </a:solidFill>
-                <a:latin typeface="Source Serif 4"/>
-              </a:rPr>
-              <a:t>If it's ___ and I'm at ___, then I'll ___.</a:t>
-            </a:r>
-          </a:p>
-        </p:txBody>
-      </p:sp>
-      <p:sp>
-        <p:nvSpPr>
-          <p:cNvPr id="7" name="TextBox 6"/>
-          <p:cNvSpPr txBox="1"/>
-          <p:nvPr/>
-        </p:nvSpPr>
-        <p:spPr>
-          <a:xfrm>
-            <a:off x="1188720" y="5120640"/>
-            <a:ext cx="10058400" cy="914400"/>
+            <a:off x="822960" y="1005840"/>
+            <a:ext cx="10515600" cy="1097280"/>
           </a:xfrm>
           <a:prstGeom prst="rect">
             <a:avLst/>
@@ -6415,17 +8308,487 @@
           <a:p>
             <a:pPr algn="l">
               <a:spcAft>
-                <a:spcPts val="810"/>
-              </a:spcAft>
-            </a:pPr>
-            <a:r>
-              <a:rPr sz="1800" b="0" i="0">
+                <a:spcPts val="1620"/>
+              </a:spcAft>
+            </a:pPr>
+            <a:r>
+              <a:rPr sz="3600" b="1" i="0">
+                <a:solidFill>
+                  <a:srgbClr val="1C1B19"/>
+                </a:solidFill>
+                <a:latin typeface="Source Serif 4"/>
+              </a:rPr>
+              <a:t>The answers</a:t>
+            </a:r>
+          </a:p>
+        </p:txBody>
+      </p:sp>
+      <p:sp>
+        <p:nvSpPr>
+          <p:cNvPr id="6" name="TextBox 5"/>
+          <p:cNvSpPr txBox="1"/>
+          <p:nvPr/>
+        </p:nvSpPr>
+        <p:spPr>
+          <a:xfrm>
+            <a:off x="822960" y="2057400"/>
+            <a:ext cx="548640" cy="804672"/>
+          </a:xfrm>
+          <a:prstGeom prst="rect">
+            <a:avLst/>
+          </a:prstGeom>
+          <a:noFill/>
+        </p:spPr>
+        <p:txBody>
+          <a:bodyPr wrap="square" anchor="t" lIns="0" rIns="0" tIns="0" bIns="0">
+            <a:spAutoFit/>
+          </a:bodyPr>
+          <a:lstStyle/>
+          <a:p>
+            <a:pPr algn="l">
+              <a:spcAft>
+                <a:spcPts val="1170"/>
+              </a:spcAft>
+            </a:pPr>
+            <a:r>
+              <a:rPr sz="2600" b="1" i="0">
+                <a:solidFill>
+                  <a:srgbClr val="F47B20"/>
+                </a:solidFill>
+                <a:latin typeface="Source Serif 4"/>
+              </a:rPr>
+              <a:t>1</a:t>
+            </a:r>
+          </a:p>
+        </p:txBody>
+      </p:sp>
+      <p:sp>
+        <p:nvSpPr>
+          <p:cNvPr id="7" name="TextBox 6"/>
+          <p:cNvSpPr txBox="1"/>
+          <p:nvPr/>
+        </p:nvSpPr>
+        <p:spPr>
+          <a:xfrm>
+            <a:off x="1463040" y="2093976"/>
+            <a:ext cx="9875520" cy="804672"/>
+          </a:xfrm>
+          <a:prstGeom prst="rect">
+            <a:avLst/>
+          </a:prstGeom>
+          <a:noFill/>
+        </p:spPr>
+        <p:txBody>
+          <a:bodyPr wrap="square" anchor="t" lIns="0" rIns="0" tIns="0" bIns="0">
+            <a:spAutoFit/>
+          </a:bodyPr>
+          <a:lstStyle/>
+          <a:p>
+            <a:pPr algn="l">
+              <a:spcAft>
+                <a:spcPts val="945"/>
+              </a:spcAft>
+            </a:pPr>
+            <a:r>
+              <a:rPr sz="2100" b="1" i="0">
+                <a:solidFill>
+                  <a:srgbClr val="1C1B19"/>
+                </a:solidFill>
+                <a:latin typeface="Source Serif 4"/>
+              </a:rPr>
+              <a:t>Myth.</a:t>
+            </a:r>
+          </a:p>
+          <a:p>
+            <a:pPr algn="l">
+              <a:spcAft>
+                <a:spcPts val="945"/>
+              </a:spcAft>
+            </a:pPr>
+            <a:r>
+              <a:rPr sz="1600" b="0" i="0">
                 <a:solidFill>
                   <a:srgbClr val="5D5A54"/>
                 </a:solidFill>
-                <a:latin typeface="Inter Tight"/>
-              </a:rPr>
-              <a:t>Pick one thing you've been putting off. Write the plan. Make the first step tiny.</a:t>
+                <a:latin typeface="Source Serif 4"/>
+              </a:rPr>
+              <a:t>Motivation usually follows action. Starting brings the feeling.</a:t>
+            </a:r>
+          </a:p>
+        </p:txBody>
+      </p:sp>
+      <p:sp>
+        <p:nvSpPr>
+          <p:cNvPr id="8" name="TextBox 7"/>
+          <p:cNvSpPr txBox="1"/>
+          <p:nvPr/>
+        </p:nvSpPr>
+        <p:spPr>
+          <a:xfrm>
+            <a:off x="822960" y="2862072"/>
+            <a:ext cx="548640" cy="804672"/>
+          </a:xfrm>
+          <a:prstGeom prst="rect">
+            <a:avLst/>
+          </a:prstGeom>
+          <a:noFill/>
+        </p:spPr>
+        <p:txBody>
+          <a:bodyPr wrap="square" anchor="t" lIns="0" rIns="0" tIns="0" bIns="0">
+            <a:spAutoFit/>
+          </a:bodyPr>
+          <a:lstStyle/>
+          <a:p>
+            <a:pPr algn="l">
+              <a:spcAft>
+                <a:spcPts val="1170"/>
+              </a:spcAft>
+            </a:pPr>
+            <a:r>
+              <a:rPr sz="2600" b="1" i="0">
+                <a:solidFill>
+                  <a:srgbClr val="F47B20"/>
+                </a:solidFill>
+                <a:latin typeface="Source Serif 4"/>
+              </a:rPr>
+              <a:t>2</a:t>
+            </a:r>
+          </a:p>
+        </p:txBody>
+      </p:sp>
+      <p:sp>
+        <p:nvSpPr>
+          <p:cNvPr id="9" name="TextBox 8"/>
+          <p:cNvSpPr txBox="1"/>
+          <p:nvPr/>
+        </p:nvSpPr>
+        <p:spPr>
+          <a:xfrm>
+            <a:off x="1463040" y="2898648"/>
+            <a:ext cx="9875520" cy="804672"/>
+          </a:xfrm>
+          <a:prstGeom prst="rect">
+            <a:avLst/>
+          </a:prstGeom>
+          <a:noFill/>
+        </p:spPr>
+        <p:txBody>
+          <a:bodyPr wrap="square" anchor="t" lIns="0" rIns="0" tIns="0" bIns="0">
+            <a:spAutoFit/>
+          </a:bodyPr>
+          <a:lstStyle/>
+          <a:p>
+            <a:pPr algn="l">
+              <a:spcAft>
+                <a:spcPts val="945"/>
+              </a:spcAft>
+            </a:pPr>
+            <a:r>
+              <a:rPr sz="2100" b="1" i="0">
+                <a:solidFill>
+                  <a:srgbClr val="1C1B19"/>
+                </a:solidFill>
+                <a:latin typeface="Source Serif 4"/>
+              </a:rPr>
+              <a:t>Mostly myth.</a:t>
+            </a:r>
+          </a:p>
+          <a:p>
+            <a:pPr algn="l">
+              <a:spcAft>
+                <a:spcPts val="945"/>
+              </a:spcAft>
+            </a:pPr>
+            <a:r>
+              <a:rPr sz="1600" b="0" i="0">
+                <a:solidFill>
+                  <a:srgbClr val="5D5A54"/>
+                </a:solidFill>
+                <a:latin typeface="Source Serif 4"/>
+              </a:rPr>
+              <a:t>Pressure feels productive. We'll look at what happened.</a:t>
+            </a:r>
+          </a:p>
+        </p:txBody>
+      </p:sp>
+      <p:sp>
+        <p:nvSpPr>
+          <p:cNvPr id="10" name="TextBox 9"/>
+          <p:cNvSpPr txBox="1"/>
+          <p:nvPr/>
+        </p:nvSpPr>
+        <p:spPr>
+          <a:xfrm>
+            <a:off x="822960" y="3666744"/>
+            <a:ext cx="548640" cy="804672"/>
+          </a:xfrm>
+          <a:prstGeom prst="rect">
+            <a:avLst/>
+          </a:prstGeom>
+          <a:noFill/>
+        </p:spPr>
+        <p:txBody>
+          <a:bodyPr wrap="square" anchor="t" lIns="0" rIns="0" tIns="0" bIns="0">
+            <a:spAutoFit/>
+          </a:bodyPr>
+          <a:lstStyle/>
+          <a:p>
+            <a:pPr algn="l">
+              <a:spcAft>
+                <a:spcPts val="1170"/>
+              </a:spcAft>
+            </a:pPr>
+            <a:r>
+              <a:rPr sz="2600" b="1" i="0">
+                <a:solidFill>
+                  <a:srgbClr val="F47B20"/>
+                </a:solidFill>
+                <a:latin typeface="Source Serif 4"/>
+              </a:rPr>
+              <a:t>3</a:t>
+            </a:r>
+          </a:p>
+        </p:txBody>
+      </p:sp>
+      <p:sp>
+        <p:nvSpPr>
+          <p:cNvPr id="11" name="TextBox 10"/>
+          <p:cNvSpPr txBox="1"/>
+          <p:nvPr/>
+        </p:nvSpPr>
+        <p:spPr>
+          <a:xfrm>
+            <a:off x="1463040" y="3703320"/>
+            <a:ext cx="9875520" cy="804672"/>
+          </a:xfrm>
+          <a:prstGeom prst="rect">
+            <a:avLst/>
+          </a:prstGeom>
+          <a:noFill/>
+        </p:spPr>
+        <p:txBody>
+          <a:bodyPr wrap="square" anchor="t" lIns="0" rIns="0" tIns="0" bIns="0">
+            <a:spAutoFit/>
+          </a:bodyPr>
+          <a:lstStyle/>
+          <a:p>
+            <a:pPr algn="l">
+              <a:spcAft>
+                <a:spcPts val="945"/>
+              </a:spcAft>
+            </a:pPr>
+            <a:r>
+              <a:rPr sz="2100" b="1" i="0">
+                <a:solidFill>
+                  <a:srgbClr val="1C1B19"/>
+                </a:solidFill>
+                <a:latin typeface="Source Serif 4"/>
+              </a:rPr>
+              <a:t>Myth.</a:t>
+            </a:r>
+          </a:p>
+          <a:p>
+            <a:pPr algn="l">
+              <a:spcAft>
+                <a:spcPts val="945"/>
+              </a:spcAft>
+            </a:pPr>
+            <a:r>
+              <a:rPr sz="1600" b="0" i="0">
+                <a:solidFill>
+                  <a:srgbClr val="5D5A54"/>
+                </a:solidFill>
+                <a:latin typeface="Source Serif 4"/>
+              </a:rPr>
+              <a:t>Students who forgave themselves procrastinated less next time.</a:t>
+            </a:r>
+          </a:p>
+        </p:txBody>
+      </p:sp>
+      <p:sp>
+        <p:nvSpPr>
+          <p:cNvPr id="12" name="TextBox 11"/>
+          <p:cNvSpPr txBox="1"/>
+          <p:nvPr/>
+        </p:nvSpPr>
+        <p:spPr>
+          <a:xfrm>
+            <a:off x="822960" y="4471416"/>
+            <a:ext cx="548640" cy="804672"/>
+          </a:xfrm>
+          <a:prstGeom prst="rect">
+            <a:avLst/>
+          </a:prstGeom>
+          <a:noFill/>
+        </p:spPr>
+        <p:txBody>
+          <a:bodyPr wrap="square" anchor="t" lIns="0" rIns="0" tIns="0" bIns="0">
+            <a:spAutoFit/>
+          </a:bodyPr>
+          <a:lstStyle/>
+          <a:p>
+            <a:pPr algn="l">
+              <a:spcAft>
+                <a:spcPts val="1170"/>
+              </a:spcAft>
+            </a:pPr>
+            <a:r>
+              <a:rPr sz="2600" b="1" i="0">
+                <a:solidFill>
+                  <a:srgbClr val="F47B20"/>
+                </a:solidFill>
+                <a:latin typeface="Source Serif 4"/>
+              </a:rPr>
+              <a:t>4</a:t>
+            </a:r>
+          </a:p>
+        </p:txBody>
+      </p:sp>
+      <p:sp>
+        <p:nvSpPr>
+          <p:cNvPr id="13" name="TextBox 12"/>
+          <p:cNvSpPr txBox="1"/>
+          <p:nvPr/>
+        </p:nvSpPr>
+        <p:spPr>
+          <a:xfrm>
+            <a:off x="1463040" y="4507992"/>
+            <a:ext cx="9875520" cy="804672"/>
+          </a:xfrm>
+          <a:prstGeom prst="rect">
+            <a:avLst/>
+          </a:prstGeom>
+          <a:noFill/>
+        </p:spPr>
+        <p:txBody>
+          <a:bodyPr wrap="square" anchor="t" lIns="0" rIns="0" tIns="0" bIns="0">
+            <a:spAutoFit/>
+          </a:bodyPr>
+          <a:lstStyle/>
+          <a:p>
+            <a:pPr algn="l">
+              <a:spcAft>
+                <a:spcPts val="945"/>
+              </a:spcAft>
+            </a:pPr>
+            <a:r>
+              <a:rPr sz="2100" b="1" i="0">
+                <a:solidFill>
+                  <a:srgbClr val="1C1B19"/>
+                </a:solidFill>
+                <a:latin typeface="Source Serif 4"/>
+              </a:rPr>
+              <a:t>Fact.</a:t>
+            </a:r>
+          </a:p>
+          <a:p>
+            <a:pPr algn="l">
+              <a:spcAft>
+                <a:spcPts val="945"/>
+              </a:spcAft>
+            </a:pPr>
+            <a:r>
+              <a:rPr sz="1600" b="0" i="0">
+                <a:solidFill>
+                  <a:srgbClr val="5D5A54"/>
+                </a:solidFill>
+                <a:latin typeface="Source Serif 4"/>
+              </a:rPr>
+              <a:t>Part of your brain spends effort not checking it.</a:t>
+            </a:r>
+          </a:p>
+        </p:txBody>
+      </p:sp>
+      <p:sp>
+        <p:nvSpPr>
+          <p:cNvPr id="14" name="TextBox 13"/>
+          <p:cNvSpPr txBox="1"/>
+          <p:nvPr/>
+        </p:nvSpPr>
+        <p:spPr>
+          <a:xfrm>
+            <a:off x="822960" y="5276088"/>
+            <a:ext cx="548640" cy="804672"/>
+          </a:xfrm>
+          <a:prstGeom prst="rect">
+            <a:avLst/>
+          </a:prstGeom>
+          <a:noFill/>
+        </p:spPr>
+        <p:txBody>
+          <a:bodyPr wrap="square" anchor="t" lIns="0" rIns="0" tIns="0" bIns="0">
+            <a:spAutoFit/>
+          </a:bodyPr>
+          <a:lstStyle/>
+          <a:p>
+            <a:pPr algn="l">
+              <a:spcAft>
+                <a:spcPts val="1170"/>
+              </a:spcAft>
+            </a:pPr>
+            <a:r>
+              <a:rPr sz="2600" b="1" i="0">
+                <a:solidFill>
+                  <a:srgbClr val="F47B20"/>
+                </a:solidFill>
+                <a:latin typeface="Source Serif 4"/>
+              </a:rPr>
+              <a:t>5</a:t>
+            </a:r>
+          </a:p>
+        </p:txBody>
+      </p:sp>
+      <p:sp>
+        <p:nvSpPr>
+          <p:cNvPr id="15" name="TextBox 14"/>
+          <p:cNvSpPr txBox="1"/>
+          <p:nvPr/>
+        </p:nvSpPr>
+        <p:spPr>
+          <a:xfrm>
+            <a:off x="1463040" y="5312664"/>
+            <a:ext cx="9875520" cy="804672"/>
+          </a:xfrm>
+          <a:prstGeom prst="rect">
+            <a:avLst/>
+          </a:prstGeom>
+          <a:noFill/>
+        </p:spPr>
+        <p:txBody>
+          <a:bodyPr wrap="square" anchor="t" lIns="0" rIns="0" tIns="0" bIns="0">
+            <a:spAutoFit/>
+          </a:bodyPr>
+          <a:lstStyle/>
+          <a:p>
+            <a:pPr algn="l">
+              <a:spcAft>
+                <a:spcPts val="945"/>
+              </a:spcAft>
+            </a:pPr>
+            <a:r>
+              <a:rPr sz="2100" b="1" i="0">
+                <a:solidFill>
+                  <a:srgbClr val="1C1B19"/>
+                </a:solidFill>
+                <a:latin typeface="Source Serif 4"/>
+              </a:rPr>
+              <a:t>Fact.</a:t>
+            </a:r>
+          </a:p>
+          <a:p>
+            <a:pPr algn="l">
+              <a:spcAft>
+                <a:spcPts val="945"/>
+              </a:spcAft>
+            </a:pPr>
+            <a:r>
+              <a:rPr sz="1600" b="0" i="0">
+                <a:solidFill>
+                  <a:srgbClr val="5D5A54"/>
+                </a:solidFill>
+                <a:latin typeface="Source Serif 4"/>
+              </a:rPr>
+              <a:t>A review of 94 studies backs it. More on this later.</a:t>
             </a:r>
           </a:p>
         </p:txBody>
@@ -6438,7 +8801,7 @@
 </p:sld>
 </file>
 
-<file path=ppt/slides/slide14.xml><?xml version="1.0" encoding="utf-8"?>
+<file path=ppt/slides/slide5.xml><?xml version="1.0" encoding="utf-8"?>
 <p:sld xmlns:a="http://schemas.openxmlformats.org/drawingml/2006/main" xmlns:p="http://schemas.openxmlformats.org/presentationml/2006/main" xmlns:r="http://schemas.openxmlformats.org/officeDocument/2006/relationships">
   <p:cSld>
     <p:bg>
@@ -6534,7 +8897,7 @@
                 </a:solidFill>
                 <a:latin typeface="Inter Tight"/>
               </a:rPr>
-              <a:t>BEFORE YOU GO</a:t>
+              <a:t>WHAT'S GOING ON</a:t>
             </a:r>
           </a:p>
         </p:txBody>
@@ -6586,7 +8949,7 @@
         </p:nvSpPr>
         <p:spPr>
           <a:xfrm>
-            <a:off x="822960" y="1188720"/>
+            <a:off x="822960" y="1005840"/>
             <a:ext cx="10515600" cy="914400"/>
           </a:xfrm>
           <a:prstGeom prst="rect">
@@ -6602,70 +8965,31 @@
           <a:p>
             <a:pPr algn="l">
               <a:spcAft>
-                <a:spcPts val="1620"/>
-              </a:spcAft>
-            </a:pPr>
-            <a:r>
-              <a:rPr sz="3600" b="1" i="0">
+                <a:spcPts val="1530"/>
+              </a:spcAft>
+            </a:pPr>
+            <a:r>
+              <a:rPr sz="3400" b="1" i="0">
                 <a:solidFill>
                   <a:srgbClr val="1C1B19"/>
                 </a:solidFill>
                 <a:latin typeface="Source Serif 4"/>
               </a:rPr>
-              <a:t>Exit card</a:t>
-            </a:r>
-          </a:p>
-        </p:txBody>
-      </p:sp>
-      <p:sp>
-        <p:nvSpPr>
-          <p:cNvPr id="6" name="TextBox 5"/>
-          <p:cNvSpPr txBox="1"/>
-          <p:nvPr/>
-        </p:nvSpPr>
-        <p:spPr>
-          <a:xfrm>
-            <a:off x="822960" y="2286000"/>
-            <a:ext cx="10515600" cy="1463040"/>
-          </a:xfrm>
-          <a:prstGeom prst="rect">
-            <a:avLst/>
-          </a:prstGeom>
-          <a:noFill/>
-        </p:spPr>
-        <p:txBody>
-          <a:bodyPr wrap="square" anchor="t" lIns="0" rIns="0" tIns="0" bIns="0">
-            <a:spAutoFit/>
-          </a:bodyPr>
-          <a:lstStyle/>
-          <a:p>
-            <a:pPr algn="l">
-              <a:spcAft>
-                <a:spcPts val="1080"/>
-              </a:spcAft>
-            </a:pPr>
-            <a:r>
-              <a:rPr sz="2400" b="0" i="0">
-                <a:solidFill>
-                  <a:srgbClr val="1C1B19"/>
-                </a:solidFill>
-                <a:latin typeface="Source Serif 4"/>
-              </a:rPr>
-              <a:t>Which lever will you pull this week, and on what?</a:t>
-            </a:r>
-          </a:p>
-        </p:txBody>
-      </p:sp>
-      <p:sp>
-        <p:nvSpPr>
-          <p:cNvPr id="7" name="Rectangle 6"/>
+              <a:t>The avoidance loop</a:t>
+            </a:r>
+          </a:p>
+        </p:txBody>
+      </p:sp>
+      <p:sp>
+        <p:nvSpPr>
+          <p:cNvPr id="6" name="Rectangle 5"/>
           <p:cNvSpPr/>
           <p:nvPr/>
         </p:nvSpPr>
         <p:spPr>
           <a:xfrm>
-            <a:off x="822960" y="4023360"/>
-            <a:ext cx="10515600" cy="1371600"/>
+            <a:off x="822960" y="2743200"/>
+            <a:ext cx="1874519" cy="1005840"/>
           </a:xfrm>
           <a:prstGeom prst="rect">
             <a:avLst/>
@@ -6675,7 +8999,7 @@
           </a:solidFill>
           <a:ln w="15875">
             <a:solidFill>
-              <a:srgbClr val="1C1B19"/>
+              <a:srgbClr val="0B2D5B"/>
             </a:solidFill>
           </a:ln>
           <a:effectLst/>
@@ -6704,14 +9028,14 @@
       </p:sp>
       <p:sp>
         <p:nvSpPr>
-          <p:cNvPr id="8" name="TextBox 7"/>
+          <p:cNvPr id="7" name="TextBox 6"/>
           <p:cNvSpPr txBox="1"/>
           <p:nvPr/>
         </p:nvSpPr>
         <p:spPr>
           <a:xfrm>
-            <a:off x="1097280" y="4206240"/>
-            <a:ext cx="10058400" cy="365760"/>
+            <a:off x="822960" y="2743200"/>
+            <a:ext cx="1874519" cy="1005840"/>
           </a:xfrm>
           <a:prstGeom prst="rect">
             <a:avLst/>
@@ -6719,112 +9043,85 @@
           <a:noFill/>
         </p:spPr>
         <p:txBody>
-          <a:bodyPr wrap="square" anchor="t" lIns="0" rIns="0" tIns="0" bIns="0">
+          <a:bodyPr wrap="square" anchor="ctr" lIns="0" rIns="0" tIns="0" bIns="0">
             <a:spAutoFit/>
           </a:bodyPr>
           <a:lstStyle/>
           <a:p>
-            <a:pPr algn="l">
-              <a:spcAft>
-                <a:spcPts val="540"/>
-              </a:spcAft>
-            </a:pPr>
-            <a:r>
-              <a:rPr sz="1200" b="1" i="0">
-                <a:solidFill>
-                  <a:srgbClr val="0B2D5B"/>
-                </a:solidFill>
-                <a:latin typeface="Inter Tight"/>
-              </a:rPr>
-              <a:t>ON THE BVR DINER MENU</a:t>
-            </a:r>
-          </a:p>
-        </p:txBody>
-      </p:sp>
-      <p:sp>
-        <p:nvSpPr>
-          <p:cNvPr id="9" name="TextBox 8"/>
-          <p:cNvSpPr txBox="1"/>
-          <p:nvPr/>
-        </p:nvSpPr>
-        <p:spPr>
-          <a:xfrm>
-            <a:off x="1097280" y="4617720"/>
-            <a:ext cx="10058400" cy="640080"/>
-          </a:xfrm>
-          <a:prstGeom prst="rect">
-            <a:avLst/>
-          </a:prstGeom>
-          <a:noFill/>
-        </p:spPr>
-        <p:txBody>
-          <a:bodyPr wrap="square" anchor="t" lIns="0" rIns="0" tIns="0" bIns="0">
-            <a:spAutoFit/>
-          </a:bodyPr>
-          <a:lstStyle/>
-          <a:p>
-            <a:pPr algn="l">
+            <a:pPr algn="ctr">
               <a:spcAft>
                 <a:spcPts val="900"/>
               </a:spcAft>
             </a:pPr>
             <a:r>
-              <a:rPr sz="2000" b="0" i="0">
+              <a:rPr sz="2000" b="1" i="0">
                 <a:solidFill>
                   <a:srgbClr val="1C1B19"/>
                 </a:solidFill>
-                <a:latin typeface="Inter Tight"/>
-              </a:rPr>
-              <a:t>https://rmwtoolkit.github.io/bcds-toolkit/why-you-cant-start-high-school.html</a:t>
-            </a:r>
-          </a:p>
-        </p:txBody>
-      </p:sp>
-    </p:spTree>
-  </p:cSld>
-  <p:clrMapOvr>
-    <a:masterClrMapping/>
-  </p:clrMapOvr>
-</p:sld>
-</file>
-
-<file path=ppt/slides/slide2.xml><?xml version="1.0" encoding="utf-8"?>
-<p:sld xmlns:a="http://schemas.openxmlformats.org/drawingml/2006/main" xmlns:p="http://schemas.openxmlformats.org/presentationml/2006/main" xmlns:r="http://schemas.openxmlformats.org/officeDocument/2006/relationships" show="0">
-  <p:cSld>
-    <p:bg>
-      <p:bgPr>
-        <a:solidFill>
-          <a:srgbClr val="EEEBE4"/>
-        </a:solidFill>
-        <a:effectLst/>
-      </p:bgPr>
-    </p:bg>
-    <p:spTree>
-      <p:nvGrpSpPr>
-        <p:cNvPr id="1" name=""/>
-        <p:cNvGrpSpPr/>
-        <p:nvPr/>
-      </p:nvGrpSpPr>
-      <p:grpSpPr/>
-      <p:sp>
-        <p:nvSpPr>
-          <p:cNvPr id="2" name="Rectangle 1"/>
+                <a:latin typeface="Source Serif 4"/>
+              </a:rPr>
+              <a:t>Hard task</a:t>
+            </a:r>
+          </a:p>
+        </p:txBody>
+      </p:sp>
+      <p:cxnSp>
+        <p:nvCxnSpPr>
+          <p:cNvPr id="8" name="Connector 7"/>
+          <p:cNvCxnSpPr/>
+          <p:nvPr/>
+        </p:nvCxnSpPr>
+        <p:spPr>
+          <a:xfrm>
+            <a:off x="2752344" y="3246120"/>
+            <a:ext cx="176021" cy="0"/>
+          </a:xfrm>
+          <a:prstGeom prst="line">
+            <a:avLst/>
+          </a:prstGeom>
+          <a:ln w="31750">
+            <a:solidFill>
+              <a:srgbClr val="F47B20"/>
+            </a:solidFill>
+            <a:tailEnd type="triangle"/>
+          </a:ln>
+        </p:spPr>
+        <p:style>
+          <a:lnRef idx="2">
+            <a:schemeClr val="accent1"/>
+          </a:lnRef>
+          <a:fillRef idx="0">
+            <a:schemeClr val="accent1"/>
+          </a:fillRef>
+          <a:effectRef idx="1">
+            <a:schemeClr val="accent1"/>
+          </a:effectRef>
+          <a:fontRef idx="minor">
+            <a:schemeClr val="tx1"/>
+          </a:fontRef>
+        </p:style>
+      </p:cxnSp>
+      <p:sp>
+        <p:nvSpPr>
+          <p:cNvPr id="9" name="Rectangle 8"/>
           <p:cNvSpPr/>
           <p:nvPr/>
         </p:nvSpPr>
         <p:spPr>
           <a:xfrm>
-            <a:off x="0" y="0"/>
-            <a:ext cx="12191695" cy="384048"/>
+            <a:off x="2983229" y="2743200"/>
+            <a:ext cx="1874519" cy="1005840"/>
           </a:xfrm>
           <a:prstGeom prst="rect">
             <a:avLst/>
           </a:prstGeom>
           <a:solidFill>
-            <a:srgbClr val="0B2D5B"/>
+            <a:srgbClr val="FFFFFF"/>
           </a:solidFill>
-          <a:ln>
-            <a:noFill/>
+          <a:ln w="15875">
+            <a:solidFill>
+              <a:srgbClr val="0B2D5B"/>
+            </a:solidFill>
           </a:ln>
           <a:effectLst/>
         </p:spPr>
@@ -6852,14 +9149,14 @@
       </p:sp>
       <p:sp>
         <p:nvSpPr>
-          <p:cNvPr id="3" name="TextBox 2"/>
+          <p:cNvPr id="10" name="TextBox 9"/>
           <p:cNvSpPr txBox="1"/>
           <p:nvPr/>
         </p:nvSpPr>
         <p:spPr>
           <a:xfrm>
-            <a:off x="548640" y="100584"/>
-            <a:ext cx="10972800" cy="274320"/>
+            <a:off x="2983229" y="2743200"/>
+            <a:ext cx="1874519" cy="1005840"/>
           </a:xfrm>
           <a:prstGeom prst="rect">
             <a:avLst/>
@@ -6867,446 +9164,85 @@
           <a:noFill/>
         </p:spPr>
         <p:txBody>
-          <a:bodyPr wrap="square" anchor="t" lIns="0" rIns="0" tIns="0" bIns="0">
+          <a:bodyPr wrap="square" anchor="ctr" lIns="0" rIns="0" tIns="0" bIns="0">
             <a:spAutoFit/>
           </a:bodyPr>
           <a:lstStyle/>
           <a:p>
-            <a:pPr algn="l">
-              <a:spcAft>
-                <a:spcPts val="495"/>
-              </a:spcAft>
-            </a:pPr>
-            <a:r>
-              <a:rPr sz="1100" b="1" i="0">
-                <a:solidFill>
-                  <a:srgbClr val="FFFFFF"/>
-                </a:solidFill>
-                <a:latin typeface="Inter Tight"/>
-              </a:rPr>
-              <a:t>TEACHER PAGE  ·  skipped when you present  ·  Before you teach</a:t>
-            </a:r>
-          </a:p>
-        </p:txBody>
-      </p:sp>
-      <p:sp>
-        <p:nvSpPr>
-          <p:cNvPr id="4" name="TextBox 3"/>
-          <p:cNvSpPr txBox="1"/>
-          <p:nvPr/>
-        </p:nvSpPr>
-        <p:spPr>
-          <a:xfrm>
-            <a:off x="548640" y="685800"/>
-            <a:ext cx="10972800" cy="640080"/>
-          </a:xfrm>
-          <a:prstGeom prst="rect">
-            <a:avLst/>
-          </a:prstGeom>
-          <a:noFill/>
-        </p:spPr>
-        <p:txBody>
-          <a:bodyPr wrap="square" anchor="t" lIns="0" rIns="0" tIns="0" bIns="0">
-            <a:spAutoFit/>
-          </a:bodyPr>
-          <a:lstStyle/>
-          <a:p>
-            <a:pPr algn="l">
-              <a:spcAft>
-                <a:spcPts val="1350"/>
-              </a:spcAft>
-            </a:pPr>
-            <a:r>
-              <a:rPr sz="3000" b="1" i="0">
+            <a:pPr algn="ctr">
+              <a:spcAft>
+                <a:spcPts val="900"/>
+              </a:spcAft>
+            </a:pPr>
+            <a:r>
+              <a:rPr sz="2000" b="1" i="0">
                 <a:solidFill>
                   <a:srgbClr val="1C1B19"/>
                 </a:solidFill>
                 <a:latin typeface="Source Serif 4"/>
               </a:rPr>
-              <a:t>Before you teach</a:t>
-            </a:r>
-          </a:p>
-        </p:txBody>
-      </p:sp>
-      <p:sp>
-        <p:nvSpPr>
-          <p:cNvPr id="5" name="TextBox 4"/>
-          <p:cNvSpPr txBox="1"/>
-          <p:nvPr/>
-        </p:nvSpPr>
-        <p:spPr>
-          <a:xfrm>
-            <a:off x="548640" y="1463040"/>
-            <a:ext cx="5394960" cy="4937760"/>
-          </a:xfrm>
-          <a:prstGeom prst="rect">
-            <a:avLst/>
-          </a:prstGeom>
-          <a:noFill/>
-        </p:spPr>
-        <p:txBody>
-          <a:bodyPr wrap="square" anchor="t" lIns="0" rIns="0" tIns="0" bIns="0">
-            <a:spAutoFit/>
-          </a:bodyPr>
-          <a:lstStyle/>
-          <a:p>
-            <a:pPr algn="l">
-              <a:spcAft>
-                <a:spcPts val="585"/>
-              </a:spcAft>
-            </a:pPr>
-            <a:r>
-              <a:rPr sz="1500" b="1" i="0">
-                <a:solidFill>
-                  <a:srgbClr val="1C1B19"/>
-                </a:solidFill>
-                <a:latin typeface="Source Serif 4"/>
-              </a:rPr>
-              <a:t>Treat it as a feeling problem.</a:t>
-            </a:r>
-          </a:p>
-          <a:p>
-            <a:pPr algn="l">
-              <a:spcAft>
-                <a:spcPts val="585"/>
-              </a:spcAft>
-            </a:pPr>
-            <a:r>
-              <a:rPr sz="1300" b="0" i="0">
-                <a:solidFill>
-                  <a:srgbClr val="1C1B19"/>
-                </a:solidFill>
-                <a:latin typeface="Source Serif 4"/>
-              </a:rPr>
-              <a:t>Most students have been told procrastination means they're lazy or don't care. Start from the research: people put things off to escape a bad feeling. Students who feel seen will listen. Students who feel judged will tune out.</a:t>
-            </a:r>
-          </a:p>
-          <a:p>
-            <a:pPr algn="l">
-              <a:spcAft>
-                <a:spcPts val="585"/>
-              </a:spcAft>
-            </a:pPr>
-            <a:r>
-              <a:rPr sz="1300" b="0" i="0">
-                <a:solidFill>
-                  <a:srgbClr val="1C1B19"/>
-                </a:solidFill>
-                <a:latin typeface="Source Serif 4"/>
-              </a:rPr>
-              <a:t/>
-            </a:r>
-          </a:p>
-          <a:p>
-            <a:pPr algn="l">
-              <a:spcAft>
-                <a:spcPts val="585"/>
-              </a:spcAft>
-            </a:pPr>
-            <a:r>
-              <a:rPr sz="1500" b="1" i="0">
-                <a:solidFill>
-                  <a:srgbClr val="1C1B19"/>
-                </a:solidFill>
-                <a:latin typeface="Source Serif 4"/>
-              </a:rPr>
-              <a:t>Keep what they're avoiding private.</a:t>
-            </a:r>
-          </a:p>
-          <a:p>
-            <a:pPr algn="l">
-              <a:spcAft>
-                <a:spcPts val="585"/>
-              </a:spcAft>
-            </a:pPr>
-            <a:r>
-              <a:rPr sz="1300" b="0" i="0">
-                <a:solidFill>
-                  <a:srgbClr val="1C1B19"/>
-                </a:solidFill>
-                <a:latin typeface="Source Serif 4"/>
-              </a:rPr>
-              <a:t>Don't ask anyone to say what they've put off, how far behind they are, or what grade they got. The if-then plan stays with the student. The pair-share is only the time and place, never the task.</a:t>
-            </a:r>
-          </a:p>
-          <a:p>
-            <a:pPr algn="l">
-              <a:spcAft>
-                <a:spcPts val="585"/>
-              </a:spcAft>
-            </a:pPr>
-            <a:r>
-              <a:rPr sz="1300" b="0" i="0">
-                <a:solidFill>
-                  <a:srgbClr val="1C1B19"/>
-                </a:solidFill>
-                <a:latin typeface="Source Serif 4"/>
-              </a:rPr>
-              <a:t/>
-            </a:r>
-          </a:p>
-          <a:p>
-            <a:pPr algn="l">
-              <a:spcAft>
-                <a:spcPts val="585"/>
-              </a:spcAft>
-            </a:pPr>
-            <a:r>
-              <a:rPr sz="1500" b="1" i="0">
-                <a:solidFill>
-                  <a:srgbClr val="1C1B19"/>
-                </a:solidFill>
-                <a:latin typeface="Source Serif 4"/>
-              </a:rPr>
-              <a:t>Skip the phone lecture.</a:t>
-            </a:r>
-          </a:p>
-          <a:p>
-            <a:pPr algn="l">
-              <a:spcAft>
-                <a:spcPts val="585"/>
-              </a:spcAft>
-            </a:pPr>
-            <a:r>
-              <a:rPr sz="1300" b="0" i="0">
-                <a:solidFill>
-                  <a:srgbClr val="1C1B19"/>
-                </a:solidFill>
-                <a:latin typeface="Source Serif 4"/>
-              </a:rPr>
-              <a:t>The phone study is useful. A sermon about screens costs you the room. Keep it to friction: where the phone sits while you work.</a:t>
-            </a:r>
-          </a:p>
-          <a:p>
-            <a:pPr algn="l">
-              <a:spcAft>
-                <a:spcPts val="585"/>
-              </a:spcAft>
-            </a:pPr>
-            <a:r>
-              <a:rPr sz="1300" b="0" i="0">
-                <a:solidFill>
-                  <a:srgbClr val="1C1B19"/>
-                </a:solidFill>
-                <a:latin typeface="Source Serif 4"/>
-              </a:rPr>
-              <a:t/>
-            </a:r>
-          </a:p>
-        </p:txBody>
-      </p:sp>
-      <p:sp>
-        <p:nvSpPr>
-          <p:cNvPr id="6" name="TextBox 5"/>
-          <p:cNvSpPr txBox="1"/>
-          <p:nvPr/>
-        </p:nvSpPr>
-        <p:spPr>
-          <a:xfrm>
-            <a:off x="6217920" y="1463040"/>
-            <a:ext cx="5394960" cy="4937760"/>
-          </a:xfrm>
-          <a:prstGeom prst="rect">
-            <a:avLst/>
-          </a:prstGeom>
-          <a:noFill/>
-        </p:spPr>
-        <p:txBody>
-          <a:bodyPr wrap="square" anchor="t" lIns="0" rIns="0" tIns="0" bIns="0">
-            <a:spAutoFit/>
-          </a:bodyPr>
-          <a:lstStyle/>
-          <a:p>
-            <a:pPr algn="l">
-              <a:spcAft>
-                <a:spcPts val="585"/>
-              </a:spcAft>
-            </a:pPr>
-            <a:r>
-              <a:rPr sz="1500" b="1" i="0">
-                <a:solidFill>
-                  <a:srgbClr val="1C1B19"/>
-                </a:solidFill>
-                <a:latin typeface="Source Serif 4"/>
-              </a:rPr>
-              <a:t>Be honest about the research.</a:t>
-            </a:r>
-          </a:p>
-          <a:p>
-            <a:pPr algn="l">
-              <a:spcAft>
-                <a:spcPts val="585"/>
-              </a:spcAft>
-            </a:pPr>
-            <a:r>
-              <a:rPr sz="1300" b="0" i="0">
-                <a:solidFill>
-                  <a:srgbClr val="1C1B19"/>
-                </a:solidFill>
-                <a:latin typeface="Source Serif 4"/>
-              </a:rPr>
-              <a:t>Most of these studies were with college students, and Steel's motivation equation is a simplified model. Say so. Students trust you more for it.</a:t>
-            </a:r>
-          </a:p>
-          <a:p>
-            <a:pPr algn="l">
-              <a:spcAft>
-                <a:spcPts val="585"/>
-              </a:spcAft>
-            </a:pPr>
-            <a:r>
-              <a:rPr sz="1300" b="0" i="0">
-                <a:solidFill>
-                  <a:srgbClr val="1C1B19"/>
-                </a:solidFill>
-                <a:latin typeface="Source Serif 4"/>
-              </a:rPr>
-              <a:t/>
-            </a:r>
-          </a:p>
-          <a:p>
-            <a:pPr algn="l">
-              <a:spcAft>
-                <a:spcPts val="585"/>
-              </a:spcAft>
-            </a:pPr>
-            <a:r>
-              <a:rPr sz="1500" b="1" i="0">
-                <a:solidFill>
-                  <a:srgbClr val="1C1B19"/>
-                </a:solidFill>
-                <a:latin typeface="Source Serif 4"/>
-              </a:rPr>
-              <a:t>When it's more than procrastination.</a:t>
-            </a:r>
-          </a:p>
-          <a:p>
-            <a:pPr algn="l">
-              <a:spcAft>
-                <a:spcPts val="585"/>
-              </a:spcAft>
-            </a:pPr>
-            <a:r>
-              <a:rPr sz="1300" b="0" i="0">
-                <a:solidFill>
-                  <a:srgbClr val="1C1B19"/>
-                </a:solidFill>
-                <a:latin typeface="Source Serif 4"/>
-              </a:rPr>
-              <a:t>A student who can't start things in most classes, no matter what they try, or who has always struggled with time and finishing, may have ADHD or another learning difference. Connect them with the learning specialist or a counselor.</a:t>
-            </a:r>
-          </a:p>
-          <a:p>
-            <a:pPr algn="l">
-              <a:spcAft>
-                <a:spcPts val="585"/>
-              </a:spcAft>
-            </a:pPr>
-            <a:r>
-              <a:rPr sz="1300" b="0" i="0">
-                <a:solidFill>
-                  <a:srgbClr val="1C1B19"/>
-                </a:solidFill>
-                <a:latin typeface="Source Serif 4"/>
-              </a:rPr>
-              <a:t/>
-            </a:r>
-          </a:p>
-          <a:p>
-            <a:pPr algn="l">
-              <a:spcAft>
-                <a:spcPts val="585"/>
-              </a:spcAft>
-            </a:pPr>
-            <a:r>
-              <a:rPr sz="1500" b="1" i="0">
-                <a:solidFill>
-                  <a:srgbClr val="1C1B19"/>
-                </a:solidFill>
-                <a:latin typeface="Source Serif 4"/>
-              </a:rPr>
-              <a:t>When mood is the bigger problem.</a:t>
-            </a:r>
-          </a:p>
-          <a:p>
-            <a:pPr algn="l">
-              <a:spcAft>
-                <a:spcPts val="585"/>
-              </a:spcAft>
-            </a:pPr>
-            <a:r>
-              <a:rPr sz="1300" b="0" i="0">
-                <a:solidFill>
-                  <a:srgbClr val="1C1B19"/>
-                </a:solidFill>
-                <a:latin typeface="Source Serif 4"/>
-              </a:rPr>
-              <a:t>If a student says avoiding work comes with feeling anxious, flat or hopeless most days, or that they're so far behind catching up feels impossible, thank them and walk them to a counselor that day. Don't work through it in front of the class.</a:t>
-            </a:r>
-          </a:p>
-          <a:p>
-            <a:pPr algn="l">
-              <a:spcAft>
-                <a:spcPts val="585"/>
-              </a:spcAft>
-            </a:pPr>
-            <a:r>
-              <a:rPr sz="1300" b="0" i="0">
-                <a:solidFill>
-                  <a:srgbClr val="1C1B19"/>
-                </a:solidFill>
-                <a:latin typeface="Source Serif 4"/>
-              </a:rPr>
-              <a:t/>
-            </a:r>
-          </a:p>
-        </p:txBody>
-      </p:sp>
-    </p:spTree>
-  </p:cSld>
-  <p:clrMapOvr>
-    <a:masterClrMapping/>
-  </p:clrMapOvr>
-</p:sld>
-</file>
-
-<file path=ppt/slides/slide3.xml><?xml version="1.0" encoding="utf-8"?>
-<p:sld xmlns:a="http://schemas.openxmlformats.org/drawingml/2006/main" xmlns:p="http://schemas.openxmlformats.org/presentationml/2006/main" xmlns:r="http://schemas.openxmlformats.org/officeDocument/2006/relationships" show="0">
-  <p:cSld>
-    <p:bg>
-      <p:bgPr>
-        <a:solidFill>
-          <a:srgbClr val="EEEBE4"/>
-        </a:solidFill>
-        <a:effectLst/>
-      </p:bgPr>
-    </p:bg>
-    <p:spTree>
-      <p:nvGrpSpPr>
-        <p:cNvPr id="1" name=""/>
-        <p:cNvGrpSpPr/>
-        <p:nvPr/>
-      </p:nvGrpSpPr>
-      <p:grpSpPr/>
-      <p:sp>
-        <p:nvSpPr>
-          <p:cNvPr id="2" name="Rectangle 1"/>
+              <a:t>Bad feeling</a:t>
+            </a:r>
+          </a:p>
+        </p:txBody>
+      </p:sp>
+      <p:cxnSp>
+        <p:nvCxnSpPr>
+          <p:cNvPr id="11" name="Connector 10"/>
+          <p:cNvCxnSpPr/>
+          <p:nvPr/>
+        </p:nvCxnSpPr>
+        <p:spPr>
+          <a:xfrm>
+            <a:off x="4912614" y="3246120"/>
+            <a:ext cx="176022" cy="0"/>
+          </a:xfrm>
+          <a:prstGeom prst="line">
+            <a:avLst/>
+          </a:prstGeom>
+          <a:ln w="31750">
+            <a:solidFill>
+              <a:srgbClr val="F47B20"/>
+            </a:solidFill>
+            <a:tailEnd type="triangle"/>
+          </a:ln>
+        </p:spPr>
+        <p:style>
+          <a:lnRef idx="2">
+            <a:schemeClr val="accent1"/>
+          </a:lnRef>
+          <a:fillRef idx="0">
+            <a:schemeClr val="accent1"/>
+          </a:fillRef>
+          <a:effectRef idx="1">
+            <a:schemeClr val="accent1"/>
+          </a:effectRef>
+          <a:fontRef idx="minor">
+            <a:schemeClr val="tx1"/>
+          </a:fontRef>
+        </p:style>
+      </p:cxnSp>
+      <p:sp>
+        <p:nvSpPr>
+          <p:cNvPr id="12" name="Rectangle 11"/>
           <p:cNvSpPr/>
           <p:nvPr/>
         </p:nvSpPr>
         <p:spPr>
           <a:xfrm>
-            <a:off x="0" y="0"/>
-            <a:ext cx="12191695" cy="384048"/>
+            <a:off x="5143500" y="2743200"/>
+            <a:ext cx="1874519" cy="1005840"/>
           </a:xfrm>
           <a:prstGeom prst="rect">
             <a:avLst/>
           </a:prstGeom>
           <a:solidFill>
-            <a:srgbClr val="0B2D5B"/>
+            <a:srgbClr val="FFFFFF"/>
           </a:solidFill>
-          <a:ln>
-            <a:noFill/>
+          <a:ln w="15875">
+            <a:solidFill>
+              <a:srgbClr val="0B2D5B"/>
+            </a:solidFill>
           </a:ln>
           <a:effectLst/>
         </p:spPr>
@@ -7334,14 +9270,14 @@
       </p:sp>
       <p:sp>
         <p:nvSpPr>
-          <p:cNvPr id="3" name="TextBox 2"/>
+          <p:cNvPr id="13" name="TextBox 12"/>
           <p:cNvSpPr txBox="1"/>
           <p:nvPr/>
         </p:nvSpPr>
         <p:spPr>
           <a:xfrm>
-            <a:off x="548640" y="100584"/>
-            <a:ext cx="10972800" cy="274320"/>
+            <a:off x="5143500" y="2743200"/>
+            <a:ext cx="1874519" cy="1005840"/>
           </a:xfrm>
           <a:prstGeom prst="rect">
             <a:avLst/>
@@ -7349,485 +9285,85 @@
           <a:noFill/>
         </p:spPr>
         <p:txBody>
-          <a:bodyPr wrap="square" anchor="t" lIns="0" rIns="0" tIns="0" bIns="0">
+          <a:bodyPr wrap="square" anchor="ctr" lIns="0" rIns="0" tIns="0" bIns="0">
             <a:spAutoFit/>
           </a:bodyPr>
           <a:lstStyle/>
           <a:p>
-            <a:pPr algn="l">
-              <a:spcAft>
-                <a:spcPts val="495"/>
-              </a:spcAft>
-            </a:pPr>
-            <a:r>
-              <a:rPr sz="1100" b="1" i="0">
-                <a:solidFill>
-                  <a:srgbClr val="FFFFFF"/>
-                </a:solidFill>
-                <a:latin typeface="Inter Tight"/>
-              </a:rPr>
-              <a:t>TEACHER PAGE  ·  skipped when you present  ·  Every student in the room</a:t>
-            </a:r>
-          </a:p>
-        </p:txBody>
-      </p:sp>
-      <p:sp>
-        <p:nvSpPr>
-          <p:cNvPr id="4" name="TextBox 3"/>
-          <p:cNvSpPr txBox="1"/>
-          <p:nvPr/>
-        </p:nvSpPr>
-        <p:spPr>
-          <a:xfrm>
-            <a:off x="548640" y="685800"/>
-            <a:ext cx="10972800" cy="640080"/>
-          </a:xfrm>
-          <a:prstGeom prst="rect">
-            <a:avLst/>
-          </a:prstGeom>
-          <a:noFill/>
-        </p:spPr>
-        <p:txBody>
-          <a:bodyPr wrap="square" anchor="t" lIns="0" rIns="0" tIns="0" bIns="0">
-            <a:spAutoFit/>
-          </a:bodyPr>
-          <a:lstStyle/>
-          <a:p>
-            <a:pPr algn="l">
-              <a:spcAft>
-                <a:spcPts val="1350"/>
-              </a:spcAft>
-            </a:pPr>
-            <a:r>
-              <a:rPr sz="3000" b="1" i="0">
+            <a:pPr algn="ctr">
+              <a:spcAft>
+                <a:spcPts val="900"/>
+              </a:spcAft>
+            </a:pPr>
+            <a:r>
+              <a:rPr sz="2000" b="1" i="0">
                 <a:solidFill>
                   <a:srgbClr val="1C1B19"/>
                 </a:solidFill>
                 <a:latin typeface="Source Serif 4"/>
               </a:rPr>
-              <a:t>Every student in the room</a:t>
-            </a:r>
-          </a:p>
-        </p:txBody>
-      </p:sp>
-      <p:sp>
-        <p:nvSpPr>
-          <p:cNvPr id="5" name="TextBox 4"/>
-          <p:cNvSpPr txBox="1"/>
-          <p:nvPr/>
-        </p:nvSpPr>
-        <p:spPr>
-          <a:xfrm>
-            <a:off x="548640" y="1325880"/>
-            <a:ext cx="10972800" cy="365760"/>
-          </a:xfrm>
-          <a:prstGeom prst="rect">
-            <a:avLst/>
-          </a:prstGeom>
-          <a:noFill/>
-        </p:spPr>
-        <p:txBody>
-          <a:bodyPr wrap="square" anchor="t" lIns="0" rIns="0" tIns="0" bIns="0">
-            <a:spAutoFit/>
-          </a:bodyPr>
-          <a:lstStyle/>
-          <a:p>
-            <a:pPr algn="l">
-              <a:spcAft>
-                <a:spcPts val="630"/>
-              </a:spcAft>
-            </a:pPr>
-            <a:r>
-              <a:rPr sz="1400" b="0" i="0">
-                <a:solidFill>
-                  <a:srgbClr val="5D5A54"/>
-                </a:solidFill>
-                <a:latin typeface="Inter Tight"/>
-              </a:rPr>
-              <a:t>Culture, family, identity, ability and money: what to keep in mind for this topic.</a:t>
-            </a:r>
-          </a:p>
-        </p:txBody>
-      </p:sp>
-      <p:sp>
-        <p:nvSpPr>
-          <p:cNvPr id="6" name="TextBox 5"/>
-          <p:cNvSpPr txBox="1"/>
-          <p:nvPr/>
-        </p:nvSpPr>
-        <p:spPr>
-          <a:xfrm>
-            <a:off x="548640" y="1828800"/>
-            <a:ext cx="5394960" cy="4572000"/>
-          </a:xfrm>
-          <a:prstGeom prst="rect">
-            <a:avLst/>
-          </a:prstGeom>
-          <a:noFill/>
-        </p:spPr>
-        <p:txBody>
-          <a:bodyPr wrap="square" anchor="t" lIns="0" rIns="0" tIns="0" bIns="0">
-            <a:spAutoFit/>
-          </a:bodyPr>
-          <a:lstStyle/>
-          <a:p>
-            <a:pPr algn="l">
-              <a:spcAft>
-                <a:spcPts val="585"/>
-              </a:spcAft>
-            </a:pPr>
-            <a:r>
-              <a:rPr sz="1500" b="1" i="0">
-                <a:solidFill>
-                  <a:srgbClr val="1C1B19"/>
-                </a:solidFill>
-                <a:latin typeface="Source Serif 4"/>
-              </a:rPr>
-              <a:t>ADHD and executive function.</a:t>
-            </a:r>
-          </a:p>
-          <a:p>
-            <a:pPr algn="l">
-              <a:spcAft>
-                <a:spcPts val="585"/>
-              </a:spcAft>
-            </a:pPr>
-            <a:r>
-              <a:rPr sz="1300" b="0" i="0">
-                <a:solidFill>
-                  <a:srgbClr val="1C1B19"/>
-                </a:solidFill>
-                <a:latin typeface="Source Serif 4"/>
-              </a:rPr>
-              <a:t>For students with ADHD, starting is often the hardest part, and willpower talk makes it worse. If-then plans, timers and adding friction are the same tools that help them most. Avoid diagnoses as casual adjectives ("I'm so ADHD today") in your own examples.</a:t>
-            </a:r>
-          </a:p>
-          <a:p>
-            <a:pPr algn="l">
-              <a:spcAft>
-                <a:spcPts val="585"/>
-              </a:spcAft>
-            </a:pPr>
-            <a:r>
-              <a:rPr sz="1300" b="0" i="0">
-                <a:solidFill>
-                  <a:srgbClr val="1C1B19"/>
-                </a:solidFill>
-                <a:latin typeface="Source Serif 4"/>
-              </a:rPr>
-              <a:t/>
-            </a:r>
-          </a:p>
-          <a:p>
-            <a:pPr algn="l">
-              <a:spcAft>
-                <a:spcPts val="585"/>
-              </a:spcAft>
-            </a:pPr>
-            <a:r>
-              <a:rPr sz="1500" b="1" i="0">
-                <a:solidFill>
-                  <a:srgbClr val="1C1B19"/>
-                </a:solidFill>
-                <a:latin typeface="Source Serif 4"/>
-              </a:rPr>
-              <a:t>Time after school isn't equal.</a:t>
-            </a:r>
-          </a:p>
-          <a:p>
-            <a:pPr algn="l">
-              <a:spcAft>
-                <a:spcPts val="585"/>
-              </a:spcAft>
-            </a:pPr>
-            <a:r>
-              <a:rPr sz="1300" b="0" i="0">
-                <a:solidFill>
-                  <a:srgbClr val="1C1B19"/>
-                </a:solidFill>
-                <a:latin typeface="Source Serif 4"/>
-              </a:rPr>
-              <a:t>Some students work, ride a long bus, or watch younger siblings or cousins until an adult gets home. Priya's scenario has this in it. Short sprints and a 10-minute first step fit a tight evening. Every tool in this lesson is free.</a:t>
-            </a:r>
-          </a:p>
-          <a:p>
-            <a:pPr algn="l">
-              <a:spcAft>
-                <a:spcPts val="585"/>
-              </a:spcAft>
-            </a:pPr>
-            <a:r>
-              <a:rPr sz="1300" b="0" i="0">
-                <a:solidFill>
-                  <a:srgbClr val="1C1B19"/>
-                </a:solidFill>
-                <a:latin typeface="Source Serif 4"/>
-              </a:rPr>
-              <a:t/>
-            </a:r>
-          </a:p>
-          <a:p>
-            <a:pPr algn="l">
-              <a:spcAft>
-                <a:spcPts val="585"/>
-              </a:spcAft>
-            </a:pPr>
-            <a:r>
-              <a:rPr sz="1500" b="1" i="0">
-                <a:solidFill>
-                  <a:srgbClr val="1C1B19"/>
-                </a:solidFill>
-                <a:latin typeface="Source Serif 4"/>
-              </a:rPr>
-              <a:t>"Put the phone in another room" assumes another room.</a:t>
-            </a:r>
-          </a:p>
-          <a:p>
-            <a:pPr algn="l">
-              <a:spcAft>
-                <a:spcPts val="585"/>
-              </a:spcAft>
-            </a:pPr>
-            <a:r>
-              <a:rPr sz="1300" b="0" i="0">
-                <a:solidFill>
-                  <a:srgbClr val="1C1B19"/>
-                </a:solidFill>
-                <a:latin typeface="Source Serif 4"/>
-              </a:rPr>
-              <a:t>Some students share a bedroom or study at the kitchen table. A bag, a drawer, a friend holding it, or app timers all add the same friction.</a:t>
-            </a:r>
-          </a:p>
-          <a:p>
-            <a:pPr algn="l">
-              <a:spcAft>
-                <a:spcPts val="585"/>
-              </a:spcAft>
-            </a:pPr>
-            <a:r>
-              <a:rPr sz="1300" b="0" i="0">
-                <a:solidFill>
-                  <a:srgbClr val="1C1B19"/>
-                </a:solidFill>
-                <a:latin typeface="Source Serif 4"/>
-              </a:rPr>
-              <a:t/>
-            </a:r>
-          </a:p>
-        </p:txBody>
-      </p:sp>
-      <p:sp>
-        <p:nvSpPr>
-          <p:cNvPr id="7" name="TextBox 6"/>
-          <p:cNvSpPr txBox="1"/>
-          <p:nvPr/>
-        </p:nvSpPr>
-        <p:spPr>
-          <a:xfrm>
-            <a:off x="6217920" y="1828800"/>
-            <a:ext cx="5394960" cy="4572000"/>
-          </a:xfrm>
-          <a:prstGeom prst="rect">
-            <a:avLst/>
-          </a:prstGeom>
-          <a:noFill/>
-        </p:spPr>
-        <p:txBody>
-          <a:bodyPr wrap="square" anchor="t" lIns="0" rIns="0" tIns="0" bIns="0">
-            <a:spAutoFit/>
-          </a:bodyPr>
-          <a:lstStyle/>
-          <a:p>
-            <a:pPr algn="l">
-              <a:spcAft>
-                <a:spcPts val="585"/>
-              </a:spcAft>
-            </a:pPr>
-            <a:r>
-              <a:rPr sz="1500" b="1" i="0">
-                <a:solidFill>
-                  <a:srgbClr val="1C1B19"/>
-                </a:solidFill>
-                <a:latin typeface="Source Serif 4"/>
-              </a:rPr>
-              <a:t>The person who asks can be anyone.</a:t>
-            </a:r>
-          </a:p>
-          <a:p>
-            <a:pPr algn="l">
-              <a:spcAft>
-                <a:spcPts val="585"/>
-              </a:spcAft>
-            </a:pPr>
-            <a:r>
-              <a:rPr sz="1300" b="0" i="0">
-                <a:solidFill>
-                  <a:srgbClr val="1C1B19"/>
-                </a:solidFill>
-                <a:latin typeface="Source Serif 4"/>
-              </a:rPr>
-              <a:t>"Tell someone who'll ask about it" works with a grandparent, an older sibling, a coach, a friend on a call, or a foster parent. Don't assume a parent is home to check.</a:t>
-            </a:r>
-          </a:p>
-          <a:p>
-            <a:pPr algn="l">
-              <a:spcAft>
-                <a:spcPts val="585"/>
-              </a:spcAft>
-            </a:pPr>
-            <a:r>
-              <a:rPr sz="1300" b="0" i="0">
-                <a:solidFill>
-                  <a:srgbClr val="1C1B19"/>
-                </a:solidFill>
-                <a:latin typeface="Source Serif 4"/>
-              </a:rPr>
-              <a:t/>
-            </a:r>
-          </a:p>
-          <a:p>
-            <a:pPr algn="l">
-              <a:spcAft>
-                <a:spcPts val="585"/>
-              </a:spcAft>
-            </a:pPr>
-            <a:r>
-              <a:rPr sz="1500" b="1" i="0">
-                <a:solidFill>
-                  <a:srgbClr val="1C1B19"/>
-                </a:solidFill>
-                <a:latin typeface="Source Serif 4"/>
-              </a:rPr>
-              <a:t>Some students carry extra weight on a hard task.</a:t>
-            </a:r>
-          </a:p>
-          <a:p>
-            <a:pPr algn="l">
-              <a:spcAft>
-                <a:spcPts val="585"/>
-              </a:spcAft>
-            </a:pPr>
-            <a:r>
-              <a:rPr sz="1300" b="0" i="0">
-                <a:solidFill>
-                  <a:srgbClr val="1C1B19"/>
-                </a:solidFill>
-                <a:latin typeface="Source Serif 4"/>
-              </a:rPr>
-              <a:t>The brain flags a hard task as a threat to your image or your sense of being smart. A student who is first in their family at a school like this, or new to it, may feel that threat more. Name it as common and keep the reflection private.</a:t>
-            </a:r>
-          </a:p>
-          <a:p>
-            <a:pPr algn="l">
-              <a:spcAft>
-                <a:spcPts val="585"/>
-              </a:spcAft>
-            </a:pPr>
-            <a:r>
-              <a:rPr sz="1300" b="0" i="0">
-                <a:solidFill>
-                  <a:srgbClr val="1C1B19"/>
-                </a:solidFill>
-                <a:latin typeface="Source Serif 4"/>
-              </a:rPr>
-              <a:t/>
-            </a:r>
-          </a:p>
-          <a:p>
-            <a:pPr algn="l">
-              <a:spcAft>
-                <a:spcPts val="585"/>
-              </a:spcAft>
-            </a:pPr>
-            <a:r>
-              <a:rPr sz="1500" b="1" i="0">
-                <a:solidFill>
-                  <a:srgbClr val="1C1B19"/>
-                </a:solidFill>
-                <a:latin typeface="Source Serif 4"/>
-              </a:rPr>
-              <a:t>Language and "I don't get the assignment."</a:t>
-            </a:r>
-          </a:p>
-          <a:p>
-            <a:pPr algn="l">
-              <a:spcAft>
-                <a:spcPts val="585"/>
-              </a:spcAft>
-            </a:pPr>
-            <a:r>
-              <a:rPr sz="1300" b="0" i="0">
-                <a:solidFill>
-                  <a:srgbClr val="1C1B19"/>
-                </a:solidFill>
-                <a:latin typeface="Source Serif 4"/>
-              </a:rPr>
-              <a:t>For a student learning English, "I don't understand what they want" is a real reason a task feels impossible to start. Asking the teacher counts as a first step. A bad first draft can start in any language.</a:t>
-            </a:r>
-          </a:p>
-          <a:p>
-            <a:pPr algn="l">
-              <a:spcAft>
-                <a:spcPts val="585"/>
-              </a:spcAft>
-            </a:pPr>
-            <a:r>
-              <a:rPr sz="1300" b="0" i="0">
-                <a:solidFill>
-                  <a:srgbClr val="1C1B19"/>
-                </a:solidFill>
-                <a:latin typeface="Source Serif 4"/>
-              </a:rPr>
-              <a:t/>
-            </a:r>
-          </a:p>
-        </p:txBody>
-      </p:sp>
-    </p:spTree>
-  </p:cSld>
-  <p:clrMapOvr>
-    <a:masterClrMapping/>
-  </p:clrMapOvr>
-</p:sld>
-</file>
-
-<file path=ppt/slides/slide4.xml><?xml version="1.0" encoding="utf-8"?>
-<p:sld xmlns:a="http://schemas.openxmlformats.org/drawingml/2006/main" xmlns:p="http://schemas.openxmlformats.org/presentationml/2006/main" xmlns:r="http://schemas.openxmlformats.org/officeDocument/2006/relationships" show="0">
-  <p:cSld>
-    <p:bg>
-      <p:bgPr>
-        <a:solidFill>
-          <a:srgbClr val="EEEBE4"/>
-        </a:solidFill>
-        <a:effectLst/>
-      </p:bgPr>
-    </p:bg>
-    <p:spTree>
-      <p:nvGrpSpPr>
-        <p:cNvPr id="1" name=""/>
-        <p:cNvGrpSpPr/>
-        <p:nvPr/>
-      </p:nvGrpSpPr>
-      <p:grpSpPr/>
-      <p:sp>
-        <p:nvSpPr>
-          <p:cNvPr id="2" name="Rectangle 1"/>
+              <a:t>Easy exit</a:t>
+            </a:r>
+          </a:p>
+        </p:txBody>
+      </p:sp>
+      <p:cxnSp>
+        <p:nvCxnSpPr>
+          <p:cNvPr id="14" name="Connector 13"/>
+          <p:cNvCxnSpPr/>
+          <p:nvPr/>
+        </p:nvCxnSpPr>
+        <p:spPr>
+          <a:xfrm>
+            <a:off x="7072883" y="3246120"/>
+            <a:ext cx="176023" cy="0"/>
+          </a:xfrm>
+          <a:prstGeom prst="line">
+            <a:avLst/>
+          </a:prstGeom>
+          <a:ln w="31750">
+            <a:solidFill>
+              <a:srgbClr val="F47B20"/>
+            </a:solidFill>
+            <a:tailEnd type="triangle"/>
+          </a:ln>
+        </p:spPr>
+        <p:style>
+          <a:lnRef idx="2">
+            <a:schemeClr val="accent1"/>
+          </a:lnRef>
+          <a:fillRef idx="0">
+            <a:schemeClr val="accent1"/>
+          </a:fillRef>
+          <a:effectRef idx="1">
+            <a:schemeClr val="accent1"/>
+          </a:effectRef>
+          <a:fontRef idx="minor">
+            <a:schemeClr val="tx1"/>
+          </a:fontRef>
+        </p:style>
+      </p:cxnSp>
+      <p:sp>
+        <p:nvSpPr>
+          <p:cNvPr id="15" name="Rectangle 14"/>
           <p:cNvSpPr/>
           <p:nvPr/>
         </p:nvSpPr>
         <p:spPr>
           <a:xfrm>
-            <a:off x="0" y="0"/>
-            <a:ext cx="12191695" cy="384048"/>
+            <a:off x="7303770" y="2743200"/>
+            <a:ext cx="1874519" cy="1005840"/>
           </a:xfrm>
           <a:prstGeom prst="rect">
             <a:avLst/>
           </a:prstGeom>
           <a:solidFill>
-            <a:srgbClr val="0B2D5B"/>
+            <a:srgbClr val="FFFFFF"/>
           </a:solidFill>
-          <a:ln>
-            <a:noFill/>
+          <a:ln w="15875">
+            <a:solidFill>
+              <a:srgbClr val="0B2D5B"/>
+            </a:solidFill>
           </a:ln>
           <a:effectLst/>
         </p:spPr>
@@ -7855,14 +9391,14 @@
       </p:sp>
       <p:sp>
         <p:nvSpPr>
-          <p:cNvPr id="3" name="TextBox 2"/>
+          <p:cNvPr id="16" name="TextBox 15"/>
           <p:cNvSpPr txBox="1"/>
           <p:nvPr/>
         </p:nvSpPr>
         <p:spPr>
           <a:xfrm>
-            <a:off x="548640" y="100584"/>
-            <a:ext cx="10972800" cy="274320"/>
+            <a:off x="7303770" y="2743200"/>
+            <a:ext cx="1874519" cy="1005840"/>
           </a:xfrm>
           <a:prstGeom prst="rect">
             <a:avLst/>
@@ -7870,414 +9406,85 @@
           <a:noFill/>
         </p:spPr>
         <p:txBody>
-          <a:bodyPr wrap="square" anchor="t" lIns="0" rIns="0" tIns="0" bIns="0">
+          <a:bodyPr wrap="square" anchor="ctr" lIns="0" rIns="0" tIns="0" bIns="0">
             <a:spAutoFit/>
           </a:bodyPr>
           <a:lstStyle/>
           <a:p>
-            <a:pPr algn="l">
-              <a:spcAft>
-                <a:spcPts val="495"/>
-              </a:spcAft>
-            </a:pPr>
-            <a:r>
-              <a:rPr sz="1100" b="1" i="0">
-                <a:solidFill>
-                  <a:srgbClr val="FFFFFF"/>
-                </a:solidFill>
-                <a:latin typeface="Inter Tight"/>
-              </a:rPr>
-              <a:t>TEACHER PAGE  ·  skipped when you present  ·  Background</a:t>
-            </a:r>
-          </a:p>
-        </p:txBody>
-      </p:sp>
-      <p:sp>
-        <p:nvSpPr>
-          <p:cNvPr id="4" name="TextBox 3"/>
-          <p:cNvSpPr txBox="1"/>
-          <p:nvPr/>
-        </p:nvSpPr>
-        <p:spPr>
-          <a:xfrm>
-            <a:off x="548640" y="685800"/>
-            <a:ext cx="10972800" cy="640080"/>
-          </a:xfrm>
-          <a:prstGeom prst="rect">
-            <a:avLst/>
-          </a:prstGeom>
-          <a:noFill/>
-        </p:spPr>
-        <p:txBody>
-          <a:bodyPr wrap="square" anchor="t" lIns="0" rIns="0" tIns="0" bIns="0">
-            <a:spAutoFit/>
-          </a:bodyPr>
-          <a:lstStyle/>
-          <a:p>
-            <a:pPr algn="l">
-              <a:spcAft>
-                <a:spcPts val="1350"/>
-              </a:spcAft>
-            </a:pPr>
-            <a:r>
-              <a:rPr sz="3000" b="1" i="0">
+            <a:pPr algn="ctr">
+              <a:spcAft>
+                <a:spcPts val="900"/>
+              </a:spcAft>
+            </a:pPr>
+            <a:r>
+              <a:rPr sz="2000" b="1" i="0">
                 <a:solidFill>
                   <a:srgbClr val="1C1B19"/>
                 </a:solidFill>
                 <a:latin typeface="Source Serif 4"/>
               </a:rPr>
-              <a:t>What the research says</a:t>
-            </a:r>
-          </a:p>
-        </p:txBody>
-      </p:sp>
-      <p:sp>
-        <p:nvSpPr>
-          <p:cNvPr id="5" name="TextBox 4"/>
-          <p:cNvSpPr txBox="1"/>
-          <p:nvPr/>
-        </p:nvSpPr>
-        <p:spPr>
-          <a:xfrm>
-            <a:off x="548640" y="1463040"/>
-            <a:ext cx="5394960" cy="4937760"/>
-          </a:xfrm>
-          <a:prstGeom prst="rect">
-            <a:avLst/>
-          </a:prstGeom>
-          <a:noFill/>
-        </p:spPr>
-        <p:txBody>
-          <a:bodyPr wrap="square" anchor="t" lIns="0" rIns="0" tIns="0" bIns="0">
-            <a:spAutoFit/>
-          </a:bodyPr>
-          <a:lstStyle/>
-          <a:p>
-            <a:pPr algn="l">
-              <a:spcAft>
-                <a:spcPts val="585"/>
-              </a:spcAft>
-            </a:pPr>
-            <a:r>
-              <a:rPr sz="1300" b="0" i="0">
-                <a:solidFill>
-                  <a:srgbClr val="1C1B19"/>
-                </a:solidFill>
-                <a:latin typeface="Source Serif 4"/>
-              </a:rPr>
-              <a:t>Procrastination is choosing short-term mood repair over long-term goals: avoiding how the task makes you feel.</a:t>
-            </a:r>
-          </a:p>
-          <a:p>
-            <a:pPr algn="l">
-              <a:spcAft>
-                <a:spcPts val="585"/>
-              </a:spcAft>
-            </a:pPr>
-            <a:r>
-              <a:rPr sz="1050" b="0" i="0">
-                <a:solidFill>
-                  <a:srgbClr val="5D5A54"/>
-                </a:solidFill>
-                <a:latin typeface="Inter Tight"/>
-              </a:rPr>
-              <a:t>Sirois and Pychyl, Social and Personality Psychology Compass, 2013</a:t>
-            </a:r>
-          </a:p>
-          <a:p>
-            <a:pPr algn="l">
-              <a:spcAft>
-                <a:spcPts val="585"/>
-              </a:spcAft>
-            </a:pPr>
-            <a:r>
-              <a:rPr sz="1300" b="0" i="0">
-                <a:solidFill>
-                  <a:srgbClr val="1C1B19"/>
-                </a:solidFill>
-                <a:latin typeface="Source Serif 4"/>
-              </a:rPr>
-              <a:t>Combining hundreds of studies, one model of motivation: confidence times value, divided by impulsiveness times delay. Simplified, it shows four places to push.</a:t>
-            </a:r>
-          </a:p>
-          <a:p>
-            <a:pPr algn="l">
-              <a:spcAft>
-                <a:spcPts val="585"/>
-              </a:spcAft>
-            </a:pPr>
-            <a:r>
-              <a:rPr sz="1050" b="0" i="0">
-                <a:solidFill>
-                  <a:srgbClr val="5D5A54"/>
-                </a:solidFill>
-                <a:latin typeface="Inter Tight"/>
-              </a:rPr>
-              <a:t>Steel, Psychological Bulletin, 2007</a:t>
-            </a:r>
-          </a:p>
-          <a:p>
-            <a:pPr algn="l">
-              <a:spcAft>
-                <a:spcPts val="585"/>
-              </a:spcAft>
-            </a:pPr>
-            <a:r>
-              <a:rPr sz="1300" b="0" i="0">
-                <a:solidFill>
-                  <a:srgbClr val="1C1B19"/>
-                </a:solidFill>
-                <a:latin typeface="Source Serif 4"/>
-              </a:rPr>
-              <a:t>College procrastinators felt less stressed early in the semester. By the end they were more stressed, got sick more often and earned lower grades.</a:t>
-            </a:r>
-          </a:p>
-          <a:p>
-            <a:pPr algn="l">
-              <a:spcAft>
-                <a:spcPts val="585"/>
-              </a:spcAft>
-            </a:pPr>
-            <a:r>
-              <a:rPr sz="1050" b="0" i="0">
-                <a:solidFill>
-                  <a:srgbClr val="5D5A54"/>
-                </a:solidFill>
-                <a:latin typeface="Inter Tight"/>
-              </a:rPr>
-              <a:t>Tice and Baumeister, Psychological Science, 1997</a:t>
-            </a:r>
-          </a:p>
-          <a:p>
-            <a:pPr algn="l">
-              <a:spcAft>
-                <a:spcPts val="585"/>
-              </a:spcAft>
-            </a:pPr>
-            <a:r>
-              <a:rPr sz="1300" b="0" i="0">
-                <a:solidFill>
-                  <a:srgbClr val="1C1B19"/>
-                </a:solidFill>
-                <a:latin typeface="Source Serif 4"/>
-              </a:rPr>
-              <a:t>Students who forgave themselves for procrastinating before one exam procrastinated less before the next.</a:t>
-            </a:r>
-          </a:p>
-          <a:p>
-            <a:pPr algn="l">
-              <a:spcAft>
-                <a:spcPts val="585"/>
-              </a:spcAft>
-            </a:pPr>
-            <a:r>
-              <a:rPr sz="1050" b="0" i="0">
-                <a:solidFill>
-                  <a:srgbClr val="5D5A54"/>
-                </a:solidFill>
-                <a:latin typeface="Inter Tight"/>
-              </a:rPr>
-              <a:t>Wohl, Pychyl and Bennett, Personality and Individual Differences, 2010</a:t>
-            </a:r>
-          </a:p>
-        </p:txBody>
-      </p:sp>
-      <p:sp>
-        <p:nvSpPr>
-          <p:cNvPr id="6" name="TextBox 5"/>
-          <p:cNvSpPr txBox="1"/>
-          <p:nvPr/>
-        </p:nvSpPr>
-        <p:spPr>
-          <a:xfrm>
-            <a:off x="6217920" y="1463040"/>
-            <a:ext cx="5394960" cy="4937760"/>
-          </a:xfrm>
-          <a:prstGeom prst="rect">
-            <a:avLst/>
-          </a:prstGeom>
-          <a:noFill/>
-        </p:spPr>
-        <p:txBody>
-          <a:bodyPr wrap="square" anchor="t" lIns="0" rIns="0" tIns="0" bIns="0">
-            <a:spAutoFit/>
-          </a:bodyPr>
-          <a:lstStyle/>
-          <a:p>
-            <a:pPr algn="l">
-              <a:spcAft>
-                <a:spcPts val="585"/>
-              </a:spcAft>
-            </a:pPr>
-            <a:r>
-              <a:rPr sz="1300" b="0" i="0">
-                <a:solidFill>
-                  <a:srgbClr val="1C1B19"/>
-                </a:solidFill>
-                <a:latin typeface="Source Serif 4"/>
-              </a:rPr>
-              <a:t>A review of 94 studies found if-then plans (when, where and what, decided ahead) meaningfully increase follow-through.</a:t>
-            </a:r>
-          </a:p>
-          <a:p>
-            <a:pPr algn="l">
-              <a:spcAft>
-                <a:spcPts val="585"/>
-              </a:spcAft>
-            </a:pPr>
-            <a:r>
-              <a:rPr sz="1050" b="0" i="0">
-                <a:solidFill>
-                  <a:srgbClr val="5D5A54"/>
-                </a:solidFill>
-                <a:latin typeface="Inter Tight"/>
-              </a:rPr>
-              <a:t>Gollwitzer and Sheeran, Advances in Experimental Social Psychology, 2006</a:t>
-            </a:r>
-          </a:p>
-          <a:p>
-            <a:pPr algn="l">
-              <a:spcAft>
-                <a:spcPts val="585"/>
-              </a:spcAft>
-            </a:pPr>
-            <a:r>
-              <a:rPr sz="1300" b="0" i="0">
-                <a:solidFill>
-                  <a:srgbClr val="1C1B19"/>
-                </a:solidFill>
-                <a:latin typeface="Source Serif 4"/>
-              </a:rPr>
-              <a:t>Students did worse on attention and memory tasks with their phone on the desk, face down and silent, than with it in another room.</a:t>
-            </a:r>
-          </a:p>
-          <a:p>
-            <a:pPr algn="l">
-              <a:spcAft>
-                <a:spcPts val="585"/>
-              </a:spcAft>
-            </a:pPr>
-            <a:r>
-              <a:rPr sz="1050" b="0" i="0">
-                <a:solidFill>
-                  <a:srgbClr val="5D5A54"/>
-                </a:solidFill>
-                <a:latin typeface="Inter Tight"/>
-              </a:rPr>
-              <a:t>Ward et al., Journal of the Association for Consumer Research, 2017</a:t>
-            </a:r>
-          </a:p>
-          <a:p>
-            <a:pPr algn="l">
-              <a:spcAft>
-                <a:spcPts val="585"/>
-              </a:spcAft>
-            </a:pPr>
-            <a:r>
-              <a:rPr sz="1300" b="0" i="0">
-                <a:solidFill>
-                  <a:srgbClr val="1C1B19"/>
-                </a:solidFill>
-                <a:latin typeface="Source Serif 4"/>
-              </a:rPr>
-              <a:t>In brain scans, thinking about yourself ten years from now looks more like thinking about another person than about yourself.</a:t>
-            </a:r>
-          </a:p>
-          <a:p>
-            <a:pPr algn="l">
-              <a:spcAft>
-                <a:spcPts val="585"/>
-              </a:spcAft>
-            </a:pPr>
-            <a:r>
-              <a:rPr sz="1050" b="0" i="0">
-                <a:solidFill>
-                  <a:srgbClr val="5D5A54"/>
-                </a:solidFill>
-                <a:latin typeface="Inter Tight"/>
-              </a:rPr>
-              <a:t>Ersner-Hershfield et al., Social Cognitive and Affective Neuroscience, 2009</a:t>
-            </a:r>
-          </a:p>
-          <a:p>
-            <a:pPr algn="l">
-              <a:spcAft>
-                <a:spcPts val="585"/>
-              </a:spcAft>
-            </a:pPr>
-            <a:r>
-              <a:rPr sz="1300" b="0" i="0">
-                <a:solidFill>
-                  <a:srgbClr val="1C1B19"/>
-                </a:solidFill>
-                <a:latin typeface="Source Serif 4"/>
-              </a:rPr>
-              <a:t>People who struggle most to act on their intentions showed weaker links between the amygdala and the anterior cingulate, which helps the planner step in.</a:t>
-            </a:r>
-          </a:p>
-          <a:p>
-            <a:pPr algn="l">
-              <a:spcAft>
-                <a:spcPts val="585"/>
-              </a:spcAft>
-            </a:pPr>
-            <a:r>
-              <a:rPr sz="1050" b="0" i="0">
-                <a:solidFill>
-                  <a:srgbClr val="5D5A54"/>
-                </a:solidFill>
-                <a:latin typeface="Inter Tight"/>
-              </a:rPr>
-              <a:t>Schlüter et al., Psychological Science, 2018</a:t>
-            </a:r>
-          </a:p>
-        </p:txBody>
-      </p:sp>
-    </p:spTree>
-  </p:cSld>
-  <p:clrMapOvr>
-    <a:masterClrMapping/>
-  </p:clrMapOvr>
-</p:sld>
-</file>
-
-<file path=ppt/slides/slide5.xml><?xml version="1.0" encoding="utf-8"?>
-<p:sld xmlns:a="http://schemas.openxmlformats.org/drawingml/2006/main" xmlns:p="http://schemas.openxmlformats.org/presentationml/2006/main" xmlns:r="http://schemas.openxmlformats.org/officeDocument/2006/relationships">
-  <p:cSld>
-    <p:bg>
-      <p:bgPr>
-        <a:solidFill>
-          <a:srgbClr val="0B2D5B"/>
-        </a:solidFill>
-        <a:effectLst/>
-      </p:bgPr>
-    </p:bg>
-    <p:spTree>
-      <p:nvGrpSpPr>
-        <p:cNvPr id="1" name=""/>
-        <p:cNvGrpSpPr/>
-        <p:nvPr/>
-      </p:nvGrpSpPr>
-      <p:grpSpPr/>
-      <p:sp>
-        <p:nvSpPr>
-          <p:cNvPr id="2" name="Rectangle 1"/>
+              <a:t>Quick relief</a:t>
+            </a:r>
+          </a:p>
+        </p:txBody>
+      </p:sp>
+      <p:cxnSp>
+        <p:nvCxnSpPr>
+          <p:cNvPr id="17" name="Connector 16"/>
+          <p:cNvCxnSpPr/>
+          <p:nvPr/>
+        </p:nvCxnSpPr>
+        <p:spPr>
+          <a:xfrm>
+            <a:off x="9233154" y="3246120"/>
+            <a:ext cx="176022" cy="0"/>
+          </a:xfrm>
+          <a:prstGeom prst="line">
+            <a:avLst/>
+          </a:prstGeom>
+          <a:ln w="31750">
+            <a:solidFill>
+              <a:srgbClr val="F47B20"/>
+            </a:solidFill>
+            <a:tailEnd type="triangle"/>
+          </a:ln>
+        </p:spPr>
+        <p:style>
+          <a:lnRef idx="2">
+            <a:schemeClr val="accent1"/>
+          </a:lnRef>
+          <a:fillRef idx="0">
+            <a:schemeClr val="accent1"/>
+          </a:fillRef>
+          <a:effectRef idx="1">
+            <a:schemeClr val="accent1"/>
+          </a:effectRef>
+          <a:fontRef idx="minor">
+            <a:schemeClr val="tx1"/>
+          </a:fontRef>
+        </p:style>
+      </p:cxnSp>
+      <p:sp>
+        <p:nvSpPr>
+          <p:cNvPr id="18" name="Rectangle 17"/>
           <p:cNvSpPr/>
           <p:nvPr/>
         </p:nvSpPr>
         <p:spPr>
           <a:xfrm>
-            <a:off x="548640" y="502920"/>
-            <a:ext cx="457200" cy="54864"/>
+            <a:off x="9464040" y="2743200"/>
+            <a:ext cx="1874519" cy="1005840"/>
           </a:xfrm>
           <a:prstGeom prst="rect">
             <a:avLst/>
           </a:prstGeom>
           <a:solidFill>
-            <a:srgbClr val="F47B20"/>
+            <a:srgbClr val="FFFFFF"/>
           </a:solidFill>
-          <a:ln>
-            <a:noFill/>
+          <a:ln w="15875">
+            <a:solidFill>
+              <a:srgbClr val="0B2D5B"/>
+            </a:solidFill>
           </a:ln>
           <a:effectLst/>
         </p:spPr>
@@ -8305,14 +9512,53 @@
       </p:sp>
       <p:sp>
         <p:nvSpPr>
-          <p:cNvPr id="3" name="TextBox 2"/>
+          <p:cNvPr id="19" name="TextBox 18"/>
           <p:cNvSpPr txBox="1"/>
           <p:nvPr/>
         </p:nvSpPr>
         <p:spPr>
           <a:xfrm>
-            <a:off x="1143000" y="393192"/>
-            <a:ext cx="8229600" cy="274320"/>
+            <a:off x="9464040" y="2743200"/>
+            <a:ext cx="1874519" cy="1005840"/>
+          </a:xfrm>
+          <a:prstGeom prst="rect">
+            <a:avLst/>
+          </a:prstGeom>
+          <a:noFill/>
+        </p:spPr>
+        <p:txBody>
+          <a:bodyPr wrap="square" anchor="ctr" lIns="0" rIns="0" tIns="0" bIns="0">
+            <a:spAutoFit/>
+          </a:bodyPr>
+          <a:lstStyle/>
+          <a:p>
+            <a:pPr algn="ctr">
+              <a:spcAft>
+                <a:spcPts val="900"/>
+              </a:spcAft>
+            </a:pPr>
+            <a:r>
+              <a:rPr sz="2000" b="1" i="0">
+                <a:solidFill>
+                  <a:srgbClr val="1C1B19"/>
+                </a:solidFill>
+                <a:latin typeface="Source Serif 4"/>
+              </a:rPr>
+              <a:t>Task still there</a:t>
+            </a:r>
+          </a:p>
+        </p:txBody>
+      </p:sp>
+      <p:sp>
+        <p:nvSpPr>
+          <p:cNvPr id="20" name="TextBox 19"/>
+          <p:cNvSpPr txBox="1"/>
+          <p:nvPr/>
+        </p:nvSpPr>
+        <p:spPr>
+          <a:xfrm>
+            <a:off x="822960" y="4160520"/>
+            <a:ext cx="10515600" cy="457200"/>
           </a:xfrm>
           <a:prstGeom prst="rect">
             <a:avLst/>
@@ -8325,33 +9571,33 @@
           </a:bodyPr>
           <a:lstStyle/>
           <a:p>
-            <a:pPr algn="l">
-              <a:spcAft>
-                <a:spcPts val="540"/>
-              </a:spcAft>
-            </a:pPr>
-            <a:r>
-              <a:rPr sz="1200" b="1" i="0">
-                <a:solidFill>
-                  <a:srgbClr val="5D5A54"/>
+            <a:pPr algn="ctr">
+              <a:spcAft>
+                <a:spcPts val="810"/>
+              </a:spcAft>
+            </a:pPr>
+            <a:r>
+              <a:rPr sz="1800" b="1" i="0">
+                <a:solidFill>
+                  <a:srgbClr val="F47B20"/>
                 </a:solidFill>
                 <a:latin typeface="Inter Tight"/>
               </a:rPr>
-              <a:t>WHY YOU CAN'T START (AND HOW TO START ANYWAY)</a:t>
-            </a:r>
-          </a:p>
-        </p:txBody>
-      </p:sp>
-      <p:sp>
-        <p:nvSpPr>
-          <p:cNvPr id="4" name="TextBox 3"/>
+              <a:t>↺  and around again</a:t>
+            </a:r>
+          </a:p>
+        </p:txBody>
+      </p:sp>
+      <p:sp>
+        <p:nvSpPr>
+          <p:cNvPr id="21" name="TextBox 20"/>
           <p:cNvSpPr txBox="1"/>
           <p:nvPr/>
         </p:nvSpPr>
         <p:spPr>
           <a:xfrm>
-            <a:off x="8229600" y="6400800"/>
-            <a:ext cx="3410712" cy="274320"/>
+            <a:off x="822960" y="4846320"/>
+            <a:ext cx="10515600" cy="1188720"/>
           </a:xfrm>
           <a:prstGeom prst="rect">
             <a:avLst/>
@@ -8364,136 +9610,19 @@
           </a:bodyPr>
           <a:lstStyle/>
           <a:p>
-            <a:pPr algn="r">
-              <a:spcAft>
-                <a:spcPts val="450"/>
-              </a:spcAft>
-            </a:pPr>
-            <a:r>
-              <a:rPr sz="1000" b="0" i="0">
+            <a:pPr algn="ctr">
+              <a:spcAft>
+                <a:spcPts val="900"/>
+              </a:spcAft>
+            </a:pPr>
+            <a:r>
+              <a:rPr sz="2000" b="0" i="1">
                 <a:solidFill>
                   <a:srgbClr val="5D5A54"/>
                 </a:solidFill>
-                <a:latin typeface="Inter Tight"/>
-              </a:rPr>
-              <a:t>Beaver Counseling</a:t>
-            </a:r>
-          </a:p>
-        </p:txBody>
-      </p:sp>
-      <p:sp>
-        <p:nvSpPr>
-          <p:cNvPr id="5" name="TextBox 4"/>
-          <p:cNvSpPr txBox="1"/>
-          <p:nvPr/>
-        </p:nvSpPr>
-        <p:spPr>
-          <a:xfrm>
-            <a:off x="822960" y="2011680"/>
-            <a:ext cx="10515600" cy="1463040"/>
-          </a:xfrm>
-          <a:prstGeom prst="rect">
-            <a:avLst/>
-          </a:prstGeom>
-          <a:noFill/>
-        </p:spPr>
-        <p:txBody>
-          <a:bodyPr wrap="square" anchor="b" lIns="0" rIns="0" tIns="0" bIns="0">
-            <a:spAutoFit/>
-          </a:bodyPr>
-          <a:lstStyle/>
-          <a:p>
-            <a:pPr algn="l">
-              <a:spcAft>
-                <a:spcPts val="2700"/>
-              </a:spcAft>
-            </a:pPr>
-            <a:r>
-              <a:rPr sz="6000" b="1" i="0">
-                <a:solidFill>
-                  <a:srgbClr val="FFFFFF"/>
-                </a:solidFill>
-                <a:latin typeface="Source Serif 4"/>
-              </a:rPr>
-              <a:t>Why You Can't Start</a:t>
-            </a:r>
-          </a:p>
-        </p:txBody>
-      </p:sp>
-      <p:sp>
-        <p:nvSpPr>
-          <p:cNvPr id="6" name="TextBox 5"/>
-          <p:cNvSpPr txBox="1"/>
-          <p:nvPr/>
-        </p:nvSpPr>
-        <p:spPr>
-          <a:xfrm>
-            <a:off x="822960" y="3611880"/>
-            <a:ext cx="10515600" cy="914400"/>
-          </a:xfrm>
-          <a:prstGeom prst="rect">
-            <a:avLst/>
-          </a:prstGeom>
-          <a:noFill/>
-        </p:spPr>
-        <p:txBody>
-          <a:bodyPr wrap="square" anchor="t" lIns="0" rIns="0" tIns="0" bIns="0">
-            <a:spAutoFit/>
-          </a:bodyPr>
-          <a:lstStyle/>
-          <a:p>
-            <a:pPr algn="l">
-              <a:spcAft>
-                <a:spcPts val="1080"/>
-              </a:spcAft>
-            </a:pPr>
-            <a:r>
-              <a:rPr sz="2400" b="0" i="1">
-                <a:solidFill>
-                  <a:srgbClr val="E8E4DA"/>
-                </a:solidFill>
-                <a:latin typeface="Source Serif 4"/>
-              </a:rPr>
-              <a:t>And how to start anyway.</a:t>
-            </a:r>
-          </a:p>
-        </p:txBody>
-      </p:sp>
-      <p:sp>
-        <p:nvSpPr>
-          <p:cNvPr id="7" name="TextBox 6"/>
-          <p:cNvSpPr txBox="1"/>
-          <p:nvPr/>
-        </p:nvSpPr>
-        <p:spPr>
-          <a:xfrm>
-            <a:off x="822960" y="6035040"/>
-            <a:ext cx="7315200" cy="365760"/>
-          </a:xfrm>
-          <a:prstGeom prst="rect">
-            <a:avLst/>
-          </a:prstGeom>
-          <a:noFill/>
-        </p:spPr>
-        <p:txBody>
-          <a:bodyPr wrap="square" anchor="t" lIns="0" rIns="0" tIns="0" bIns="0">
-            <a:spAutoFit/>
-          </a:bodyPr>
-          <a:lstStyle/>
-          <a:p>
-            <a:pPr algn="l">
-              <a:spcAft>
-                <a:spcPts val="585"/>
-              </a:spcAft>
-            </a:pPr>
-            <a:r>
-              <a:rPr sz="1300" b="0" i="0">
-                <a:solidFill>
-                  <a:srgbClr val="E8E4DA"/>
-                </a:solidFill>
-                <a:latin typeface="Inter Tight"/>
-              </a:rPr>
-              <a:t>Beaver Upper School · Counseling</a:t>
+                <a:latin typeface="Source Serif 4"/>
+              </a:rPr>
+              <a:t>Putting it off fixes the feeling for now. The stress comes back later, with interest.</a:t>
             </a:r>
           </a:p>
         </p:txBody>
@@ -8602,7 +9731,7 @@
                 </a:solidFill>
                 <a:latin typeface="Inter Tight"/>
               </a:rPr>
-              <a:t>MYTH OR FACT?</a:t>
+              <a:t>YOUR TURN</a:t>
             </a:r>
           </a:p>
         </p:txBody>
@@ -8648,14 +9777,97 @@
       </p:sp>
       <p:sp>
         <p:nvSpPr>
-          <p:cNvPr id="5" name="TextBox 4"/>
+          <p:cNvPr id="5" name="Rectangle 4"/>
+          <p:cNvSpPr/>
+          <p:nvPr/>
+        </p:nvSpPr>
+        <p:spPr>
+          <a:xfrm>
+            <a:off x="822960" y="1371600"/>
+            <a:ext cx="73152" cy="3566160"/>
+          </a:xfrm>
+          <a:prstGeom prst="rect">
+            <a:avLst/>
+          </a:prstGeom>
+          <a:solidFill>
+            <a:srgbClr val="F47B20"/>
+          </a:solidFill>
+          <a:ln>
+            <a:noFill/>
+          </a:ln>
+          <a:effectLst/>
+        </p:spPr>
+        <p:style>
+          <a:lnRef idx="1">
+            <a:schemeClr val="accent1"/>
+          </a:lnRef>
+          <a:fillRef idx="3">
+            <a:schemeClr val="accent1"/>
+          </a:fillRef>
+          <a:effectRef idx="2">
+            <a:schemeClr val="accent1"/>
+          </a:effectRef>
+          <a:fontRef idx="minor">
+            <a:schemeClr val="lt1"/>
+          </a:fontRef>
+        </p:style>
+        <p:txBody>
+          <a:bodyPr rtlCol="0" anchor="ctr"/>
+          <a:lstStyle/>
+          <a:p>
+            <a:pPr algn="ctr"/>
+          </a:p>
+        </p:txBody>
+      </p:sp>
+      <p:sp>
+        <p:nvSpPr>
+          <p:cNvPr id="6" name="TextBox 5"/>
           <p:cNvSpPr txBox="1"/>
           <p:nvPr/>
         </p:nvSpPr>
         <p:spPr>
           <a:xfrm>
-            <a:off x="822960" y="1005840"/>
-            <a:ext cx="10515600" cy="1097280"/>
+            <a:off x="1188720" y="1371600"/>
+            <a:ext cx="10058400" cy="3566160"/>
+          </a:xfrm>
+          <a:prstGeom prst="rect">
+            <a:avLst/>
+          </a:prstGeom>
+          <a:noFill/>
+        </p:spPr>
+        <p:txBody>
+          <a:bodyPr wrap="square" anchor="ctr" lIns="0" rIns="0" tIns="0" bIns="0">
+            <a:spAutoFit/>
+          </a:bodyPr>
+          <a:lstStyle/>
+          <a:p>
+            <a:pPr algn="l">
+              <a:spcAft>
+                <a:spcPts val="1800"/>
+              </a:spcAft>
+            </a:pPr>
+            <a:r>
+              <a:rPr sz="4000" b="0" i="1">
+                <a:solidFill>
+                  <a:srgbClr val="1C1B19"/>
+                </a:solidFill>
+                <a:latin typeface="Source Serif 4"/>
+              </a:rPr>
+              <a:t>What feeling shows up right before you put something off?</a:t>
+            </a:r>
+          </a:p>
+        </p:txBody>
+      </p:sp>
+      <p:sp>
+        <p:nvSpPr>
+          <p:cNvPr id="7" name="TextBox 6"/>
+          <p:cNvSpPr txBox="1"/>
+          <p:nvPr/>
+        </p:nvSpPr>
+        <p:spPr>
+          <a:xfrm>
+            <a:off x="1188720" y="5120640"/>
+            <a:ext cx="10058400" cy="914400"/>
           </a:xfrm>
           <a:prstGeom prst="rect">
             <a:avLst/>
@@ -8670,407 +9882,17 @@
           <a:p>
             <a:pPr algn="l">
               <a:spcAft>
-                <a:spcPts val="1620"/>
-              </a:spcAft>
-            </a:pPr>
-            <a:r>
-              <a:rPr sz="3600" b="1" i="0">
-                <a:solidFill>
-                  <a:srgbClr val="1C1B19"/>
-                </a:solidFill>
-                <a:latin typeface="Source Serif 4"/>
-              </a:rPr>
-              <a:t>Stand up if you think it's a fact.</a:t>
-            </a:r>
-          </a:p>
-        </p:txBody>
-      </p:sp>
-      <p:sp>
-        <p:nvSpPr>
-          <p:cNvPr id="6" name="TextBox 5"/>
-          <p:cNvSpPr txBox="1"/>
-          <p:nvPr/>
-        </p:nvSpPr>
-        <p:spPr>
-          <a:xfrm>
-            <a:off x="822960" y="2057400"/>
-            <a:ext cx="548640" cy="804672"/>
-          </a:xfrm>
-          <a:prstGeom prst="rect">
-            <a:avLst/>
-          </a:prstGeom>
-          <a:noFill/>
-        </p:spPr>
-        <p:txBody>
-          <a:bodyPr wrap="square" anchor="t" lIns="0" rIns="0" tIns="0" bIns="0">
-            <a:spAutoFit/>
-          </a:bodyPr>
-          <a:lstStyle/>
-          <a:p>
-            <a:pPr algn="l">
-              <a:spcAft>
-                <a:spcPts val="1170"/>
-              </a:spcAft>
-            </a:pPr>
-            <a:r>
-              <a:rPr sz="2600" b="1" i="0">
-                <a:solidFill>
-                  <a:srgbClr val="F47B20"/>
-                </a:solidFill>
-                <a:latin typeface="Source Serif 4"/>
-              </a:rPr>
-              <a:t>1</a:t>
-            </a:r>
-          </a:p>
-        </p:txBody>
-      </p:sp>
-      <p:sp>
-        <p:nvSpPr>
-          <p:cNvPr id="7" name="TextBox 6"/>
-          <p:cNvSpPr txBox="1"/>
-          <p:nvPr/>
-        </p:nvSpPr>
-        <p:spPr>
-          <a:xfrm>
-            <a:off x="1463040" y="2093976"/>
-            <a:ext cx="9875520" cy="804672"/>
-          </a:xfrm>
-          <a:prstGeom prst="rect">
-            <a:avLst/>
-          </a:prstGeom>
-          <a:noFill/>
-        </p:spPr>
-        <p:txBody>
-          <a:bodyPr wrap="square" anchor="t" lIns="0" rIns="0" tIns="0" bIns="0">
-            <a:spAutoFit/>
-          </a:bodyPr>
-          <a:lstStyle/>
-          <a:p>
-            <a:pPr algn="l">
-              <a:spcAft>
-                <a:spcPts val="945"/>
-              </a:spcAft>
-            </a:pPr>
-            <a:r>
-              <a:rPr sz="2100" b="1" i="0">
-                <a:solidFill>
-                  <a:srgbClr val="1C1B19"/>
-                </a:solidFill>
-                <a:latin typeface="Source Serif 4"/>
-              </a:rPr>
-              <a:t>You need to feel motivated before you can start.</a:t>
-            </a:r>
-          </a:p>
-        </p:txBody>
-      </p:sp>
-      <p:sp>
-        <p:nvSpPr>
-          <p:cNvPr id="8" name="TextBox 7"/>
-          <p:cNvSpPr txBox="1"/>
-          <p:nvPr/>
-        </p:nvSpPr>
-        <p:spPr>
-          <a:xfrm>
-            <a:off x="822960" y="2862072"/>
-            <a:ext cx="548640" cy="804672"/>
-          </a:xfrm>
-          <a:prstGeom prst="rect">
-            <a:avLst/>
-          </a:prstGeom>
-          <a:noFill/>
-        </p:spPr>
-        <p:txBody>
-          <a:bodyPr wrap="square" anchor="t" lIns="0" rIns="0" tIns="0" bIns="0">
-            <a:spAutoFit/>
-          </a:bodyPr>
-          <a:lstStyle/>
-          <a:p>
-            <a:pPr algn="l">
-              <a:spcAft>
-                <a:spcPts val="1170"/>
-              </a:spcAft>
-            </a:pPr>
-            <a:r>
-              <a:rPr sz="2600" b="1" i="0">
-                <a:solidFill>
-                  <a:srgbClr val="F47B20"/>
-                </a:solidFill>
-                <a:latin typeface="Source Serif 4"/>
-              </a:rPr>
-              <a:t>2</a:t>
-            </a:r>
-          </a:p>
-        </p:txBody>
-      </p:sp>
-      <p:sp>
-        <p:nvSpPr>
-          <p:cNvPr id="9" name="TextBox 8"/>
-          <p:cNvSpPr txBox="1"/>
-          <p:nvPr/>
-        </p:nvSpPr>
-        <p:spPr>
-          <a:xfrm>
-            <a:off x="1463040" y="2898648"/>
-            <a:ext cx="9875520" cy="804672"/>
-          </a:xfrm>
-          <a:prstGeom prst="rect">
-            <a:avLst/>
-          </a:prstGeom>
-          <a:noFill/>
-        </p:spPr>
-        <p:txBody>
-          <a:bodyPr wrap="square" anchor="t" lIns="0" rIns="0" tIns="0" bIns="0">
-            <a:spAutoFit/>
-          </a:bodyPr>
-          <a:lstStyle/>
-          <a:p>
-            <a:pPr algn="l">
-              <a:spcAft>
-                <a:spcPts val="945"/>
-              </a:spcAft>
-            </a:pPr>
-            <a:r>
-              <a:rPr sz="2100" b="1" i="0">
-                <a:solidFill>
-                  <a:srgbClr val="1C1B19"/>
-                </a:solidFill>
-                <a:latin typeface="Source Serif 4"/>
-              </a:rPr>
-              <a:t>Some people really do work better under pressure.</a:t>
-            </a:r>
-          </a:p>
-        </p:txBody>
-      </p:sp>
-      <p:sp>
-        <p:nvSpPr>
-          <p:cNvPr id="10" name="TextBox 9"/>
-          <p:cNvSpPr txBox="1"/>
-          <p:nvPr/>
-        </p:nvSpPr>
-        <p:spPr>
-          <a:xfrm>
-            <a:off x="822960" y="3666744"/>
-            <a:ext cx="548640" cy="804672"/>
-          </a:xfrm>
-          <a:prstGeom prst="rect">
-            <a:avLst/>
-          </a:prstGeom>
-          <a:noFill/>
-        </p:spPr>
-        <p:txBody>
-          <a:bodyPr wrap="square" anchor="t" lIns="0" rIns="0" tIns="0" bIns="0">
-            <a:spAutoFit/>
-          </a:bodyPr>
-          <a:lstStyle/>
-          <a:p>
-            <a:pPr algn="l">
-              <a:spcAft>
-                <a:spcPts val="1170"/>
-              </a:spcAft>
-            </a:pPr>
-            <a:r>
-              <a:rPr sz="2600" b="1" i="0">
-                <a:solidFill>
-                  <a:srgbClr val="F47B20"/>
-                </a:solidFill>
-                <a:latin typeface="Source Serif 4"/>
-              </a:rPr>
-              <a:t>3</a:t>
-            </a:r>
-          </a:p>
-        </p:txBody>
-      </p:sp>
-      <p:sp>
-        <p:nvSpPr>
-          <p:cNvPr id="11" name="TextBox 10"/>
-          <p:cNvSpPr txBox="1"/>
-          <p:nvPr/>
-        </p:nvSpPr>
-        <p:spPr>
-          <a:xfrm>
-            <a:off x="1463040" y="3703320"/>
-            <a:ext cx="9875520" cy="804672"/>
-          </a:xfrm>
-          <a:prstGeom prst="rect">
-            <a:avLst/>
-          </a:prstGeom>
-          <a:noFill/>
-        </p:spPr>
-        <p:txBody>
-          <a:bodyPr wrap="square" anchor="t" lIns="0" rIns="0" tIns="0" bIns="0">
-            <a:spAutoFit/>
-          </a:bodyPr>
-          <a:lstStyle/>
-          <a:p>
-            <a:pPr algn="l">
-              <a:spcAft>
-                <a:spcPts val="945"/>
-              </a:spcAft>
-            </a:pPr>
-            <a:r>
-              <a:rPr sz="2100" b="1" i="0">
-                <a:solidFill>
-                  <a:srgbClr val="1C1B19"/>
-                </a:solidFill>
-                <a:latin typeface="Source Serif 4"/>
-              </a:rPr>
-              <a:t>Being hard on yourself helps you procrastinate less.</a:t>
-            </a:r>
-          </a:p>
-        </p:txBody>
-      </p:sp>
-      <p:sp>
-        <p:nvSpPr>
-          <p:cNvPr id="12" name="TextBox 11"/>
-          <p:cNvSpPr txBox="1"/>
-          <p:nvPr/>
-        </p:nvSpPr>
-        <p:spPr>
-          <a:xfrm>
-            <a:off x="822960" y="4471416"/>
-            <a:ext cx="548640" cy="804672"/>
-          </a:xfrm>
-          <a:prstGeom prst="rect">
-            <a:avLst/>
-          </a:prstGeom>
-          <a:noFill/>
-        </p:spPr>
-        <p:txBody>
-          <a:bodyPr wrap="square" anchor="t" lIns="0" rIns="0" tIns="0" bIns="0">
-            <a:spAutoFit/>
-          </a:bodyPr>
-          <a:lstStyle/>
-          <a:p>
-            <a:pPr algn="l">
-              <a:spcAft>
-                <a:spcPts val="1170"/>
-              </a:spcAft>
-            </a:pPr>
-            <a:r>
-              <a:rPr sz="2600" b="1" i="0">
-                <a:solidFill>
-                  <a:srgbClr val="F47B20"/>
-                </a:solidFill>
-                <a:latin typeface="Source Serif 4"/>
-              </a:rPr>
-              <a:t>4</a:t>
-            </a:r>
-          </a:p>
-        </p:txBody>
-      </p:sp>
-      <p:sp>
-        <p:nvSpPr>
-          <p:cNvPr id="13" name="TextBox 12"/>
-          <p:cNvSpPr txBox="1"/>
-          <p:nvPr/>
-        </p:nvSpPr>
-        <p:spPr>
-          <a:xfrm>
-            <a:off x="1463040" y="4507992"/>
-            <a:ext cx="9875520" cy="804672"/>
-          </a:xfrm>
-          <a:prstGeom prst="rect">
-            <a:avLst/>
-          </a:prstGeom>
-          <a:noFill/>
-        </p:spPr>
-        <p:txBody>
-          <a:bodyPr wrap="square" anchor="t" lIns="0" rIns="0" tIns="0" bIns="0">
-            <a:spAutoFit/>
-          </a:bodyPr>
-          <a:lstStyle/>
-          <a:p>
-            <a:pPr algn="l">
-              <a:spcAft>
-                <a:spcPts val="945"/>
-              </a:spcAft>
-            </a:pPr>
-            <a:r>
-              <a:rPr sz="2100" b="1" i="0">
-                <a:solidFill>
-                  <a:srgbClr val="1C1B19"/>
-                </a:solidFill>
-                <a:latin typeface="Source Serif 4"/>
-              </a:rPr>
-              <a:t>A phone face down on your desk still costs you focus.</a:t>
-            </a:r>
-          </a:p>
-        </p:txBody>
-      </p:sp>
-      <p:sp>
-        <p:nvSpPr>
-          <p:cNvPr id="14" name="TextBox 13"/>
-          <p:cNvSpPr txBox="1"/>
-          <p:nvPr/>
-        </p:nvSpPr>
-        <p:spPr>
-          <a:xfrm>
-            <a:off x="822960" y="5276088"/>
-            <a:ext cx="548640" cy="804672"/>
-          </a:xfrm>
-          <a:prstGeom prst="rect">
-            <a:avLst/>
-          </a:prstGeom>
-          <a:noFill/>
-        </p:spPr>
-        <p:txBody>
-          <a:bodyPr wrap="square" anchor="t" lIns="0" rIns="0" tIns="0" bIns="0">
-            <a:spAutoFit/>
-          </a:bodyPr>
-          <a:lstStyle/>
-          <a:p>
-            <a:pPr algn="l">
-              <a:spcAft>
-                <a:spcPts val="1170"/>
-              </a:spcAft>
-            </a:pPr>
-            <a:r>
-              <a:rPr sz="2600" b="1" i="0">
-                <a:solidFill>
-                  <a:srgbClr val="F47B20"/>
-                </a:solidFill>
-                <a:latin typeface="Source Serif 4"/>
-              </a:rPr>
-              <a:t>5</a:t>
-            </a:r>
-          </a:p>
-        </p:txBody>
-      </p:sp>
-      <p:sp>
-        <p:nvSpPr>
-          <p:cNvPr id="15" name="TextBox 14"/>
-          <p:cNvSpPr txBox="1"/>
-          <p:nvPr/>
-        </p:nvSpPr>
-        <p:spPr>
-          <a:xfrm>
-            <a:off x="1463040" y="5312664"/>
-            <a:ext cx="9875520" cy="804672"/>
-          </a:xfrm>
-          <a:prstGeom prst="rect">
-            <a:avLst/>
-          </a:prstGeom>
-          <a:noFill/>
-        </p:spPr>
-        <p:txBody>
-          <a:bodyPr wrap="square" anchor="t" lIns="0" rIns="0" tIns="0" bIns="0">
-            <a:spAutoFit/>
-          </a:bodyPr>
-          <a:lstStyle/>
-          <a:p>
-            <a:pPr algn="l">
-              <a:spcAft>
-                <a:spcPts val="945"/>
-              </a:spcAft>
-            </a:pPr>
-            <a:r>
-              <a:rPr sz="2100" b="1" i="0">
-                <a:solidFill>
-                  <a:srgbClr val="1C1B19"/>
-                </a:solidFill>
-                <a:latin typeface="Source Serif 4"/>
-              </a:rPr>
-              <a:t>Deciding when and where you'll start makes you likelier to do it.</a:t>
+                <a:spcPts val="810"/>
+              </a:spcAft>
+            </a:pPr>
+            <a:r>
+              <a:rPr sz="1800" b="0" i="0">
+                <a:solidFill>
+                  <a:srgbClr val="5D5A54"/>
+                </a:solidFill>
+                <a:latin typeface="Inter Tight"/>
+              </a:rPr>
+              <a:t>One per card. No names. Be specific.</a:t>
             </a:r>
           </a:p>
         </p:txBody>
@@ -9179,7 +10001,7 @@
                 </a:solidFill>
                 <a:latin typeface="Inter Tight"/>
               </a:rPr>
-              <a:t>MYTH OR FACT?</a:t>
+              <a:t>"I WORK BETTER UNDER PRESSURE"</a:t>
             </a:r>
           </a:p>
         </p:txBody>
@@ -9231,7 +10053,46 @@
         </p:nvSpPr>
         <p:spPr>
           <a:xfrm>
-            <a:off x="822960" y="1005840"/>
+            <a:off x="822960" y="1463040"/>
+            <a:ext cx="10515600" cy="3291840"/>
+          </a:xfrm>
+          <a:prstGeom prst="rect">
+            <a:avLst/>
+          </a:prstGeom>
+          <a:noFill/>
+        </p:spPr>
+        <p:txBody>
+          <a:bodyPr wrap="square" anchor="ctr" lIns="0" rIns="0" tIns="0" bIns="0">
+            <a:spAutoFit/>
+          </a:bodyPr>
+          <a:lstStyle/>
+          <a:p>
+            <a:pPr algn="l">
+              <a:spcAft>
+                <a:spcPts val="2070"/>
+              </a:spcAft>
+            </a:pPr>
+            <a:r>
+              <a:rPr sz="4600" b="1" i="0">
+                <a:solidFill>
+                  <a:srgbClr val="1C1B19"/>
+                </a:solidFill>
+                <a:latin typeface="Source Serif 4"/>
+              </a:rPr>
+              <a:t>The pressure felt productive. It wasn't.</a:t>
+            </a:r>
+          </a:p>
+        </p:txBody>
+      </p:sp>
+      <p:sp>
+        <p:nvSpPr>
+          <p:cNvPr id="6" name="TextBox 5"/>
+          <p:cNvSpPr txBox="1"/>
+          <p:nvPr/>
+        </p:nvSpPr>
+        <p:spPr>
+          <a:xfrm>
+            <a:off x="822960" y="4846320"/>
             <a:ext cx="10515600" cy="1097280"/>
           </a:xfrm>
           <a:prstGeom prst="rect">
@@ -9247,487 +10108,17 @@
           <a:p>
             <a:pPr algn="l">
               <a:spcAft>
-                <a:spcPts val="1620"/>
-              </a:spcAft>
-            </a:pPr>
-            <a:r>
-              <a:rPr sz="3600" b="1" i="0">
-                <a:solidFill>
-                  <a:srgbClr val="1C1B19"/>
-                </a:solidFill>
-                <a:latin typeface="Source Serif 4"/>
-              </a:rPr>
-              <a:t>The answers</a:t>
-            </a:r>
-          </a:p>
-        </p:txBody>
-      </p:sp>
-      <p:sp>
-        <p:nvSpPr>
-          <p:cNvPr id="6" name="TextBox 5"/>
-          <p:cNvSpPr txBox="1"/>
-          <p:nvPr/>
-        </p:nvSpPr>
-        <p:spPr>
-          <a:xfrm>
-            <a:off x="822960" y="2057400"/>
-            <a:ext cx="548640" cy="804672"/>
-          </a:xfrm>
-          <a:prstGeom prst="rect">
-            <a:avLst/>
-          </a:prstGeom>
-          <a:noFill/>
-        </p:spPr>
-        <p:txBody>
-          <a:bodyPr wrap="square" anchor="t" lIns="0" rIns="0" tIns="0" bIns="0">
-            <a:spAutoFit/>
-          </a:bodyPr>
-          <a:lstStyle/>
-          <a:p>
-            <a:pPr algn="l">
-              <a:spcAft>
-                <a:spcPts val="1170"/>
-              </a:spcAft>
-            </a:pPr>
-            <a:r>
-              <a:rPr sz="2600" b="1" i="0">
-                <a:solidFill>
-                  <a:srgbClr val="F47B20"/>
-                </a:solidFill>
-                <a:latin typeface="Source Serif 4"/>
-              </a:rPr>
-              <a:t>1</a:t>
-            </a:r>
-          </a:p>
-        </p:txBody>
-      </p:sp>
-      <p:sp>
-        <p:nvSpPr>
-          <p:cNvPr id="7" name="TextBox 6"/>
-          <p:cNvSpPr txBox="1"/>
-          <p:nvPr/>
-        </p:nvSpPr>
-        <p:spPr>
-          <a:xfrm>
-            <a:off x="1463040" y="2093976"/>
-            <a:ext cx="9875520" cy="804672"/>
-          </a:xfrm>
-          <a:prstGeom prst="rect">
-            <a:avLst/>
-          </a:prstGeom>
-          <a:noFill/>
-        </p:spPr>
-        <p:txBody>
-          <a:bodyPr wrap="square" anchor="t" lIns="0" rIns="0" tIns="0" bIns="0">
-            <a:spAutoFit/>
-          </a:bodyPr>
-          <a:lstStyle/>
-          <a:p>
-            <a:pPr algn="l">
-              <a:spcAft>
-                <a:spcPts val="945"/>
-              </a:spcAft>
-            </a:pPr>
-            <a:r>
-              <a:rPr sz="2100" b="1" i="0">
-                <a:solidFill>
-                  <a:srgbClr val="1C1B19"/>
-                </a:solidFill>
-                <a:latin typeface="Source Serif 4"/>
-              </a:rPr>
-              <a:t>Myth.</a:t>
-            </a:r>
-          </a:p>
-          <a:p>
-            <a:pPr algn="l">
-              <a:spcAft>
-                <a:spcPts val="945"/>
-              </a:spcAft>
-            </a:pPr>
-            <a:r>
-              <a:rPr sz="1600" b="0" i="0">
+                <a:spcPts val="990"/>
+              </a:spcAft>
+            </a:pPr>
+            <a:r>
+              <a:rPr sz="2200" b="0" i="1">
                 <a:solidFill>
                   <a:srgbClr val="5D5A54"/>
                 </a:solidFill>
                 <a:latin typeface="Source Serif 4"/>
               </a:rPr>
-              <a:t>Motivation usually follows action. Starting brings the feeling.</a:t>
-            </a:r>
-          </a:p>
-        </p:txBody>
-      </p:sp>
-      <p:sp>
-        <p:nvSpPr>
-          <p:cNvPr id="8" name="TextBox 7"/>
-          <p:cNvSpPr txBox="1"/>
-          <p:nvPr/>
-        </p:nvSpPr>
-        <p:spPr>
-          <a:xfrm>
-            <a:off x="822960" y="2862072"/>
-            <a:ext cx="548640" cy="804672"/>
-          </a:xfrm>
-          <a:prstGeom prst="rect">
-            <a:avLst/>
-          </a:prstGeom>
-          <a:noFill/>
-        </p:spPr>
-        <p:txBody>
-          <a:bodyPr wrap="square" anchor="t" lIns="0" rIns="0" tIns="0" bIns="0">
-            <a:spAutoFit/>
-          </a:bodyPr>
-          <a:lstStyle/>
-          <a:p>
-            <a:pPr algn="l">
-              <a:spcAft>
-                <a:spcPts val="1170"/>
-              </a:spcAft>
-            </a:pPr>
-            <a:r>
-              <a:rPr sz="2600" b="1" i="0">
-                <a:solidFill>
-                  <a:srgbClr val="F47B20"/>
-                </a:solidFill>
-                <a:latin typeface="Source Serif 4"/>
-              </a:rPr>
-              <a:t>2</a:t>
-            </a:r>
-          </a:p>
-        </p:txBody>
-      </p:sp>
-      <p:sp>
-        <p:nvSpPr>
-          <p:cNvPr id="9" name="TextBox 8"/>
-          <p:cNvSpPr txBox="1"/>
-          <p:nvPr/>
-        </p:nvSpPr>
-        <p:spPr>
-          <a:xfrm>
-            <a:off x="1463040" y="2898648"/>
-            <a:ext cx="9875520" cy="804672"/>
-          </a:xfrm>
-          <a:prstGeom prst="rect">
-            <a:avLst/>
-          </a:prstGeom>
-          <a:noFill/>
-        </p:spPr>
-        <p:txBody>
-          <a:bodyPr wrap="square" anchor="t" lIns="0" rIns="0" tIns="0" bIns="0">
-            <a:spAutoFit/>
-          </a:bodyPr>
-          <a:lstStyle/>
-          <a:p>
-            <a:pPr algn="l">
-              <a:spcAft>
-                <a:spcPts val="945"/>
-              </a:spcAft>
-            </a:pPr>
-            <a:r>
-              <a:rPr sz="2100" b="1" i="0">
-                <a:solidFill>
-                  <a:srgbClr val="1C1B19"/>
-                </a:solidFill>
-                <a:latin typeface="Source Serif 4"/>
-              </a:rPr>
-              <a:t>Mostly myth.</a:t>
-            </a:r>
-          </a:p>
-          <a:p>
-            <a:pPr algn="l">
-              <a:spcAft>
-                <a:spcPts val="945"/>
-              </a:spcAft>
-            </a:pPr>
-            <a:r>
-              <a:rPr sz="1600" b="0" i="0">
-                <a:solidFill>
-                  <a:srgbClr val="5D5A54"/>
-                </a:solidFill>
-                <a:latin typeface="Source Serif 4"/>
-              </a:rPr>
-              <a:t>Pressure feels productive. We'll look at what happened.</a:t>
-            </a:r>
-          </a:p>
-        </p:txBody>
-      </p:sp>
-      <p:sp>
-        <p:nvSpPr>
-          <p:cNvPr id="10" name="TextBox 9"/>
-          <p:cNvSpPr txBox="1"/>
-          <p:nvPr/>
-        </p:nvSpPr>
-        <p:spPr>
-          <a:xfrm>
-            <a:off x="822960" y="3666744"/>
-            <a:ext cx="548640" cy="804672"/>
-          </a:xfrm>
-          <a:prstGeom prst="rect">
-            <a:avLst/>
-          </a:prstGeom>
-          <a:noFill/>
-        </p:spPr>
-        <p:txBody>
-          <a:bodyPr wrap="square" anchor="t" lIns="0" rIns="0" tIns="0" bIns="0">
-            <a:spAutoFit/>
-          </a:bodyPr>
-          <a:lstStyle/>
-          <a:p>
-            <a:pPr algn="l">
-              <a:spcAft>
-                <a:spcPts val="1170"/>
-              </a:spcAft>
-            </a:pPr>
-            <a:r>
-              <a:rPr sz="2600" b="1" i="0">
-                <a:solidFill>
-                  <a:srgbClr val="F47B20"/>
-                </a:solidFill>
-                <a:latin typeface="Source Serif 4"/>
-              </a:rPr>
-              <a:t>3</a:t>
-            </a:r>
-          </a:p>
-        </p:txBody>
-      </p:sp>
-      <p:sp>
-        <p:nvSpPr>
-          <p:cNvPr id="11" name="TextBox 10"/>
-          <p:cNvSpPr txBox="1"/>
-          <p:nvPr/>
-        </p:nvSpPr>
-        <p:spPr>
-          <a:xfrm>
-            <a:off x="1463040" y="3703320"/>
-            <a:ext cx="9875520" cy="804672"/>
-          </a:xfrm>
-          <a:prstGeom prst="rect">
-            <a:avLst/>
-          </a:prstGeom>
-          <a:noFill/>
-        </p:spPr>
-        <p:txBody>
-          <a:bodyPr wrap="square" anchor="t" lIns="0" rIns="0" tIns="0" bIns="0">
-            <a:spAutoFit/>
-          </a:bodyPr>
-          <a:lstStyle/>
-          <a:p>
-            <a:pPr algn="l">
-              <a:spcAft>
-                <a:spcPts val="945"/>
-              </a:spcAft>
-            </a:pPr>
-            <a:r>
-              <a:rPr sz="2100" b="1" i="0">
-                <a:solidFill>
-                  <a:srgbClr val="1C1B19"/>
-                </a:solidFill>
-                <a:latin typeface="Source Serif 4"/>
-              </a:rPr>
-              <a:t>Myth.</a:t>
-            </a:r>
-          </a:p>
-          <a:p>
-            <a:pPr algn="l">
-              <a:spcAft>
-                <a:spcPts val="945"/>
-              </a:spcAft>
-            </a:pPr>
-            <a:r>
-              <a:rPr sz="1600" b="0" i="0">
-                <a:solidFill>
-                  <a:srgbClr val="5D5A54"/>
-                </a:solidFill>
-                <a:latin typeface="Source Serif 4"/>
-              </a:rPr>
-              <a:t>Students who forgave themselves procrastinated less next time.</a:t>
-            </a:r>
-          </a:p>
-        </p:txBody>
-      </p:sp>
-      <p:sp>
-        <p:nvSpPr>
-          <p:cNvPr id="12" name="TextBox 11"/>
-          <p:cNvSpPr txBox="1"/>
-          <p:nvPr/>
-        </p:nvSpPr>
-        <p:spPr>
-          <a:xfrm>
-            <a:off x="822960" y="4471416"/>
-            <a:ext cx="548640" cy="804672"/>
-          </a:xfrm>
-          <a:prstGeom prst="rect">
-            <a:avLst/>
-          </a:prstGeom>
-          <a:noFill/>
-        </p:spPr>
-        <p:txBody>
-          <a:bodyPr wrap="square" anchor="t" lIns="0" rIns="0" tIns="0" bIns="0">
-            <a:spAutoFit/>
-          </a:bodyPr>
-          <a:lstStyle/>
-          <a:p>
-            <a:pPr algn="l">
-              <a:spcAft>
-                <a:spcPts val="1170"/>
-              </a:spcAft>
-            </a:pPr>
-            <a:r>
-              <a:rPr sz="2600" b="1" i="0">
-                <a:solidFill>
-                  <a:srgbClr val="F47B20"/>
-                </a:solidFill>
-                <a:latin typeface="Source Serif 4"/>
-              </a:rPr>
-              <a:t>4</a:t>
-            </a:r>
-          </a:p>
-        </p:txBody>
-      </p:sp>
-      <p:sp>
-        <p:nvSpPr>
-          <p:cNvPr id="13" name="TextBox 12"/>
-          <p:cNvSpPr txBox="1"/>
-          <p:nvPr/>
-        </p:nvSpPr>
-        <p:spPr>
-          <a:xfrm>
-            <a:off x="1463040" y="4507992"/>
-            <a:ext cx="9875520" cy="804672"/>
-          </a:xfrm>
-          <a:prstGeom prst="rect">
-            <a:avLst/>
-          </a:prstGeom>
-          <a:noFill/>
-        </p:spPr>
-        <p:txBody>
-          <a:bodyPr wrap="square" anchor="t" lIns="0" rIns="0" tIns="0" bIns="0">
-            <a:spAutoFit/>
-          </a:bodyPr>
-          <a:lstStyle/>
-          <a:p>
-            <a:pPr algn="l">
-              <a:spcAft>
-                <a:spcPts val="945"/>
-              </a:spcAft>
-            </a:pPr>
-            <a:r>
-              <a:rPr sz="2100" b="1" i="0">
-                <a:solidFill>
-                  <a:srgbClr val="1C1B19"/>
-                </a:solidFill>
-                <a:latin typeface="Source Serif 4"/>
-              </a:rPr>
-              <a:t>Fact.</a:t>
-            </a:r>
-          </a:p>
-          <a:p>
-            <a:pPr algn="l">
-              <a:spcAft>
-                <a:spcPts val="945"/>
-              </a:spcAft>
-            </a:pPr>
-            <a:r>
-              <a:rPr sz="1600" b="0" i="0">
-                <a:solidFill>
-                  <a:srgbClr val="5D5A54"/>
-                </a:solidFill>
-                <a:latin typeface="Source Serif 4"/>
-              </a:rPr>
-              <a:t>Part of your brain spends effort not checking it.</a:t>
-            </a:r>
-          </a:p>
-        </p:txBody>
-      </p:sp>
-      <p:sp>
-        <p:nvSpPr>
-          <p:cNvPr id="14" name="TextBox 13"/>
-          <p:cNvSpPr txBox="1"/>
-          <p:nvPr/>
-        </p:nvSpPr>
-        <p:spPr>
-          <a:xfrm>
-            <a:off x="822960" y="5276088"/>
-            <a:ext cx="548640" cy="804672"/>
-          </a:xfrm>
-          <a:prstGeom prst="rect">
-            <a:avLst/>
-          </a:prstGeom>
-          <a:noFill/>
-        </p:spPr>
-        <p:txBody>
-          <a:bodyPr wrap="square" anchor="t" lIns="0" rIns="0" tIns="0" bIns="0">
-            <a:spAutoFit/>
-          </a:bodyPr>
-          <a:lstStyle/>
-          <a:p>
-            <a:pPr algn="l">
-              <a:spcAft>
-                <a:spcPts val="1170"/>
-              </a:spcAft>
-            </a:pPr>
-            <a:r>
-              <a:rPr sz="2600" b="1" i="0">
-                <a:solidFill>
-                  <a:srgbClr val="F47B20"/>
-                </a:solidFill>
-                <a:latin typeface="Source Serif 4"/>
-              </a:rPr>
-              <a:t>5</a:t>
-            </a:r>
-          </a:p>
-        </p:txBody>
-      </p:sp>
-      <p:sp>
-        <p:nvSpPr>
-          <p:cNvPr id="15" name="TextBox 14"/>
-          <p:cNvSpPr txBox="1"/>
-          <p:nvPr/>
-        </p:nvSpPr>
-        <p:spPr>
-          <a:xfrm>
-            <a:off x="1463040" y="5312664"/>
-            <a:ext cx="9875520" cy="804672"/>
-          </a:xfrm>
-          <a:prstGeom prst="rect">
-            <a:avLst/>
-          </a:prstGeom>
-          <a:noFill/>
-        </p:spPr>
-        <p:txBody>
-          <a:bodyPr wrap="square" anchor="t" lIns="0" rIns="0" tIns="0" bIns="0">
-            <a:spAutoFit/>
-          </a:bodyPr>
-          <a:lstStyle/>
-          <a:p>
-            <a:pPr algn="l">
-              <a:spcAft>
-                <a:spcPts val="945"/>
-              </a:spcAft>
-            </a:pPr>
-            <a:r>
-              <a:rPr sz="2100" b="1" i="0">
-                <a:solidFill>
-                  <a:srgbClr val="1C1B19"/>
-                </a:solidFill>
-                <a:latin typeface="Source Serif 4"/>
-              </a:rPr>
-              <a:t>Fact.</a:t>
-            </a:r>
-          </a:p>
-          <a:p>
-            <a:pPr algn="l">
-              <a:spcAft>
-                <a:spcPts val="945"/>
-              </a:spcAft>
-            </a:pPr>
-            <a:r>
-              <a:rPr sz="1600" b="0" i="0">
-                <a:solidFill>
-                  <a:srgbClr val="5D5A54"/>
-                </a:solidFill>
-                <a:latin typeface="Source Serif 4"/>
-              </a:rPr>
-              <a:t>A review of 94 studies backs it. More on this later.</a:t>
+              <a:t>Procrastinators felt less stressed early in the semester. By the end they were more stressed, sicker, and had lower grades.</a:t>
             </a:r>
           </a:p>
         </p:txBody>
@@ -9836,7 +10227,7 @@
                 </a:solidFill>
                 <a:latin typeface="Inter Tight"/>
               </a:rPr>
-              <a:t>WHAT'S GOING ON</a:t>
+              <a:t>FOUR LEVERS</a:t>
             </a:r>
           </a:p>
         </p:txBody>
@@ -9889,7 +10280,7 @@
         <p:spPr>
           <a:xfrm>
             <a:off x="822960" y="1005840"/>
-            <a:ext cx="10515600" cy="914400"/>
+            <a:ext cx="10515600" cy="1097280"/>
           </a:xfrm>
           <a:prstGeom prst="rect">
             <a:avLst/>
@@ -9904,600 +10295,31 @@
           <a:p>
             <a:pPr algn="l">
               <a:spcAft>
-                <a:spcPts val="1530"/>
-              </a:spcAft>
-            </a:pPr>
-            <a:r>
-              <a:rPr sz="3400" b="1" i="0">
+                <a:spcPts val="1620"/>
+              </a:spcAft>
+            </a:pPr>
+            <a:r>
+              <a:rPr sz="3600" b="1" i="0">
                 <a:solidFill>
                   <a:srgbClr val="1C1B19"/>
                 </a:solidFill>
                 <a:latin typeface="Source Serif 4"/>
               </a:rPr>
-              <a:t>The avoidance loop</a:t>
-            </a:r>
-          </a:p>
-        </p:txBody>
-      </p:sp>
-      <p:sp>
-        <p:nvSpPr>
-          <p:cNvPr id="6" name="Rectangle 5"/>
-          <p:cNvSpPr/>
-          <p:nvPr/>
-        </p:nvSpPr>
-        <p:spPr>
-          <a:xfrm>
-            <a:off x="822960" y="2743200"/>
-            <a:ext cx="1874519" cy="1005840"/>
-          </a:xfrm>
-          <a:prstGeom prst="rect">
-            <a:avLst/>
-          </a:prstGeom>
-          <a:solidFill>
-            <a:srgbClr val="FFFFFF"/>
-          </a:solidFill>
-          <a:ln w="15875">
-            <a:solidFill>
-              <a:srgbClr val="0B2D5B"/>
-            </a:solidFill>
-          </a:ln>
-          <a:effectLst/>
-        </p:spPr>
-        <p:style>
-          <a:lnRef idx="1">
-            <a:schemeClr val="accent1"/>
-          </a:lnRef>
-          <a:fillRef idx="3">
-            <a:schemeClr val="accent1"/>
-          </a:fillRef>
-          <a:effectRef idx="2">
-            <a:schemeClr val="accent1"/>
-          </a:effectRef>
-          <a:fontRef idx="minor">
-            <a:schemeClr val="lt1"/>
-          </a:fontRef>
-        </p:style>
-        <p:txBody>
-          <a:bodyPr rtlCol="0" anchor="ctr"/>
-          <a:lstStyle/>
-          <a:p>
-            <a:pPr algn="ctr"/>
-          </a:p>
-        </p:txBody>
-      </p:sp>
-      <p:sp>
-        <p:nvSpPr>
-          <p:cNvPr id="7" name="TextBox 6"/>
+              <a:t>Where to push when you're stuck</a:t>
+            </a:r>
+          </a:p>
+        </p:txBody>
+      </p:sp>
+      <p:sp>
+        <p:nvSpPr>
+          <p:cNvPr id="6" name="TextBox 5"/>
           <p:cNvSpPr txBox="1"/>
           <p:nvPr/>
         </p:nvSpPr>
         <p:spPr>
           <a:xfrm>
-            <a:off x="822960" y="2743200"/>
-            <a:ext cx="1874519" cy="1005840"/>
-          </a:xfrm>
-          <a:prstGeom prst="rect">
-            <a:avLst/>
-          </a:prstGeom>
-          <a:noFill/>
-        </p:spPr>
-        <p:txBody>
-          <a:bodyPr wrap="square" anchor="ctr" lIns="0" rIns="0" tIns="0" bIns="0">
-            <a:spAutoFit/>
-          </a:bodyPr>
-          <a:lstStyle/>
-          <a:p>
-            <a:pPr algn="ctr">
-              <a:spcAft>
-                <a:spcPts val="900"/>
-              </a:spcAft>
-            </a:pPr>
-            <a:r>
-              <a:rPr sz="2000" b="1" i="0">
-                <a:solidFill>
-                  <a:srgbClr val="1C1B19"/>
-                </a:solidFill>
-                <a:latin typeface="Source Serif 4"/>
-              </a:rPr>
-              <a:t>Hard task</a:t>
-            </a:r>
-          </a:p>
-        </p:txBody>
-      </p:sp>
-      <p:cxnSp>
-        <p:nvCxnSpPr>
-          <p:cNvPr id="8" name="Connector 7"/>
-          <p:cNvCxnSpPr/>
-          <p:nvPr/>
-        </p:nvCxnSpPr>
-        <p:spPr>
-          <a:xfrm>
-            <a:off x="2752344" y="3246120"/>
-            <a:ext cx="176021" cy="0"/>
-          </a:xfrm>
-          <a:prstGeom prst="line">
-            <a:avLst/>
-          </a:prstGeom>
-          <a:ln w="31750">
-            <a:solidFill>
-              <a:srgbClr val="F47B20"/>
-            </a:solidFill>
-            <a:tailEnd type="triangle"/>
-          </a:ln>
-        </p:spPr>
-        <p:style>
-          <a:lnRef idx="2">
-            <a:schemeClr val="accent1"/>
-          </a:lnRef>
-          <a:fillRef idx="0">
-            <a:schemeClr val="accent1"/>
-          </a:fillRef>
-          <a:effectRef idx="1">
-            <a:schemeClr val="accent1"/>
-          </a:effectRef>
-          <a:fontRef idx="minor">
-            <a:schemeClr val="tx1"/>
-          </a:fontRef>
-        </p:style>
-      </p:cxnSp>
-      <p:sp>
-        <p:nvSpPr>
-          <p:cNvPr id="9" name="Rectangle 8"/>
-          <p:cNvSpPr/>
-          <p:nvPr/>
-        </p:nvSpPr>
-        <p:spPr>
-          <a:xfrm>
-            <a:off x="2983229" y="2743200"/>
-            <a:ext cx="1874519" cy="1005840"/>
-          </a:xfrm>
-          <a:prstGeom prst="rect">
-            <a:avLst/>
-          </a:prstGeom>
-          <a:solidFill>
-            <a:srgbClr val="FFFFFF"/>
-          </a:solidFill>
-          <a:ln w="15875">
-            <a:solidFill>
-              <a:srgbClr val="0B2D5B"/>
-            </a:solidFill>
-          </a:ln>
-          <a:effectLst/>
-        </p:spPr>
-        <p:style>
-          <a:lnRef idx="1">
-            <a:schemeClr val="accent1"/>
-          </a:lnRef>
-          <a:fillRef idx="3">
-            <a:schemeClr val="accent1"/>
-          </a:fillRef>
-          <a:effectRef idx="2">
-            <a:schemeClr val="accent1"/>
-          </a:effectRef>
-          <a:fontRef idx="minor">
-            <a:schemeClr val="lt1"/>
-          </a:fontRef>
-        </p:style>
-        <p:txBody>
-          <a:bodyPr rtlCol="0" anchor="ctr"/>
-          <a:lstStyle/>
-          <a:p>
-            <a:pPr algn="ctr"/>
-          </a:p>
-        </p:txBody>
-      </p:sp>
-      <p:sp>
-        <p:nvSpPr>
-          <p:cNvPr id="10" name="TextBox 9"/>
-          <p:cNvSpPr txBox="1"/>
-          <p:nvPr/>
-        </p:nvSpPr>
-        <p:spPr>
-          <a:xfrm>
-            <a:off x="2983229" y="2743200"/>
-            <a:ext cx="1874519" cy="1005840"/>
-          </a:xfrm>
-          <a:prstGeom prst="rect">
-            <a:avLst/>
-          </a:prstGeom>
-          <a:noFill/>
-        </p:spPr>
-        <p:txBody>
-          <a:bodyPr wrap="square" anchor="ctr" lIns="0" rIns="0" tIns="0" bIns="0">
-            <a:spAutoFit/>
-          </a:bodyPr>
-          <a:lstStyle/>
-          <a:p>
-            <a:pPr algn="ctr">
-              <a:spcAft>
-                <a:spcPts val="900"/>
-              </a:spcAft>
-            </a:pPr>
-            <a:r>
-              <a:rPr sz="2000" b="1" i="0">
-                <a:solidFill>
-                  <a:srgbClr val="1C1B19"/>
-                </a:solidFill>
-                <a:latin typeface="Source Serif 4"/>
-              </a:rPr>
-              <a:t>Bad feeling</a:t>
-            </a:r>
-          </a:p>
-        </p:txBody>
-      </p:sp>
-      <p:cxnSp>
-        <p:nvCxnSpPr>
-          <p:cNvPr id="11" name="Connector 10"/>
-          <p:cNvCxnSpPr/>
-          <p:nvPr/>
-        </p:nvCxnSpPr>
-        <p:spPr>
-          <a:xfrm>
-            <a:off x="4912614" y="3246120"/>
-            <a:ext cx="176022" cy="0"/>
-          </a:xfrm>
-          <a:prstGeom prst="line">
-            <a:avLst/>
-          </a:prstGeom>
-          <a:ln w="31750">
-            <a:solidFill>
-              <a:srgbClr val="F47B20"/>
-            </a:solidFill>
-            <a:tailEnd type="triangle"/>
-          </a:ln>
-        </p:spPr>
-        <p:style>
-          <a:lnRef idx="2">
-            <a:schemeClr val="accent1"/>
-          </a:lnRef>
-          <a:fillRef idx="0">
-            <a:schemeClr val="accent1"/>
-          </a:fillRef>
-          <a:effectRef idx="1">
-            <a:schemeClr val="accent1"/>
-          </a:effectRef>
-          <a:fontRef idx="minor">
-            <a:schemeClr val="tx1"/>
-          </a:fontRef>
-        </p:style>
-      </p:cxnSp>
-      <p:sp>
-        <p:nvSpPr>
-          <p:cNvPr id="12" name="Rectangle 11"/>
-          <p:cNvSpPr/>
-          <p:nvPr/>
-        </p:nvSpPr>
-        <p:spPr>
-          <a:xfrm>
-            <a:off x="5143500" y="2743200"/>
-            <a:ext cx="1874519" cy="1005840"/>
-          </a:xfrm>
-          <a:prstGeom prst="rect">
-            <a:avLst/>
-          </a:prstGeom>
-          <a:solidFill>
-            <a:srgbClr val="FFFFFF"/>
-          </a:solidFill>
-          <a:ln w="15875">
-            <a:solidFill>
-              <a:srgbClr val="0B2D5B"/>
-            </a:solidFill>
-          </a:ln>
-          <a:effectLst/>
-        </p:spPr>
-        <p:style>
-          <a:lnRef idx="1">
-            <a:schemeClr val="accent1"/>
-          </a:lnRef>
-          <a:fillRef idx="3">
-            <a:schemeClr val="accent1"/>
-          </a:fillRef>
-          <a:effectRef idx="2">
-            <a:schemeClr val="accent1"/>
-          </a:effectRef>
-          <a:fontRef idx="minor">
-            <a:schemeClr val="lt1"/>
-          </a:fontRef>
-        </p:style>
-        <p:txBody>
-          <a:bodyPr rtlCol="0" anchor="ctr"/>
-          <a:lstStyle/>
-          <a:p>
-            <a:pPr algn="ctr"/>
-          </a:p>
-        </p:txBody>
-      </p:sp>
-      <p:sp>
-        <p:nvSpPr>
-          <p:cNvPr id="13" name="TextBox 12"/>
-          <p:cNvSpPr txBox="1"/>
-          <p:nvPr/>
-        </p:nvSpPr>
-        <p:spPr>
-          <a:xfrm>
-            <a:off x="5143500" y="2743200"/>
-            <a:ext cx="1874519" cy="1005840"/>
-          </a:xfrm>
-          <a:prstGeom prst="rect">
-            <a:avLst/>
-          </a:prstGeom>
-          <a:noFill/>
-        </p:spPr>
-        <p:txBody>
-          <a:bodyPr wrap="square" anchor="ctr" lIns="0" rIns="0" tIns="0" bIns="0">
-            <a:spAutoFit/>
-          </a:bodyPr>
-          <a:lstStyle/>
-          <a:p>
-            <a:pPr algn="ctr">
-              <a:spcAft>
-                <a:spcPts val="900"/>
-              </a:spcAft>
-            </a:pPr>
-            <a:r>
-              <a:rPr sz="2000" b="1" i="0">
-                <a:solidFill>
-                  <a:srgbClr val="1C1B19"/>
-                </a:solidFill>
-                <a:latin typeface="Source Serif 4"/>
-              </a:rPr>
-              <a:t>Easy exit</a:t>
-            </a:r>
-          </a:p>
-        </p:txBody>
-      </p:sp>
-      <p:cxnSp>
-        <p:nvCxnSpPr>
-          <p:cNvPr id="14" name="Connector 13"/>
-          <p:cNvCxnSpPr/>
-          <p:nvPr/>
-        </p:nvCxnSpPr>
-        <p:spPr>
-          <a:xfrm>
-            <a:off x="7072883" y="3246120"/>
-            <a:ext cx="176023" cy="0"/>
-          </a:xfrm>
-          <a:prstGeom prst="line">
-            <a:avLst/>
-          </a:prstGeom>
-          <a:ln w="31750">
-            <a:solidFill>
-              <a:srgbClr val="F47B20"/>
-            </a:solidFill>
-            <a:tailEnd type="triangle"/>
-          </a:ln>
-        </p:spPr>
-        <p:style>
-          <a:lnRef idx="2">
-            <a:schemeClr val="accent1"/>
-          </a:lnRef>
-          <a:fillRef idx="0">
-            <a:schemeClr val="accent1"/>
-          </a:fillRef>
-          <a:effectRef idx="1">
-            <a:schemeClr val="accent1"/>
-          </a:effectRef>
-          <a:fontRef idx="minor">
-            <a:schemeClr val="tx1"/>
-          </a:fontRef>
-        </p:style>
-      </p:cxnSp>
-      <p:sp>
-        <p:nvSpPr>
-          <p:cNvPr id="15" name="Rectangle 14"/>
-          <p:cNvSpPr/>
-          <p:nvPr/>
-        </p:nvSpPr>
-        <p:spPr>
-          <a:xfrm>
-            <a:off x="7303770" y="2743200"/>
-            <a:ext cx="1874519" cy="1005840"/>
-          </a:xfrm>
-          <a:prstGeom prst="rect">
-            <a:avLst/>
-          </a:prstGeom>
-          <a:solidFill>
-            <a:srgbClr val="FFFFFF"/>
-          </a:solidFill>
-          <a:ln w="15875">
-            <a:solidFill>
-              <a:srgbClr val="0B2D5B"/>
-            </a:solidFill>
-          </a:ln>
-          <a:effectLst/>
-        </p:spPr>
-        <p:style>
-          <a:lnRef idx="1">
-            <a:schemeClr val="accent1"/>
-          </a:lnRef>
-          <a:fillRef idx="3">
-            <a:schemeClr val="accent1"/>
-          </a:fillRef>
-          <a:effectRef idx="2">
-            <a:schemeClr val="accent1"/>
-          </a:effectRef>
-          <a:fontRef idx="minor">
-            <a:schemeClr val="lt1"/>
-          </a:fontRef>
-        </p:style>
-        <p:txBody>
-          <a:bodyPr rtlCol="0" anchor="ctr"/>
-          <a:lstStyle/>
-          <a:p>
-            <a:pPr algn="ctr"/>
-          </a:p>
-        </p:txBody>
-      </p:sp>
-      <p:sp>
-        <p:nvSpPr>
-          <p:cNvPr id="16" name="TextBox 15"/>
-          <p:cNvSpPr txBox="1"/>
-          <p:nvPr/>
-        </p:nvSpPr>
-        <p:spPr>
-          <a:xfrm>
-            <a:off x="7303770" y="2743200"/>
-            <a:ext cx="1874519" cy="1005840"/>
-          </a:xfrm>
-          <a:prstGeom prst="rect">
-            <a:avLst/>
-          </a:prstGeom>
-          <a:noFill/>
-        </p:spPr>
-        <p:txBody>
-          <a:bodyPr wrap="square" anchor="ctr" lIns="0" rIns="0" tIns="0" bIns="0">
-            <a:spAutoFit/>
-          </a:bodyPr>
-          <a:lstStyle/>
-          <a:p>
-            <a:pPr algn="ctr">
-              <a:spcAft>
-                <a:spcPts val="900"/>
-              </a:spcAft>
-            </a:pPr>
-            <a:r>
-              <a:rPr sz="2000" b="1" i="0">
-                <a:solidFill>
-                  <a:srgbClr val="1C1B19"/>
-                </a:solidFill>
-                <a:latin typeface="Source Serif 4"/>
-              </a:rPr>
-              <a:t>Quick relief</a:t>
-            </a:r>
-          </a:p>
-        </p:txBody>
-      </p:sp>
-      <p:cxnSp>
-        <p:nvCxnSpPr>
-          <p:cNvPr id="17" name="Connector 16"/>
-          <p:cNvCxnSpPr/>
-          <p:nvPr/>
-        </p:nvCxnSpPr>
-        <p:spPr>
-          <a:xfrm>
-            <a:off x="9233154" y="3246120"/>
-            <a:ext cx="176022" cy="0"/>
-          </a:xfrm>
-          <a:prstGeom prst="line">
-            <a:avLst/>
-          </a:prstGeom>
-          <a:ln w="31750">
-            <a:solidFill>
-              <a:srgbClr val="F47B20"/>
-            </a:solidFill>
-            <a:tailEnd type="triangle"/>
-          </a:ln>
-        </p:spPr>
-        <p:style>
-          <a:lnRef idx="2">
-            <a:schemeClr val="accent1"/>
-          </a:lnRef>
-          <a:fillRef idx="0">
-            <a:schemeClr val="accent1"/>
-          </a:fillRef>
-          <a:effectRef idx="1">
-            <a:schemeClr val="accent1"/>
-          </a:effectRef>
-          <a:fontRef idx="minor">
-            <a:schemeClr val="tx1"/>
-          </a:fontRef>
-        </p:style>
-      </p:cxnSp>
-      <p:sp>
-        <p:nvSpPr>
-          <p:cNvPr id="18" name="Rectangle 17"/>
-          <p:cNvSpPr/>
-          <p:nvPr/>
-        </p:nvSpPr>
-        <p:spPr>
-          <a:xfrm>
-            <a:off x="9464040" y="2743200"/>
-            <a:ext cx="1874519" cy="1005840"/>
-          </a:xfrm>
-          <a:prstGeom prst="rect">
-            <a:avLst/>
-          </a:prstGeom>
-          <a:solidFill>
-            <a:srgbClr val="FFFFFF"/>
-          </a:solidFill>
-          <a:ln w="15875">
-            <a:solidFill>
-              <a:srgbClr val="0B2D5B"/>
-            </a:solidFill>
-          </a:ln>
-          <a:effectLst/>
-        </p:spPr>
-        <p:style>
-          <a:lnRef idx="1">
-            <a:schemeClr val="accent1"/>
-          </a:lnRef>
-          <a:fillRef idx="3">
-            <a:schemeClr val="accent1"/>
-          </a:fillRef>
-          <a:effectRef idx="2">
-            <a:schemeClr val="accent1"/>
-          </a:effectRef>
-          <a:fontRef idx="minor">
-            <a:schemeClr val="lt1"/>
-          </a:fontRef>
-        </p:style>
-        <p:txBody>
-          <a:bodyPr rtlCol="0" anchor="ctr"/>
-          <a:lstStyle/>
-          <a:p>
-            <a:pPr algn="ctr"/>
-          </a:p>
-        </p:txBody>
-      </p:sp>
-      <p:sp>
-        <p:nvSpPr>
-          <p:cNvPr id="19" name="TextBox 18"/>
-          <p:cNvSpPr txBox="1"/>
-          <p:nvPr/>
-        </p:nvSpPr>
-        <p:spPr>
-          <a:xfrm>
-            <a:off x="9464040" y="2743200"/>
-            <a:ext cx="1874519" cy="1005840"/>
-          </a:xfrm>
-          <a:prstGeom prst="rect">
-            <a:avLst/>
-          </a:prstGeom>
-          <a:noFill/>
-        </p:spPr>
-        <p:txBody>
-          <a:bodyPr wrap="square" anchor="ctr" lIns="0" rIns="0" tIns="0" bIns="0">
-            <a:spAutoFit/>
-          </a:bodyPr>
-          <a:lstStyle/>
-          <a:p>
-            <a:pPr algn="ctr">
-              <a:spcAft>
-                <a:spcPts val="900"/>
-              </a:spcAft>
-            </a:pPr>
-            <a:r>
-              <a:rPr sz="2000" b="1" i="0">
-                <a:solidFill>
-                  <a:srgbClr val="1C1B19"/>
-                </a:solidFill>
-                <a:latin typeface="Source Serif 4"/>
-              </a:rPr>
-              <a:t>Task still there</a:t>
-            </a:r>
-          </a:p>
-        </p:txBody>
-      </p:sp>
-      <p:sp>
-        <p:nvSpPr>
-          <p:cNvPr id="20" name="TextBox 19"/>
-          <p:cNvSpPr txBox="1"/>
-          <p:nvPr/>
-        </p:nvSpPr>
-        <p:spPr>
-          <a:xfrm>
-            <a:off x="822960" y="4160520"/>
-            <a:ext cx="10515600" cy="457200"/>
+            <a:off x="822960" y="2194560"/>
+            <a:ext cx="548640" cy="1005840"/>
           </a:xfrm>
           <a:prstGeom prst="rect">
             <a:avLst/>
@@ -10510,33 +10332,33 @@
           </a:bodyPr>
           <a:lstStyle/>
           <a:p>
-            <a:pPr algn="ctr">
-              <a:spcAft>
-                <a:spcPts val="810"/>
-              </a:spcAft>
-            </a:pPr>
-            <a:r>
-              <a:rPr sz="1800" b="1" i="0">
+            <a:pPr algn="l">
+              <a:spcAft>
+                <a:spcPts val="1170"/>
+              </a:spcAft>
+            </a:pPr>
+            <a:r>
+              <a:rPr sz="2600" b="1" i="0">
                 <a:solidFill>
                   <a:srgbClr val="F47B20"/>
                 </a:solidFill>
-                <a:latin typeface="Inter Tight"/>
-              </a:rPr>
-              <a:t>↺  and around again</a:t>
-            </a:r>
-          </a:p>
-        </p:txBody>
-      </p:sp>
-      <p:sp>
-        <p:nvSpPr>
-          <p:cNvPr id="21" name="TextBox 20"/>
+                <a:latin typeface="Source Serif 4"/>
+              </a:rPr>
+              <a:t>1</a:t>
+            </a:r>
+          </a:p>
+        </p:txBody>
+      </p:sp>
+      <p:sp>
+        <p:nvSpPr>
+          <p:cNvPr id="7" name="TextBox 6"/>
           <p:cNvSpPr txBox="1"/>
           <p:nvPr/>
         </p:nvSpPr>
         <p:spPr>
           <a:xfrm>
-            <a:off x="822960" y="4846320"/>
-            <a:ext cx="10515600" cy="1188720"/>
+            <a:off x="1463040" y="2231136"/>
+            <a:ext cx="9875520" cy="1005840"/>
           </a:xfrm>
           <a:prstGeom prst="rect">
             <a:avLst/>
@@ -10549,19 +10371,317 @@
           </a:bodyPr>
           <a:lstStyle/>
           <a:p>
-            <a:pPr algn="ctr">
-              <a:spcAft>
-                <a:spcPts val="900"/>
-              </a:spcAft>
-            </a:pPr>
-            <a:r>
-              <a:rPr sz="2000" b="0" i="1">
+            <a:pPr algn="l">
+              <a:spcAft>
+                <a:spcPts val="945"/>
+              </a:spcAft>
+            </a:pPr>
+            <a:r>
+              <a:rPr sz="2100" b="1" i="0">
+                <a:solidFill>
+                  <a:srgbClr val="1C1B19"/>
+                </a:solidFill>
+                <a:latin typeface="Source Serif 4"/>
+              </a:rPr>
+              <a:t>Raise confidence.</a:t>
+            </a:r>
+          </a:p>
+          <a:p>
+            <a:pPr algn="l">
+              <a:spcAft>
+                <a:spcPts val="945"/>
+              </a:spcAft>
+            </a:pPr>
+            <a:r>
+              <a:rPr sz="1600" b="0" i="0">
                 <a:solidFill>
                   <a:srgbClr val="5D5A54"/>
                 </a:solidFill>
                 <a:latin typeface="Source Serif 4"/>
               </a:rPr>
-              <a:t>Putting it off fixes the feeling for now. The stress comes back later, with interest.</a:t>
+              <a:t>Make step one tiny: open the doc, one ugly sentence.</a:t>
+            </a:r>
+          </a:p>
+        </p:txBody>
+      </p:sp>
+      <p:sp>
+        <p:nvSpPr>
+          <p:cNvPr id="8" name="TextBox 7"/>
+          <p:cNvSpPr txBox="1"/>
+          <p:nvPr/>
+        </p:nvSpPr>
+        <p:spPr>
+          <a:xfrm>
+            <a:off x="822960" y="3200400"/>
+            <a:ext cx="548640" cy="1005840"/>
+          </a:xfrm>
+          <a:prstGeom prst="rect">
+            <a:avLst/>
+          </a:prstGeom>
+          <a:noFill/>
+        </p:spPr>
+        <p:txBody>
+          <a:bodyPr wrap="square" anchor="t" lIns="0" rIns="0" tIns="0" bIns="0">
+            <a:spAutoFit/>
+          </a:bodyPr>
+          <a:lstStyle/>
+          <a:p>
+            <a:pPr algn="l">
+              <a:spcAft>
+                <a:spcPts val="1170"/>
+              </a:spcAft>
+            </a:pPr>
+            <a:r>
+              <a:rPr sz="2600" b="1" i="0">
+                <a:solidFill>
+                  <a:srgbClr val="F47B20"/>
+                </a:solidFill>
+                <a:latin typeface="Source Serif 4"/>
+              </a:rPr>
+              <a:t>2</a:t>
+            </a:r>
+          </a:p>
+        </p:txBody>
+      </p:sp>
+      <p:sp>
+        <p:nvSpPr>
+          <p:cNvPr id="9" name="TextBox 8"/>
+          <p:cNvSpPr txBox="1"/>
+          <p:nvPr/>
+        </p:nvSpPr>
+        <p:spPr>
+          <a:xfrm>
+            <a:off x="1463040" y="3236976"/>
+            <a:ext cx="9875520" cy="1005840"/>
+          </a:xfrm>
+          <a:prstGeom prst="rect">
+            <a:avLst/>
+          </a:prstGeom>
+          <a:noFill/>
+        </p:spPr>
+        <p:txBody>
+          <a:bodyPr wrap="square" anchor="t" lIns="0" rIns="0" tIns="0" bIns="0">
+            <a:spAutoFit/>
+          </a:bodyPr>
+          <a:lstStyle/>
+          <a:p>
+            <a:pPr algn="l">
+              <a:spcAft>
+                <a:spcPts val="945"/>
+              </a:spcAft>
+            </a:pPr>
+            <a:r>
+              <a:rPr sz="2100" b="1" i="0">
+                <a:solidFill>
+                  <a:srgbClr val="1C1B19"/>
+                </a:solidFill>
+                <a:latin typeface="Source Serif 4"/>
+              </a:rPr>
+              <a:t>Raise value.</a:t>
+            </a:r>
+          </a:p>
+          <a:p>
+            <a:pPr algn="l">
+              <a:spcAft>
+                <a:spcPts val="945"/>
+              </a:spcAft>
+            </a:pPr>
+            <a:r>
+              <a:rPr sz="1600" b="0" i="0">
+                <a:solidFill>
+                  <a:srgbClr val="5D5A54"/>
+                </a:solidFill>
+                <a:latin typeface="Source Serif 4"/>
+              </a:rPr>
+              <a:t>Tie it to something you care about. Good playlist only while working.</a:t>
+            </a:r>
+          </a:p>
+        </p:txBody>
+      </p:sp>
+      <p:sp>
+        <p:nvSpPr>
+          <p:cNvPr id="10" name="TextBox 9"/>
+          <p:cNvSpPr txBox="1"/>
+          <p:nvPr/>
+        </p:nvSpPr>
+        <p:spPr>
+          <a:xfrm>
+            <a:off x="822960" y="4206240"/>
+            <a:ext cx="548640" cy="1005840"/>
+          </a:xfrm>
+          <a:prstGeom prst="rect">
+            <a:avLst/>
+          </a:prstGeom>
+          <a:noFill/>
+        </p:spPr>
+        <p:txBody>
+          <a:bodyPr wrap="square" anchor="t" lIns="0" rIns="0" tIns="0" bIns="0">
+            <a:spAutoFit/>
+          </a:bodyPr>
+          <a:lstStyle/>
+          <a:p>
+            <a:pPr algn="l">
+              <a:spcAft>
+                <a:spcPts val="1170"/>
+              </a:spcAft>
+            </a:pPr>
+            <a:r>
+              <a:rPr sz="2600" b="1" i="0">
+                <a:solidFill>
+                  <a:srgbClr val="F47B20"/>
+                </a:solidFill>
+                <a:latin typeface="Source Serif 4"/>
+              </a:rPr>
+              <a:t>3</a:t>
+            </a:r>
+          </a:p>
+        </p:txBody>
+      </p:sp>
+      <p:sp>
+        <p:nvSpPr>
+          <p:cNvPr id="11" name="TextBox 10"/>
+          <p:cNvSpPr txBox="1"/>
+          <p:nvPr/>
+        </p:nvSpPr>
+        <p:spPr>
+          <a:xfrm>
+            <a:off x="1463040" y="4242816"/>
+            <a:ext cx="9875520" cy="1005840"/>
+          </a:xfrm>
+          <a:prstGeom prst="rect">
+            <a:avLst/>
+          </a:prstGeom>
+          <a:noFill/>
+        </p:spPr>
+        <p:txBody>
+          <a:bodyPr wrap="square" anchor="t" lIns="0" rIns="0" tIns="0" bIns="0">
+            <a:spAutoFit/>
+          </a:bodyPr>
+          <a:lstStyle/>
+          <a:p>
+            <a:pPr algn="l">
+              <a:spcAft>
+                <a:spcPts val="945"/>
+              </a:spcAft>
+            </a:pPr>
+            <a:r>
+              <a:rPr sz="2100" b="1" i="0">
+                <a:solidFill>
+                  <a:srgbClr val="1C1B19"/>
+                </a:solidFill>
+                <a:latin typeface="Source Serif 4"/>
+              </a:rPr>
+              <a:t>Add friction to the exit.</a:t>
+            </a:r>
+          </a:p>
+          <a:p>
+            <a:pPr algn="l">
+              <a:spcAft>
+                <a:spcPts val="945"/>
+              </a:spcAft>
+            </a:pPr>
+            <a:r>
+              <a:rPr sz="1600" b="0" i="0">
+                <a:solidFill>
+                  <a:srgbClr val="5D5A54"/>
+                </a:solidFill>
+                <a:latin typeface="Source Serif 4"/>
+              </a:rPr>
+              <a:t>Phone in another room, app timers on, one tab open.</a:t>
+            </a:r>
+          </a:p>
+        </p:txBody>
+      </p:sp>
+      <p:sp>
+        <p:nvSpPr>
+          <p:cNvPr id="12" name="TextBox 11"/>
+          <p:cNvSpPr txBox="1"/>
+          <p:nvPr/>
+        </p:nvSpPr>
+        <p:spPr>
+          <a:xfrm>
+            <a:off x="822960" y="5212080"/>
+            <a:ext cx="548640" cy="1005840"/>
+          </a:xfrm>
+          <a:prstGeom prst="rect">
+            <a:avLst/>
+          </a:prstGeom>
+          <a:noFill/>
+        </p:spPr>
+        <p:txBody>
+          <a:bodyPr wrap="square" anchor="t" lIns="0" rIns="0" tIns="0" bIns="0">
+            <a:spAutoFit/>
+          </a:bodyPr>
+          <a:lstStyle/>
+          <a:p>
+            <a:pPr algn="l">
+              <a:spcAft>
+                <a:spcPts val="1170"/>
+              </a:spcAft>
+            </a:pPr>
+            <a:r>
+              <a:rPr sz="2600" b="1" i="0">
+                <a:solidFill>
+                  <a:srgbClr val="F47B20"/>
+                </a:solidFill>
+                <a:latin typeface="Source Serif 4"/>
+              </a:rPr>
+              <a:t>4</a:t>
+            </a:r>
+          </a:p>
+        </p:txBody>
+      </p:sp>
+      <p:sp>
+        <p:nvSpPr>
+          <p:cNvPr id="13" name="TextBox 12"/>
+          <p:cNvSpPr txBox="1"/>
+          <p:nvPr/>
+        </p:nvSpPr>
+        <p:spPr>
+          <a:xfrm>
+            <a:off x="1463040" y="5248656"/>
+            <a:ext cx="9875520" cy="1005840"/>
+          </a:xfrm>
+          <a:prstGeom prst="rect">
+            <a:avLst/>
+          </a:prstGeom>
+          <a:noFill/>
+        </p:spPr>
+        <p:txBody>
+          <a:bodyPr wrap="square" anchor="t" lIns="0" rIns="0" tIns="0" bIns="0">
+            <a:spAutoFit/>
+          </a:bodyPr>
+          <a:lstStyle/>
+          <a:p>
+            <a:pPr algn="l">
+              <a:spcAft>
+                <a:spcPts val="945"/>
+              </a:spcAft>
+            </a:pPr>
+            <a:r>
+              <a:rPr sz="2100" b="1" i="0">
+                <a:solidFill>
+                  <a:srgbClr val="1C1B19"/>
+                </a:solidFill>
+                <a:latin typeface="Source Serif 4"/>
+              </a:rPr>
+              <a:t>Shrink the delay.</a:t>
+            </a:r>
+          </a:p>
+          <a:p>
+            <a:pPr algn="l">
+              <a:spcAft>
+                <a:spcPts val="945"/>
+              </a:spcAft>
+            </a:pPr>
+            <a:r>
+              <a:rPr sz="1600" b="0" i="0">
+                <a:solidFill>
+                  <a:srgbClr val="5D5A54"/>
+                </a:solidFill>
+                <a:latin typeface="Source Serif 4"/>
+              </a:rPr>
+              <a:t>Your own deadline days early. Tell someone who'll ask.</a:t>
             </a:r>
           </a:p>
         </p:txBody>
@@ -10670,7 +10790,7 @@
                 </a:solidFill>
                 <a:latin typeface="Inter Tight"/>
               </a:rPr>
-              <a:t>YOUR TURN</a:t>
+              <a:t>THREE STUCK STUDENTS</a:t>
             </a:r>
           </a:p>
         </p:txBody>
@@ -10716,23 +10836,64 @@
       </p:sp>
       <p:sp>
         <p:nvSpPr>
-          <p:cNvPr id="5" name="Rectangle 4"/>
+          <p:cNvPr id="5" name="TextBox 4"/>
+          <p:cNvSpPr txBox="1"/>
+          <p:nvPr/>
+        </p:nvSpPr>
+        <p:spPr>
+          <a:xfrm>
+            <a:off x="822960" y="1005840"/>
+            <a:ext cx="10515600" cy="914400"/>
+          </a:xfrm>
+          <a:prstGeom prst="rect">
+            <a:avLst/>
+          </a:prstGeom>
+          <a:noFill/>
+        </p:spPr>
+        <p:txBody>
+          <a:bodyPr wrap="square" anchor="t" lIns="0" rIns="0" tIns="0" bIns="0">
+            <a:spAutoFit/>
+          </a:bodyPr>
+          <a:lstStyle/>
+          <a:p>
+            <a:pPr algn="l">
+              <a:spcAft>
+                <a:spcPts val="1530"/>
+              </a:spcAft>
+            </a:pPr>
+            <a:r>
+              <a:rPr sz="3400" b="1" i="0">
+                <a:solidFill>
+                  <a:srgbClr val="1C1B19"/>
+                </a:solidFill>
+                <a:latin typeface="Source Serif 4"/>
+              </a:rPr>
+              <a:t>Which lever would help most?</a:t>
+            </a:r>
+          </a:p>
+        </p:txBody>
+      </p:sp>
+      <p:sp>
+        <p:nvSpPr>
+          <p:cNvPr id="6" name="Rectangle 5"/>
           <p:cNvSpPr/>
           <p:nvPr/>
         </p:nvSpPr>
         <p:spPr>
           <a:xfrm>
-            <a:off x="822960" y="1371600"/>
-            <a:ext cx="73152" cy="3566160"/>
+            <a:off x="822960" y="2103120"/>
+            <a:ext cx="3322320" cy="3840480"/>
           </a:xfrm>
           <a:prstGeom prst="rect">
             <a:avLst/>
           </a:prstGeom>
           <a:solidFill>
-            <a:srgbClr val="F47B20"/>
+            <a:srgbClr val="FFFFFF"/>
           </a:solidFill>
-          <a:ln>
-            <a:noFill/>
+          <a:ln w="15875">
+            <a:solidFill>
+              <a:srgbClr val="D8D2C6"/>
+            </a:solidFill>
           </a:ln>
           <a:effectLst/>
         </p:spPr>
@@ -10760,53 +10921,14 @@
       </p:sp>
       <p:sp>
         <p:nvSpPr>
-          <p:cNvPr id="6" name="TextBox 5"/>
-          <p:cNvSpPr txBox="1"/>
-          <p:nvPr/>
-        </p:nvSpPr>
-        <p:spPr>
-          <a:xfrm>
-            <a:off x="1188720" y="1371600"/>
-            <a:ext cx="10058400" cy="3566160"/>
-          </a:xfrm>
-          <a:prstGeom prst="rect">
-            <a:avLst/>
-          </a:prstGeom>
-          <a:noFill/>
-        </p:spPr>
-        <p:txBody>
-          <a:bodyPr wrap="square" anchor="ctr" lIns="0" rIns="0" tIns="0" bIns="0">
-            <a:spAutoFit/>
-          </a:bodyPr>
-          <a:lstStyle/>
-          <a:p>
-            <a:pPr algn="l">
-              <a:spcAft>
-                <a:spcPts val="1800"/>
-              </a:spcAft>
-            </a:pPr>
-            <a:r>
-              <a:rPr sz="4000" b="0" i="1">
-                <a:solidFill>
-                  <a:srgbClr val="1C1B19"/>
-                </a:solidFill>
-                <a:latin typeface="Source Serif 4"/>
-              </a:rPr>
-              <a:t>What feeling shows up right before you put something off?</a:t>
-            </a:r>
-          </a:p>
-        </p:txBody>
-      </p:sp>
-      <p:sp>
-        <p:nvSpPr>
           <p:cNvPr id="7" name="TextBox 6"/>
           <p:cNvSpPr txBox="1"/>
           <p:nvPr/>
         </p:nvSpPr>
         <p:spPr>
           <a:xfrm>
-            <a:off x="1188720" y="5120640"/>
-            <a:ext cx="10058400" cy="914400"/>
+            <a:off x="1051560" y="2286000"/>
+            <a:ext cx="2865120" cy="365760"/>
           </a:xfrm>
           <a:prstGeom prst="rect">
             <a:avLst/>
@@ -10821,17 +10943,304 @@
           <a:p>
             <a:pPr algn="l">
               <a:spcAft>
+                <a:spcPts val="585"/>
+              </a:spcAft>
+            </a:pPr>
+            <a:r>
+              <a:rPr sz="1300" b="1" i="0">
+                <a:solidFill>
+                  <a:srgbClr val="0B2D5B"/>
+                </a:solidFill>
+                <a:latin typeface="Inter Tight"/>
+              </a:rPr>
+              <a:t>JORDAN</a:t>
+            </a:r>
+          </a:p>
+        </p:txBody>
+      </p:sp>
+      <p:sp>
+        <p:nvSpPr>
+          <p:cNvPr id="8" name="TextBox 7"/>
+          <p:cNvSpPr txBox="1"/>
+          <p:nvPr/>
+        </p:nvSpPr>
+        <p:spPr>
+          <a:xfrm>
+            <a:off x="1051560" y="2743200"/>
+            <a:ext cx="2865120" cy="3017520"/>
+          </a:xfrm>
+          <a:prstGeom prst="rect">
+            <a:avLst/>
+          </a:prstGeom>
+          <a:noFill/>
+        </p:spPr>
+        <p:txBody>
+          <a:bodyPr wrap="square" anchor="t" lIns="0" rIns="0" tIns="0" bIns="0">
+            <a:spAutoFit/>
+          </a:bodyPr>
+          <a:lstStyle/>
+          <a:p>
+            <a:pPr algn="l">
+              <a:spcAft>
                 <a:spcPts val="810"/>
               </a:spcAft>
             </a:pPr>
             <a:r>
               <a:rPr sz="1800" b="0" i="0">
                 <a:solidFill>
-                  <a:srgbClr val="5D5A54"/>
+                  <a:srgbClr val="1C1B19"/>
+                </a:solidFill>
+                <a:latin typeface="Source Serif 4"/>
+              </a:rPr>
+              <a:t>His first big English essay is due Monday. He keeps rewriting the first sentence, then closing the laptop.</a:t>
+            </a:r>
+          </a:p>
+        </p:txBody>
+      </p:sp>
+      <p:sp>
+        <p:nvSpPr>
+          <p:cNvPr id="9" name="Rectangle 8"/>
+          <p:cNvSpPr/>
+          <p:nvPr/>
+        </p:nvSpPr>
+        <p:spPr>
+          <a:xfrm>
+            <a:off x="4419600" y="2103120"/>
+            <a:ext cx="3322320" cy="3840480"/>
+          </a:xfrm>
+          <a:prstGeom prst="rect">
+            <a:avLst/>
+          </a:prstGeom>
+          <a:solidFill>
+            <a:srgbClr val="FFFFFF"/>
+          </a:solidFill>
+          <a:ln w="15875">
+            <a:solidFill>
+              <a:srgbClr val="D8D2C6"/>
+            </a:solidFill>
+          </a:ln>
+          <a:effectLst/>
+        </p:spPr>
+        <p:style>
+          <a:lnRef idx="1">
+            <a:schemeClr val="accent1"/>
+          </a:lnRef>
+          <a:fillRef idx="3">
+            <a:schemeClr val="accent1"/>
+          </a:fillRef>
+          <a:effectRef idx="2">
+            <a:schemeClr val="accent1"/>
+          </a:effectRef>
+          <a:fontRef idx="minor">
+            <a:schemeClr val="lt1"/>
+          </a:fontRef>
+        </p:style>
+        <p:txBody>
+          <a:bodyPr rtlCol="0" anchor="ctr"/>
+          <a:lstStyle/>
+          <a:p>
+            <a:pPr algn="ctr"/>
+          </a:p>
+        </p:txBody>
+      </p:sp>
+      <p:sp>
+        <p:nvSpPr>
+          <p:cNvPr id="10" name="TextBox 9"/>
+          <p:cNvSpPr txBox="1"/>
+          <p:nvPr/>
+        </p:nvSpPr>
+        <p:spPr>
+          <a:xfrm>
+            <a:off x="4648200" y="2286000"/>
+            <a:ext cx="2865120" cy="365760"/>
+          </a:xfrm>
+          <a:prstGeom prst="rect">
+            <a:avLst/>
+          </a:prstGeom>
+          <a:noFill/>
+        </p:spPr>
+        <p:txBody>
+          <a:bodyPr wrap="square" anchor="t" lIns="0" rIns="0" tIns="0" bIns="0">
+            <a:spAutoFit/>
+          </a:bodyPr>
+          <a:lstStyle/>
+          <a:p>
+            <a:pPr algn="l">
+              <a:spcAft>
+                <a:spcPts val="585"/>
+              </a:spcAft>
+            </a:pPr>
+            <a:r>
+              <a:rPr sz="1300" b="1" i="0">
+                <a:solidFill>
+                  <a:srgbClr val="0B2D5B"/>
                 </a:solidFill>
                 <a:latin typeface="Inter Tight"/>
               </a:rPr>
-              <a:t>One per card. No names. Be specific.</a:t>
+              <a:t>PRIYA</a:t>
+            </a:r>
+          </a:p>
+        </p:txBody>
+      </p:sp>
+      <p:sp>
+        <p:nvSpPr>
+          <p:cNvPr id="11" name="TextBox 10"/>
+          <p:cNvSpPr txBox="1"/>
+          <p:nvPr/>
+        </p:nvSpPr>
+        <p:spPr>
+          <a:xfrm>
+            <a:off x="4648200" y="2743200"/>
+            <a:ext cx="2865120" cy="3017520"/>
+          </a:xfrm>
+          <a:prstGeom prst="rect">
+            <a:avLst/>
+          </a:prstGeom>
+          <a:noFill/>
+        </p:spPr>
+        <p:txBody>
+          <a:bodyPr wrap="square" anchor="t" lIns="0" rIns="0" tIns="0" bIns="0">
+            <a:spAutoFit/>
+          </a:bodyPr>
+          <a:lstStyle/>
+          <a:p>
+            <a:pPr algn="l">
+              <a:spcAft>
+                <a:spcPts val="810"/>
+              </a:spcAft>
+            </a:pPr>
+            <a:r>
+              <a:rPr sz="1800" b="0" i="0">
+                <a:solidFill>
+                  <a:srgbClr val="1C1B19"/>
+                </a:solidFill>
+                <a:latin typeface="Source Serif 4"/>
+              </a:rPr>
+              <a:t>Watches her little cousins until her aunt gets home. She means to start her history project every night but scrolls until midnight.</a:t>
+            </a:r>
+          </a:p>
+        </p:txBody>
+      </p:sp>
+      <p:sp>
+        <p:nvSpPr>
+          <p:cNvPr id="12" name="Rectangle 11"/>
+          <p:cNvSpPr/>
+          <p:nvPr/>
+        </p:nvSpPr>
+        <p:spPr>
+          <a:xfrm>
+            <a:off x="8016239" y="2103120"/>
+            <a:ext cx="3322320" cy="3840480"/>
+          </a:xfrm>
+          <a:prstGeom prst="rect">
+            <a:avLst/>
+          </a:prstGeom>
+          <a:solidFill>
+            <a:srgbClr val="FFFFFF"/>
+          </a:solidFill>
+          <a:ln w="15875">
+            <a:solidFill>
+              <a:srgbClr val="D8D2C6"/>
+            </a:solidFill>
+          </a:ln>
+          <a:effectLst/>
+        </p:spPr>
+        <p:style>
+          <a:lnRef idx="1">
+            <a:schemeClr val="accent1"/>
+          </a:lnRef>
+          <a:fillRef idx="3">
+            <a:schemeClr val="accent1"/>
+          </a:fillRef>
+          <a:effectRef idx="2">
+            <a:schemeClr val="accent1"/>
+          </a:effectRef>
+          <a:fontRef idx="minor">
+            <a:schemeClr val="lt1"/>
+          </a:fontRef>
+        </p:style>
+        <p:txBody>
+          <a:bodyPr rtlCol="0" anchor="ctr"/>
+          <a:lstStyle/>
+          <a:p>
+            <a:pPr algn="ctr"/>
+          </a:p>
+        </p:txBody>
+      </p:sp>
+      <p:sp>
+        <p:nvSpPr>
+          <p:cNvPr id="13" name="TextBox 12"/>
+          <p:cNvSpPr txBox="1"/>
+          <p:nvPr/>
+        </p:nvSpPr>
+        <p:spPr>
+          <a:xfrm>
+            <a:off x="8244839" y="2286000"/>
+            <a:ext cx="2865120" cy="365760"/>
+          </a:xfrm>
+          <a:prstGeom prst="rect">
+            <a:avLst/>
+          </a:prstGeom>
+          <a:noFill/>
+        </p:spPr>
+        <p:txBody>
+          <a:bodyPr wrap="square" anchor="t" lIns="0" rIns="0" tIns="0" bIns="0">
+            <a:spAutoFit/>
+          </a:bodyPr>
+          <a:lstStyle/>
+          <a:p>
+            <a:pPr algn="l">
+              <a:spcAft>
+                <a:spcPts val="585"/>
+              </a:spcAft>
+            </a:pPr>
+            <a:r>
+              <a:rPr sz="1300" b="1" i="0">
+                <a:solidFill>
+                  <a:srgbClr val="0B2D5B"/>
+                </a:solidFill>
+                <a:latin typeface="Inter Tight"/>
+              </a:rPr>
+              <a:t>MARCUS</a:t>
+            </a:r>
+          </a:p>
+        </p:txBody>
+      </p:sp>
+      <p:sp>
+        <p:nvSpPr>
+          <p:cNvPr id="14" name="TextBox 13"/>
+          <p:cNvSpPr txBox="1"/>
+          <p:nvPr/>
+        </p:nvSpPr>
+        <p:spPr>
+          <a:xfrm>
+            <a:off x="8244839" y="2743200"/>
+            <a:ext cx="2865120" cy="3017520"/>
+          </a:xfrm>
+          <a:prstGeom prst="rect">
+            <a:avLst/>
+          </a:prstGeom>
+          <a:noFill/>
+        </p:spPr>
+        <p:txBody>
+          <a:bodyPr wrap="square" anchor="t" lIns="0" rIns="0" tIns="0" bIns="0">
+            <a:spAutoFit/>
+          </a:bodyPr>
+          <a:lstStyle/>
+          <a:p>
+            <a:pPr algn="l">
+              <a:spcAft>
+                <a:spcPts val="810"/>
+              </a:spcAft>
+            </a:pPr>
+            <a:r>
+              <a:rPr sz="1800" b="0" i="0">
+                <a:solidFill>
+                  <a:srgbClr val="1C1B19"/>
+                </a:solidFill>
+                <a:latin typeface="Source Serif 4"/>
+              </a:rPr>
+              <a:t>Says he works best the night before. His last three lab report grades dropped, and he's dragging at morning practice.</a:t>
             </a:r>
           </a:p>
         </p:txBody>

--- a/decks/why-you-cant-start-lesson-v2.pptx
+++ b/decks/why-you-cant-start-lesson-v2.pptx
@@ -7555,6 +7555,45 @@
                 <a:latin typeface="Inter Tight"/>
               </a:rPr>
               <a:t>Beaver Upper School · Counseling</a:t>
+            </a:r>
+          </a:p>
+        </p:txBody>
+      </p:sp>
+      <p:sp>
+        <p:nvSpPr>
+          <p:cNvPr id="8" name="TextBox 7"/>
+          <p:cNvSpPr txBox="1"/>
+          <p:nvPr/>
+        </p:nvSpPr>
+        <p:spPr>
+          <a:xfrm>
+            <a:off x="6766560" y="5897880"/>
+            <a:ext cx="4846320" cy="640080"/>
+          </a:xfrm>
+          <a:prstGeom prst="rect">
+            <a:avLst/>
+          </a:prstGeom>
+          <a:noFill/>
+        </p:spPr>
+        <p:txBody>
+          <a:bodyPr wrap="square" anchor="t" lIns="0" rIns="0" tIns="0" bIns="0">
+            <a:spAutoFit/>
+          </a:bodyPr>
+          <a:lstStyle/>
+          <a:p>
+            <a:pPr algn="r">
+              <a:spcAft>
+                <a:spcPts val="495"/>
+              </a:spcAft>
+            </a:pPr>
+            <a:r>
+              <a:rPr sz="1100" b="0" i="0">
+                <a:solidFill>
+                  <a:srgbClr val="E8E4DA"/>
+                </a:solidFill>
+                <a:latin typeface="Inter Tight"/>
+              </a:rPr>
+              <a:t>Written by Dr. Rick Wilson, with AI-assisted drafting. Every lesson is reviewed and edited by Dr. Wilson.</a:t>
             </a:r>
           </a:p>
         </p:txBody>
